--- a/docs/presentations/gitlab-compliance-dedicated-nexus-impact.pptx
+++ b/docs/presentations/gitlab-compliance-dedicated-nexus-impact.pptx
@@ -20,6 +20,7 @@
     <p:sldId id="268" r:id="rId19"/>
     <p:sldId id="269" r:id="rId20"/>
     <p:sldId id="270" r:id="rId21"/>
+    <p:sldId id="271" r:id="rId22"/>
   </p:sldIdLst>
   <p:sldSz cx="12191695" cy="6858000" type="screen4x3"/>
   <p:notesSz cx="6858000" cy="9144000"/>
@@ -3320,7 +3321,7 @@
         <p:spPr>
           <a:xfrm>
             <a:off x="777240" y="3200400"/>
-            <a:ext cx="10058400" cy="914400"/>
+            <a:ext cx="10058400" cy="1005840"/>
           </a:xfrm>
           <a:prstGeom prst="rect">
             <a:avLst/>
@@ -3341,7 +3342,7 @@
                 </a:solidFill>
                 <a:latin typeface="Calibri"/>
               </a:rPr>
-              <a:t>How check, local shell scans, supply-chain remediations, and documentation commands create visibility and reduce migration risk.</a:t>
+              <a:t>Check, shell scans, supply-chain remediations, and documentation create visibility for migration — and easy-to-understand policies keep standards alive after cutover.</a:t>
             </a:r>
           </a:p>
         </p:txBody>
@@ -3396,7 +3397,7 @@
                 </a:solidFill>
                 <a:latin typeface="Calibri"/>
               </a:rPr>
-              <a:t>Focus: check · shell scan · supply chain · document/generate</a:t>
+              <a:t>Focus: check · shell scan · supply chain · document · readable policies</a:t>
             </a:r>
           </a:p>
         </p:txBody>
@@ -3578,7 +3579,7 @@
                 </a:solidFill>
                 <a:latin typeface="Calibri"/>
               </a:rPr>
-              <a:t>Supporting the GitLab Dedicated migration</a:t>
+              <a:t>document / generate — make debt discussable</a:t>
             </a:r>
           </a:p>
         </p:txBody>
@@ -3613,7 +3614,7 @@
                 </a:solidFill>
                 <a:latin typeface="Calibri"/>
               </a:rPr>
-              <a:t>From unknown debt → sequenced remediation → cutover confidence</a:t>
+              <a:t>Living pipeline docs for migration and compliance forums</a:t>
             </a:r>
           </a:p>
         </p:txBody>
@@ -3648,7 +3649,7 @@
                 </a:solidFill>
                 <a:latin typeface="Calibri"/>
               </a:rPr>
-              <a:t>Impact briefing  ·  Dedicated migration · Nexus · tech debt</a:t>
+              <a:t>Impact briefing  ·  Dedicated · Nexus · tech debt · ongoing standards</a:t>
             </a:r>
           </a:p>
         </p:txBody>
@@ -3683,7 +3684,7 @@
                 </a:solidFill>
                 <a:latin typeface="Calibri"/>
               </a:rPr>
-              <a:t>10 / 15</a:t>
+              <a:t>10 / 16</a:t>
             </a:r>
           </a:p>
         </p:txBody>
@@ -3696,8 +3697,8 @@
         </p:nvSpPr>
         <p:spPr>
           <a:xfrm>
-            <a:off x="594360" y="1417320"/>
-            <a:ext cx="10972800" cy="777240"/>
+            <a:off x="594360" y="1463040"/>
+            <a:ext cx="5394960" cy="4297680"/>
           </a:xfrm>
           <a:prstGeom prst="rect">
             <a:avLst/>
@@ -3739,8 +3740,8 @@
         </p:nvSpPr>
         <p:spPr>
           <a:xfrm>
-            <a:off x="594360" y="1417320"/>
-            <a:ext cx="2011680" cy="777240"/>
+            <a:off x="594360" y="1463040"/>
+            <a:ext cx="5394960" cy="548640"/>
           </a:xfrm>
           <a:prstGeom prst="rect">
             <a:avLst/>
@@ -3782,29 +3783,29 @@
         </p:nvSpPr>
         <p:spPr>
           <a:xfrm>
-            <a:off x="685800" y="1645920"/>
-            <a:ext cx="1828800" cy="365760"/>
-          </a:xfrm>
-          <a:prstGeom prst="rect">
-            <a:avLst/>
-          </a:prstGeom>
-          <a:noFill/>
-        </p:spPr>
-        <p:txBody>
-          <a:bodyPr wrap="square">
-            <a:spAutoFit/>
-          </a:bodyPr>
-          <a:lstStyle/>
-          <a:p>
-            <a:pPr algn="ctr"/>
-            <a:r>
-              <a:rPr sz="1400" b="1">
+            <a:off x="822960" y="1572768"/>
+            <a:ext cx="4937760" cy="365760"/>
+          </a:xfrm>
+          <a:prstGeom prst="rect">
+            <a:avLst/>
+          </a:prstGeom>
+          <a:noFill/>
+        </p:spPr>
+        <p:txBody>
+          <a:bodyPr wrap="square">
+            <a:spAutoFit/>
+          </a:bodyPr>
+          <a:lstStyle/>
+          <a:p>
+            <a:pPr algn="l"/>
+            <a:r>
+              <a:rPr sz="1700" b="1">
                 <a:solidFill>
                   <a:srgbClr val="FFFFFF"/>
                 </a:solidFill>
                 <a:latin typeface="Calibri"/>
               </a:rPr>
-              <a:t>Discover</a:t>
+              <a:t>generate</a:t>
             </a:r>
           </a:p>
         </p:txBody>
@@ -3817,21 +3818,25 @@
         </p:nvSpPr>
         <p:spPr>
           <a:xfrm>
-            <a:off x="2834640" y="1645920"/>
-            <a:ext cx="8412480" cy="411480"/>
-          </a:xfrm>
-          <a:prstGeom prst="rect">
-            <a:avLst/>
-          </a:prstGeom>
-          <a:noFill/>
-        </p:spPr>
-        <p:txBody>
-          <a:bodyPr wrap="square">
-            <a:spAutoFit/>
-          </a:bodyPr>
-          <a:lstStyle/>
-          <a:p>
-            <a:pPr algn="l"/>
+            <a:off x="868680" y="2240280"/>
+            <a:ext cx="4846320" cy="3200400"/>
+          </a:xfrm>
+          <a:prstGeom prst="rect">
+            <a:avLst/>
+          </a:prstGeom>
+          <a:noFill/>
+        </p:spPr>
+        <p:txBody>
+          <a:bodyPr wrap="square">
+            <a:spAutoFit/>
+          </a:bodyPr>
+          <a:lstStyle/>
+          <a:p>
+            <a:pPr>
+              <a:spcAft>
+                <a:spcPts val="800"/>
+              </a:spcAft>
+            </a:pPr>
             <a:r>
               <a:rPr sz="1400" b="0">
                 <a:solidFill>
@@ -3839,7 +3844,55 @@
                 </a:solidFill>
                 <a:latin typeface="Calibri"/>
               </a:rPr>
-              <a:t>Shell-scan migration cohorts with check; export markdown/HTML debt reports.</a:t>
+              <a:t>Full pipeline reference from .gitlab-ci.yml</a:t>
+            </a:r>
+          </a:p>
+          <a:p>
+            <a:pPr>
+              <a:spcAft>
+                <a:spcPts val="800"/>
+              </a:spcAft>
+            </a:pPr>
+            <a:r>
+              <a:rPr sz="1400" b="0">
+                <a:solidFill>
+                  <a:srgbClr val="2A3B46"/>
+                </a:solidFill>
+                <a:latin typeface="Calibri"/>
+              </a:rPr>
+              <a:t>Formats: markdown, swagger-markdown, HTML</a:t>
+            </a:r>
+          </a:p>
+          <a:p>
+            <a:pPr>
+              <a:spcAft>
+                <a:spcPts val="800"/>
+              </a:spcAft>
+            </a:pPr>
+            <a:r>
+              <a:rPr sz="1400" b="0">
+                <a:solidFill>
+                  <a:srgbClr val="2A3B46"/>
+                </a:solidFill>
+                <a:latin typeface="Calibri"/>
+              </a:rPr>
+              <a:t>Exclude/group to match audience</a:t>
+            </a:r>
+          </a:p>
+          <a:p>
+            <a:pPr>
+              <a:spcAft>
+                <a:spcPts val="800"/>
+              </a:spcAft>
+            </a:pPr>
+            <a:r>
+              <a:rPr sz="1400" b="0">
+                <a:solidFill>
+                  <a:srgbClr val="2A3B46"/>
+                </a:solidFill>
+                <a:latin typeface="Calibri"/>
+              </a:rPr>
+              <a:t>Attach as CI artefact for Dedicated review packs</a:t>
             </a:r>
           </a:p>
         </p:txBody>
@@ -3852,8 +3905,8 @@
         </p:nvSpPr>
         <p:spPr>
           <a:xfrm>
-            <a:off x="594360" y="2286000"/>
-            <a:ext cx="10972800" cy="777240"/>
+            <a:off x="6217920" y="1463040"/>
+            <a:ext cx="5394960" cy="4297680"/>
           </a:xfrm>
           <a:prstGeom prst="rect">
             <a:avLst/>
@@ -3895,14 +3948,14 @@
         </p:nvSpPr>
         <p:spPr>
           <a:xfrm>
-            <a:off x="594360" y="2286000"/>
-            <a:ext cx="2011680" cy="777240"/>
+            <a:off x="6217920" y="1463040"/>
+            <a:ext cx="5394960" cy="548640"/>
           </a:xfrm>
           <a:prstGeom prst="rect">
             <a:avLst/>
           </a:prstGeom>
           <a:solidFill>
-            <a:srgbClr val="1A6B63"/>
+            <a:srgbClr val="C47A28"/>
           </a:solidFill>
           <a:ln>
             <a:noFill/>
@@ -3938,29 +3991,29 @@
         </p:nvSpPr>
         <p:spPr>
           <a:xfrm>
-            <a:off x="685800" y="2514600"/>
-            <a:ext cx="1828800" cy="365760"/>
-          </a:xfrm>
-          <a:prstGeom prst="rect">
-            <a:avLst/>
-          </a:prstGeom>
-          <a:noFill/>
-        </p:spPr>
-        <p:txBody>
-          <a:bodyPr wrap="square">
-            <a:spAutoFit/>
-          </a:bodyPr>
-          <a:lstStyle/>
-          <a:p>
-            <a:pPr algn="ctr"/>
-            <a:r>
-              <a:rPr sz="1400" b="1">
+            <a:off x="6446520" y="1572768"/>
+            <a:ext cx="4937760" cy="365760"/>
+          </a:xfrm>
+          <a:prstGeom prst="rect">
+            <a:avLst/>
+          </a:prstGeom>
+          <a:noFill/>
+        </p:spPr>
+        <p:txBody>
+          <a:bodyPr wrap="square">
+            <a:spAutoFit/>
+          </a:bodyPr>
+          <a:lstStyle/>
+          <a:p>
+            <a:pPr algn="l"/>
+            <a:r>
+              <a:rPr sz="1700" b="1">
                 <a:solidFill>
                   <a:srgbClr val="FFFFFF"/>
                 </a:solidFill>
                 <a:latin typeface="Calibri"/>
               </a:rPr>
-              <a:t>Prioritise</a:t>
+              <a:t>document gitstrings</a:t>
             </a:r>
           </a:p>
         </p:txBody>
@@ -3973,21 +4026,25 @@
         </p:nvSpPr>
         <p:spPr>
           <a:xfrm>
-            <a:off x="2834640" y="2514600"/>
-            <a:ext cx="8412480" cy="411480"/>
-          </a:xfrm>
-          <a:prstGeom prst="rect">
-            <a:avLst/>
-          </a:prstGeom>
-          <a:noFill/>
-        </p:spPr>
-        <p:txBody>
-          <a:bodyPr wrap="square">
-            <a:spAutoFit/>
-          </a:bodyPr>
-          <a:lstStyle/>
-          <a:p>
-            <a:pPr algn="l"/>
+            <a:off x="6492240" y="2240280"/>
+            <a:ext cx="4846320" cy="3200400"/>
+          </a:xfrm>
+          <a:prstGeom prst="rect">
+            <a:avLst/>
+          </a:prstGeom>
+          <a:noFill/>
+        </p:spPr>
+        <p:txBody>
+          <a:bodyPr wrap="square">
+            <a:spAutoFit/>
+          </a:bodyPr>
+          <a:lstStyle/>
+          <a:p>
+            <a:pPr>
+              <a:spcAft>
+                <a:spcPts val="800"/>
+              </a:spcAft>
+            </a:pPr>
             <a:r>
               <a:rPr sz="1400" b="0">
                 <a:solidFill>
@@ -3995,155 +4052,15 @@
                 </a:solidFill>
                 <a:latin typeface="Calibri"/>
               </a:rPr>
-              <a:t>Rank projects by supply-chain severity, API gaps, and undocumented pipelines.</a:t>
-            </a:r>
-          </a:p>
-        </p:txBody>
-      </p:sp>
-      <p:sp>
-        <p:nvSpPr>
-          <p:cNvPr id="17" name="Rectangle 16"/>
-          <p:cNvSpPr/>
-          <p:nvPr/>
-        </p:nvSpPr>
-        <p:spPr>
-          <a:xfrm>
-            <a:off x="594360" y="3154680"/>
-            <a:ext cx="10972800" cy="777240"/>
-          </a:xfrm>
-          <a:prstGeom prst="rect">
-            <a:avLst/>
-          </a:prstGeom>
-          <a:solidFill>
-            <a:srgbClr val="FFFFFF"/>
-          </a:solidFill>
-          <a:ln>
-            <a:noFill/>
-          </a:ln>
-        </p:spPr>
-        <p:style>
-          <a:lnRef idx="1">
-            <a:schemeClr val="accent1"/>
-          </a:lnRef>
-          <a:fillRef idx="3">
-            <a:schemeClr val="accent1"/>
-          </a:fillRef>
-          <a:effectRef idx="2">
-            <a:schemeClr val="accent1"/>
-          </a:effectRef>
-          <a:fontRef idx="minor">
-            <a:schemeClr val="lt1"/>
-          </a:fontRef>
-        </p:style>
-        <p:txBody>
-          <a:bodyPr rtlCol="0" anchor="ctr"/>
-          <a:lstStyle/>
-          <a:p>
-            <a:pPr algn="ctr"/>
-          </a:p>
-        </p:txBody>
-      </p:sp>
-      <p:sp>
-        <p:nvSpPr>
-          <p:cNvPr id="18" name="Rectangle 17"/>
-          <p:cNvSpPr/>
-          <p:nvPr/>
-        </p:nvSpPr>
-        <p:spPr>
-          <a:xfrm>
-            <a:off x="594360" y="3154680"/>
-            <a:ext cx="2011680" cy="777240"/>
-          </a:xfrm>
-          <a:prstGeom prst="rect">
-            <a:avLst/>
-          </a:prstGeom>
-          <a:solidFill>
-            <a:srgbClr val="1A6B63"/>
-          </a:solidFill>
-          <a:ln>
-            <a:noFill/>
-          </a:ln>
-        </p:spPr>
-        <p:style>
-          <a:lnRef idx="1">
-            <a:schemeClr val="accent1"/>
-          </a:lnRef>
-          <a:fillRef idx="3">
-            <a:schemeClr val="accent1"/>
-          </a:fillRef>
-          <a:effectRef idx="2">
-            <a:schemeClr val="accent1"/>
-          </a:effectRef>
-          <a:fontRef idx="minor">
-            <a:schemeClr val="lt1"/>
-          </a:fontRef>
-        </p:style>
-        <p:txBody>
-          <a:bodyPr rtlCol="0" anchor="ctr"/>
-          <a:lstStyle/>
-          <a:p>
-            <a:pPr algn="ctr"/>
-          </a:p>
-        </p:txBody>
-      </p:sp>
-      <p:sp>
-        <p:nvSpPr>
-          <p:cNvPr id="19" name="TextBox 18"/>
-          <p:cNvSpPr txBox="1"/>
-          <p:nvPr/>
-        </p:nvSpPr>
-        <p:spPr>
-          <a:xfrm>
-            <a:off x="685800" y="3383280"/>
-            <a:ext cx="1828800" cy="365760"/>
-          </a:xfrm>
-          <a:prstGeom prst="rect">
-            <a:avLst/>
-          </a:prstGeom>
-          <a:noFill/>
-        </p:spPr>
-        <p:txBody>
-          <a:bodyPr wrap="square">
-            <a:spAutoFit/>
-          </a:bodyPr>
-          <a:lstStyle/>
-          <a:p>
-            <a:pPr algn="ctr"/>
-            <a:r>
-              <a:rPr sz="1400" b="1">
-                <a:solidFill>
-                  <a:srgbClr val="FFFFFF"/>
-                </a:solidFill>
-                <a:latin typeface="Calibri"/>
-              </a:rPr>
-              <a:t>Remediate</a:t>
-            </a:r>
-          </a:p>
-        </p:txBody>
-      </p:sp>
-      <p:sp>
-        <p:nvSpPr>
-          <p:cNvPr id="20" name="TextBox 19"/>
-          <p:cNvSpPr txBox="1"/>
-          <p:nvPr/>
-        </p:nvSpPr>
-        <p:spPr>
-          <a:xfrm>
-            <a:off x="2834640" y="3383280"/>
-            <a:ext cx="8412480" cy="411480"/>
-          </a:xfrm>
-          <a:prstGeom prst="rect">
-            <a:avLst/>
-          </a:prstGeom>
-          <a:noFill/>
-        </p:spPr>
-        <p:txBody>
-          <a:bodyPr wrap="square">
-            <a:spAutoFit/>
-          </a:bodyPr>
-          <a:lstStyle/>
-          <a:p>
-            <a:pPr algn="l"/>
+              <a:t>Fragment docs for inputs, variables, snippets</a:t>
+            </a:r>
+          </a:p>
+          <a:p>
+            <a:pPr>
+              <a:spcAft>
+                <a:spcPts val="800"/>
+              </a:spcAft>
+            </a:pPr>
             <a:r>
               <a:rPr sz="1400" b="0">
                 <a:solidFill>
@@ -4151,155 +4068,15 @@
                 </a:solidFill>
                 <a:latin typeface="Calibri"/>
               </a:rPr>
-              <a:t>Use --fix-supply-chain / --fix-policies / --create-mr; review diffs before merge.</a:t>
-            </a:r>
-          </a:p>
-        </p:txBody>
-      </p:sp>
-      <p:sp>
-        <p:nvSpPr>
-          <p:cNvPr id="21" name="Rectangle 20"/>
-          <p:cNvSpPr/>
-          <p:nvPr/>
-        </p:nvSpPr>
-        <p:spPr>
-          <a:xfrm>
-            <a:off x="594360" y="4023359"/>
-            <a:ext cx="10972800" cy="777240"/>
-          </a:xfrm>
-          <a:prstGeom prst="rect">
-            <a:avLst/>
-          </a:prstGeom>
-          <a:solidFill>
-            <a:srgbClr val="FFFFFF"/>
-          </a:solidFill>
-          <a:ln>
-            <a:noFill/>
-          </a:ln>
-        </p:spPr>
-        <p:style>
-          <a:lnRef idx="1">
-            <a:schemeClr val="accent1"/>
-          </a:lnRef>
-          <a:fillRef idx="3">
-            <a:schemeClr val="accent1"/>
-          </a:fillRef>
-          <a:effectRef idx="2">
-            <a:schemeClr val="accent1"/>
-          </a:effectRef>
-          <a:fontRef idx="minor">
-            <a:schemeClr val="lt1"/>
-          </a:fontRef>
-        </p:style>
-        <p:txBody>
-          <a:bodyPr rtlCol="0" anchor="ctr"/>
-          <a:lstStyle/>
-          <a:p>
-            <a:pPr algn="ctr"/>
-          </a:p>
-        </p:txBody>
-      </p:sp>
-      <p:sp>
-        <p:nvSpPr>
-          <p:cNvPr id="22" name="Rectangle 21"/>
-          <p:cNvSpPr/>
-          <p:nvPr/>
-        </p:nvSpPr>
-        <p:spPr>
-          <a:xfrm>
-            <a:off x="594360" y="4023359"/>
-            <a:ext cx="2011680" cy="777240"/>
-          </a:xfrm>
-          <a:prstGeom prst="rect">
-            <a:avLst/>
-          </a:prstGeom>
-          <a:solidFill>
-            <a:srgbClr val="1A6B63"/>
-          </a:solidFill>
-          <a:ln>
-            <a:noFill/>
-          </a:ln>
-        </p:spPr>
-        <p:style>
-          <a:lnRef idx="1">
-            <a:schemeClr val="accent1"/>
-          </a:lnRef>
-          <a:fillRef idx="3">
-            <a:schemeClr val="accent1"/>
-          </a:fillRef>
-          <a:effectRef idx="2">
-            <a:schemeClr val="accent1"/>
-          </a:effectRef>
-          <a:fontRef idx="minor">
-            <a:schemeClr val="lt1"/>
-          </a:fontRef>
-        </p:style>
-        <p:txBody>
-          <a:bodyPr rtlCol="0" anchor="ctr"/>
-          <a:lstStyle/>
-          <a:p>
-            <a:pPr algn="ctr"/>
-          </a:p>
-        </p:txBody>
-      </p:sp>
-      <p:sp>
-        <p:nvSpPr>
-          <p:cNvPr id="23" name="TextBox 22"/>
-          <p:cNvSpPr txBox="1"/>
-          <p:nvPr/>
-        </p:nvSpPr>
-        <p:spPr>
-          <a:xfrm>
-            <a:off x="685800" y="4251959"/>
-            <a:ext cx="1828800" cy="365760"/>
-          </a:xfrm>
-          <a:prstGeom prst="rect">
-            <a:avLst/>
-          </a:prstGeom>
-          <a:noFill/>
-        </p:spPr>
-        <p:txBody>
-          <a:bodyPr wrap="square">
-            <a:spAutoFit/>
-          </a:bodyPr>
-          <a:lstStyle/>
-          <a:p>
-            <a:pPr algn="ctr"/>
-            <a:r>
-              <a:rPr sz="1400" b="1">
-                <a:solidFill>
-                  <a:srgbClr val="FFFFFF"/>
-                </a:solidFill>
-                <a:latin typeface="Calibri"/>
-              </a:rPr>
-              <a:t>Document</a:t>
-            </a:r>
-          </a:p>
-        </p:txBody>
-      </p:sp>
-      <p:sp>
-        <p:nvSpPr>
-          <p:cNvPr id="24" name="TextBox 23"/>
-          <p:cNvSpPr txBox="1"/>
-          <p:nvPr/>
-        </p:nvSpPr>
-        <p:spPr>
-          <a:xfrm>
-            <a:off x="2834640" y="4251959"/>
-            <a:ext cx="8412480" cy="411480"/>
-          </a:xfrm>
-          <a:prstGeom prst="rect">
-            <a:avLst/>
-          </a:prstGeom>
-          <a:noFill/>
-        </p:spPr>
-        <p:txBody>
-          <a:bodyPr wrap="square">
-            <a:spAutoFit/>
-          </a:bodyPr>
-          <a:lstStyle/>
-          <a:p>
-            <a:pPr algn="l"/>
+              <a:t>Decorators in YAML or markdown fences</a:t>
+            </a:r>
+          </a:p>
+          <a:p>
+            <a:pPr>
+              <a:spcAft>
+                <a:spcPts val="800"/>
+              </a:spcAft>
+            </a:pPr>
             <a:r>
               <a:rPr sz="1400" b="0">
                 <a:solidFill>
@@ -4307,155 +4084,15 @@
                 </a:solidFill>
                 <a:latin typeface="Calibri"/>
               </a:rPr>
-              <a:t>generate + gitstrings artefacts for Dedicated readiness packs.</a:t>
-            </a:r>
-          </a:p>
-        </p:txBody>
-      </p:sp>
-      <p:sp>
-        <p:nvSpPr>
-          <p:cNvPr id="25" name="Rectangle 24"/>
-          <p:cNvSpPr/>
-          <p:nvPr/>
-        </p:nvSpPr>
-        <p:spPr>
-          <a:xfrm>
-            <a:off x="594360" y="4892040"/>
-            <a:ext cx="10972800" cy="777240"/>
-          </a:xfrm>
-          <a:prstGeom prst="rect">
-            <a:avLst/>
-          </a:prstGeom>
-          <a:solidFill>
-            <a:srgbClr val="FFFFFF"/>
-          </a:solidFill>
-          <a:ln>
-            <a:noFill/>
-          </a:ln>
-        </p:spPr>
-        <p:style>
-          <a:lnRef idx="1">
-            <a:schemeClr val="accent1"/>
-          </a:lnRef>
-          <a:fillRef idx="3">
-            <a:schemeClr val="accent1"/>
-          </a:fillRef>
-          <a:effectRef idx="2">
-            <a:schemeClr val="accent1"/>
-          </a:effectRef>
-          <a:fontRef idx="minor">
-            <a:schemeClr val="lt1"/>
-          </a:fontRef>
-        </p:style>
-        <p:txBody>
-          <a:bodyPr rtlCol="0" anchor="ctr"/>
-          <a:lstStyle/>
-          <a:p>
-            <a:pPr algn="ctr"/>
-          </a:p>
-        </p:txBody>
-      </p:sp>
-      <p:sp>
-        <p:nvSpPr>
-          <p:cNvPr id="26" name="Rectangle 25"/>
-          <p:cNvSpPr/>
-          <p:nvPr/>
-        </p:nvSpPr>
-        <p:spPr>
-          <a:xfrm>
-            <a:off x="594360" y="4892040"/>
-            <a:ext cx="2011680" cy="777240"/>
-          </a:xfrm>
-          <a:prstGeom prst="rect">
-            <a:avLst/>
-          </a:prstGeom>
-          <a:solidFill>
-            <a:srgbClr val="1A6B63"/>
-          </a:solidFill>
-          <a:ln>
-            <a:noFill/>
-          </a:ln>
-        </p:spPr>
-        <p:style>
-          <a:lnRef idx="1">
-            <a:schemeClr val="accent1"/>
-          </a:lnRef>
-          <a:fillRef idx="3">
-            <a:schemeClr val="accent1"/>
-          </a:fillRef>
-          <a:effectRef idx="2">
-            <a:schemeClr val="accent1"/>
-          </a:effectRef>
-          <a:fontRef idx="minor">
-            <a:schemeClr val="lt1"/>
-          </a:fontRef>
-        </p:style>
-        <p:txBody>
-          <a:bodyPr rtlCol="0" anchor="ctr"/>
-          <a:lstStyle/>
-          <a:p>
-            <a:pPr algn="ctr"/>
-          </a:p>
-        </p:txBody>
-      </p:sp>
-      <p:sp>
-        <p:nvSpPr>
-          <p:cNvPr id="27" name="TextBox 26"/>
-          <p:cNvSpPr txBox="1"/>
-          <p:nvPr/>
-        </p:nvSpPr>
-        <p:spPr>
-          <a:xfrm>
-            <a:off x="685800" y="5120640"/>
-            <a:ext cx="1828800" cy="365760"/>
-          </a:xfrm>
-          <a:prstGeom prst="rect">
-            <a:avLst/>
-          </a:prstGeom>
-          <a:noFill/>
-        </p:spPr>
-        <p:txBody>
-          <a:bodyPr wrap="square">
-            <a:spAutoFit/>
-          </a:bodyPr>
-          <a:lstStyle/>
-          <a:p>
-            <a:pPr algn="ctr"/>
-            <a:r>
-              <a:rPr sz="1400" b="1">
-                <a:solidFill>
-                  <a:srgbClr val="FFFFFF"/>
-                </a:solidFill>
-                <a:latin typeface="Calibri"/>
-              </a:rPr>
-              <a:t>Gate</a:t>
-            </a:r>
-          </a:p>
-        </p:txBody>
-      </p:sp>
-      <p:sp>
-        <p:nvSpPr>
-          <p:cNvPr id="28" name="TextBox 27"/>
-          <p:cNvSpPr txBox="1"/>
-          <p:nvPr/>
-        </p:nvSpPr>
-        <p:spPr>
-          <a:xfrm>
-            <a:off x="2834640" y="5120640"/>
-            <a:ext cx="8412480" cy="411480"/>
-          </a:xfrm>
-          <a:prstGeom prst="rect">
-            <a:avLst/>
-          </a:prstGeom>
-          <a:noFill/>
-        </p:spPr>
-        <p:txBody>
-          <a:bodyPr wrap="square">
-            <a:spAutoFit/>
-          </a:bodyPr>
-          <a:lstStyle/>
-          <a:p>
-            <a:pPr algn="l"/>
+              <a:t>Keeps READMEs honest without rewriting by hand</a:t>
+            </a:r>
+          </a:p>
+          <a:p>
+            <a:pPr>
+              <a:spcAft>
+                <a:spcPts val="800"/>
+              </a:spcAft>
+            </a:pPr>
             <a:r>
               <a:rPr sz="1400" b="0">
                 <a:solidFill>
@@ -4463,7 +4100,7 @@
                 </a:solidFill>
                 <a:latin typeface="Calibri"/>
               </a:rPr>
-              <a:t>Move from allow_failure to blocking MR checks; optionally org-wide PEP later.</a:t>
+              <a:t>Helps Nexus/security reviewers see intent quickly</a:t>
             </a:r>
           </a:p>
         </p:txBody>
@@ -4645,7 +4282,7 @@
                 </a:solidFill>
                 <a:latin typeface="Calibri"/>
               </a:rPr>
-              <a:t>Supporting Nexus compliance demand</a:t>
+              <a:t>Supporting the GitLab Dedicated migration</a:t>
             </a:r>
           </a:p>
         </p:txBody>
@@ -4680,7 +4317,7 @@
                 </a:solidFill>
                 <a:latin typeface="Calibri"/>
               </a:rPr>
-              <a:t>Prove control: pin, version, lag windows, and remediation trail</a:t>
+              <a:t>From unknown debt → sequenced remediation → cutover confidence</a:t>
             </a:r>
           </a:p>
         </p:txBody>
@@ -4715,7 +4352,7 @@
                 </a:solidFill>
                 <a:latin typeface="Calibri"/>
               </a:rPr>
-              <a:t>Impact briefing  ·  Dedicated migration · Nexus · tech debt</a:t>
+              <a:t>Impact briefing  ·  Dedicated · Nexus · tech debt · ongoing standards</a:t>
             </a:r>
           </a:p>
         </p:txBody>
@@ -4750,7 +4387,7 @@
                 </a:solidFill>
                 <a:latin typeface="Calibri"/>
               </a:rPr>
-              <a:t>11 / 15</a:t>
+              <a:t>11 / 16</a:t>
             </a:r>
           </a:p>
         </p:txBody>
@@ -4763,8 +4400,51 @@
         </p:nvSpPr>
         <p:spPr>
           <a:xfrm>
-            <a:off x="594360" y="1371600"/>
-            <a:ext cx="5212080" cy="640080"/>
+            <a:off x="594360" y="1417320"/>
+            <a:ext cx="10972800" cy="777240"/>
+          </a:xfrm>
+          <a:prstGeom prst="rect">
+            <a:avLst/>
+          </a:prstGeom>
+          <a:solidFill>
+            <a:srgbClr val="FFFFFF"/>
+          </a:solidFill>
+          <a:ln>
+            <a:noFill/>
+          </a:ln>
+        </p:spPr>
+        <p:style>
+          <a:lnRef idx="1">
+            <a:schemeClr val="accent1"/>
+          </a:lnRef>
+          <a:fillRef idx="3">
+            <a:schemeClr val="accent1"/>
+          </a:fillRef>
+          <a:effectRef idx="2">
+            <a:schemeClr val="accent1"/>
+          </a:effectRef>
+          <a:fontRef idx="minor">
+            <a:schemeClr val="lt1"/>
+          </a:fontRef>
+        </p:style>
+        <p:txBody>
+          <a:bodyPr rtlCol="0" anchor="ctr"/>
+          <a:lstStyle/>
+          <a:p>
+            <a:pPr algn="ctr"/>
+          </a:p>
+        </p:txBody>
+      </p:sp>
+      <p:sp>
+        <p:nvSpPr>
+          <p:cNvPr id="10" name="Rectangle 9"/>
+          <p:cNvSpPr/>
+          <p:nvPr/>
+        </p:nvSpPr>
+        <p:spPr>
+          <a:xfrm>
+            <a:off x="594360" y="1417320"/>
+            <a:ext cx="2011680" cy="777240"/>
           </a:xfrm>
           <a:prstGeom prst="rect">
             <a:avLst/>
@@ -4800,14 +4480,127 @@
       </p:sp>
       <p:sp>
         <p:nvSpPr>
-          <p:cNvPr id="10" name="Rectangle 9"/>
+          <p:cNvPr id="11" name="TextBox 10"/>
+          <p:cNvSpPr txBox="1"/>
+          <p:nvPr/>
+        </p:nvSpPr>
+        <p:spPr>
+          <a:xfrm>
+            <a:off x="685800" y="1645920"/>
+            <a:ext cx="1828800" cy="365760"/>
+          </a:xfrm>
+          <a:prstGeom prst="rect">
+            <a:avLst/>
+          </a:prstGeom>
+          <a:noFill/>
+        </p:spPr>
+        <p:txBody>
+          <a:bodyPr wrap="square">
+            <a:spAutoFit/>
+          </a:bodyPr>
+          <a:lstStyle/>
+          <a:p>
+            <a:pPr algn="ctr"/>
+            <a:r>
+              <a:rPr sz="1400" b="1">
+                <a:solidFill>
+                  <a:srgbClr val="FFFFFF"/>
+                </a:solidFill>
+                <a:latin typeface="Calibri"/>
+              </a:rPr>
+              <a:t>Discover</a:t>
+            </a:r>
+          </a:p>
+        </p:txBody>
+      </p:sp>
+      <p:sp>
+        <p:nvSpPr>
+          <p:cNvPr id="12" name="TextBox 11"/>
+          <p:cNvSpPr txBox="1"/>
+          <p:nvPr/>
+        </p:nvSpPr>
+        <p:spPr>
+          <a:xfrm>
+            <a:off x="2834640" y="1645920"/>
+            <a:ext cx="8412480" cy="411480"/>
+          </a:xfrm>
+          <a:prstGeom prst="rect">
+            <a:avLst/>
+          </a:prstGeom>
+          <a:noFill/>
+        </p:spPr>
+        <p:txBody>
+          <a:bodyPr wrap="square">
+            <a:spAutoFit/>
+          </a:bodyPr>
+          <a:lstStyle/>
+          <a:p>
+            <a:pPr algn="l"/>
+            <a:r>
+              <a:rPr sz="1400" b="0">
+                <a:solidFill>
+                  <a:srgbClr val="2A3B46"/>
+                </a:solidFill>
+                <a:latin typeface="Calibri"/>
+              </a:rPr>
+              <a:t>Shell-scan migration cohorts with check; export markdown/HTML debt reports.</a:t>
+            </a:r>
+          </a:p>
+        </p:txBody>
+      </p:sp>
+      <p:sp>
+        <p:nvSpPr>
+          <p:cNvPr id="13" name="Rectangle 12"/>
           <p:cNvSpPr/>
           <p:nvPr/>
         </p:nvSpPr>
         <p:spPr>
           <a:xfrm>
-            <a:off x="5897880" y="1371600"/>
-            <a:ext cx="5669280" cy="640080"/>
+            <a:off x="594360" y="2286000"/>
+            <a:ext cx="10972800" cy="777240"/>
+          </a:xfrm>
+          <a:prstGeom prst="rect">
+            <a:avLst/>
+          </a:prstGeom>
+          <a:solidFill>
+            <a:srgbClr val="FFFFFF"/>
+          </a:solidFill>
+          <a:ln>
+            <a:noFill/>
+          </a:ln>
+        </p:spPr>
+        <p:style>
+          <a:lnRef idx="1">
+            <a:schemeClr val="accent1"/>
+          </a:lnRef>
+          <a:fillRef idx="3">
+            <a:schemeClr val="accent1"/>
+          </a:fillRef>
+          <a:effectRef idx="2">
+            <a:schemeClr val="accent1"/>
+          </a:effectRef>
+          <a:fontRef idx="minor">
+            <a:schemeClr val="lt1"/>
+          </a:fontRef>
+        </p:style>
+        <p:txBody>
+          <a:bodyPr rtlCol="0" anchor="ctr"/>
+          <a:lstStyle/>
+          <a:p>
+            <a:pPr algn="ctr"/>
+          </a:p>
+        </p:txBody>
+      </p:sp>
+      <p:sp>
+        <p:nvSpPr>
+          <p:cNvPr id="14" name="Rectangle 13"/>
+          <p:cNvSpPr/>
+          <p:nvPr/>
+        </p:nvSpPr>
+        <p:spPr>
+          <a:xfrm>
+            <a:off x="594360" y="2286000"/>
+            <a:ext cx="2011680" cy="777240"/>
           </a:xfrm>
           <a:prstGeom prst="rect">
             <a:avLst/>
@@ -4843,14 +4636,49 @@
       </p:sp>
       <p:sp>
         <p:nvSpPr>
-          <p:cNvPr id="11" name="TextBox 10"/>
-          <p:cNvSpPr txBox="1"/>
-          <p:nvPr/>
-        </p:nvSpPr>
-        <p:spPr>
-          <a:xfrm>
-            <a:off x="777240" y="1536192"/>
-            <a:ext cx="4846320" cy="365760"/>
+          <p:cNvPr id="15" name="TextBox 14"/>
+          <p:cNvSpPr txBox="1"/>
+          <p:nvPr/>
+        </p:nvSpPr>
+        <p:spPr>
+          <a:xfrm>
+            <a:off x="685800" y="2514600"/>
+            <a:ext cx="1828800" cy="365760"/>
+          </a:xfrm>
+          <a:prstGeom prst="rect">
+            <a:avLst/>
+          </a:prstGeom>
+          <a:noFill/>
+        </p:spPr>
+        <p:txBody>
+          <a:bodyPr wrap="square">
+            <a:spAutoFit/>
+          </a:bodyPr>
+          <a:lstStyle/>
+          <a:p>
+            <a:pPr algn="ctr"/>
+            <a:r>
+              <a:rPr sz="1400" b="1">
+                <a:solidFill>
+                  <a:srgbClr val="FFFFFF"/>
+                </a:solidFill>
+                <a:latin typeface="Calibri"/>
+              </a:rPr>
+              <a:t>Prioritise</a:t>
+            </a:r>
+          </a:p>
+        </p:txBody>
+      </p:sp>
+      <p:sp>
+        <p:nvSpPr>
+          <p:cNvPr id="16" name="TextBox 15"/>
+          <p:cNvSpPr txBox="1"/>
+          <p:nvPr/>
+        </p:nvSpPr>
+        <p:spPr>
+          <a:xfrm>
+            <a:off x="2834640" y="2514600"/>
+            <a:ext cx="8412480" cy="411480"/>
           </a:xfrm>
           <a:prstGeom prst="rect">
             <a:avLst/>
@@ -4865,62 +4693,27 @@
           <a:p>
             <a:pPr algn="l"/>
             <a:r>
-              <a:rPr sz="1300" b="1">
-                <a:solidFill>
-                  <a:srgbClr val="FFFFFF"/>
-                </a:solidFill>
-                <a:latin typeface="Calibri"/>
-              </a:rPr>
-              <a:t>Nexus expectation</a:t>
-            </a:r>
-          </a:p>
-        </p:txBody>
-      </p:sp>
-      <p:sp>
-        <p:nvSpPr>
-          <p:cNvPr id="12" name="TextBox 11"/>
-          <p:cNvSpPr txBox="1"/>
-          <p:nvPr/>
-        </p:nvSpPr>
-        <p:spPr>
-          <a:xfrm>
-            <a:off x="6080760" y="1536192"/>
-            <a:ext cx="5303520" cy="365760"/>
-          </a:xfrm>
-          <a:prstGeom prst="rect">
-            <a:avLst/>
-          </a:prstGeom>
-          <a:noFill/>
-        </p:spPr>
-        <p:txBody>
-          <a:bodyPr wrap="square">
-            <a:spAutoFit/>
-          </a:bodyPr>
-          <a:lstStyle/>
-          <a:p>
-            <a:pPr algn="l"/>
-            <a:r>
-              <a:rPr sz="1300" b="1">
-                <a:solidFill>
-                  <a:srgbClr val="FFFFFF"/>
-                </a:solidFill>
-                <a:latin typeface="Calibri"/>
-              </a:rPr>
-              <a:t>gitlab-compliance response</a:t>
-            </a:r>
-          </a:p>
-        </p:txBody>
-      </p:sp>
-      <p:sp>
-        <p:nvSpPr>
-          <p:cNvPr id="13" name="Rectangle 12"/>
+              <a:rPr sz="1400" b="0">
+                <a:solidFill>
+                  <a:srgbClr val="2A3B46"/>
+                </a:solidFill>
+                <a:latin typeface="Calibri"/>
+              </a:rPr>
+              <a:t>Rank projects by supply-chain severity, API gaps, and undocumented pipelines.</a:t>
+            </a:r>
+          </a:p>
+        </p:txBody>
+      </p:sp>
+      <p:sp>
+        <p:nvSpPr>
+          <p:cNvPr id="17" name="Rectangle 16"/>
           <p:cNvSpPr/>
           <p:nvPr/>
         </p:nvSpPr>
         <p:spPr>
           <a:xfrm>
-            <a:off x="594360" y="2103120"/>
-            <a:ext cx="5212080" cy="640080"/>
+            <a:off x="594360" y="3154680"/>
+            <a:ext cx="10972800" cy="777240"/>
           </a:xfrm>
           <a:prstGeom prst="rect">
             <a:avLst/>
@@ -4956,14 +4749,127 @@
       </p:sp>
       <p:sp>
         <p:nvSpPr>
-          <p:cNvPr id="14" name="Rectangle 13"/>
+          <p:cNvPr id="18" name="Rectangle 17"/>
           <p:cNvSpPr/>
           <p:nvPr/>
         </p:nvSpPr>
         <p:spPr>
           <a:xfrm>
-            <a:off x="5897880" y="2103120"/>
-            <a:ext cx="5669280" cy="640080"/>
+            <a:off x="594360" y="3154680"/>
+            <a:ext cx="2011680" cy="777240"/>
+          </a:xfrm>
+          <a:prstGeom prst="rect">
+            <a:avLst/>
+          </a:prstGeom>
+          <a:solidFill>
+            <a:srgbClr val="1A6B63"/>
+          </a:solidFill>
+          <a:ln>
+            <a:noFill/>
+          </a:ln>
+        </p:spPr>
+        <p:style>
+          <a:lnRef idx="1">
+            <a:schemeClr val="accent1"/>
+          </a:lnRef>
+          <a:fillRef idx="3">
+            <a:schemeClr val="accent1"/>
+          </a:fillRef>
+          <a:effectRef idx="2">
+            <a:schemeClr val="accent1"/>
+          </a:effectRef>
+          <a:fontRef idx="minor">
+            <a:schemeClr val="lt1"/>
+          </a:fontRef>
+        </p:style>
+        <p:txBody>
+          <a:bodyPr rtlCol="0" anchor="ctr"/>
+          <a:lstStyle/>
+          <a:p>
+            <a:pPr algn="ctr"/>
+          </a:p>
+        </p:txBody>
+      </p:sp>
+      <p:sp>
+        <p:nvSpPr>
+          <p:cNvPr id="19" name="TextBox 18"/>
+          <p:cNvSpPr txBox="1"/>
+          <p:nvPr/>
+        </p:nvSpPr>
+        <p:spPr>
+          <a:xfrm>
+            <a:off x="685800" y="3383280"/>
+            <a:ext cx="1828800" cy="365760"/>
+          </a:xfrm>
+          <a:prstGeom prst="rect">
+            <a:avLst/>
+          </a:prstGeom>
+          <a:noFill/>
+        </p:spPr>
+        <p:txBody>
+          <a:bodyPr wrap="square">
+            <a:spAutoFit/>
+          </a:bodyPr>
+          <a:lstStyle/>
+          <a:p>
+            <a:pPr algn="ctr"/>
+            <a:r>
+              <a:rPr sz="1400" b="1">
+                <a:solidFill>
+                  <a:srgbClr val="FFFFFF"/>
+                </a:solidFill>
+                <a:latin typeface="Calibri"/>
+              </a:rPr>
+              <a:t>Remediate</a:t>
+            </a:r>
+          </a:p>
+        </p:txBody>
+      </p:sp>
+      <p:sp>
+        <p:nvSpPr>
+          <p:cNvPr id="20" name="TextBox 19"/>
+          <p:cNvSpPr txBox="1"/>
+          <p:nvPr/>
+        </p:nvSpPr>
+        <p:spPr>
+          <a:xfrm>
+            <a:off x="2834640" y="3383280"/>
+            <a:ext cx="8412480" cy="411480"/>
+          </a:xfrm>
+          <a:prstGeom prst="rect">
+            <a:avLst/>
+          </a:prstGeom>
+          <a:noFill/>
+        </p:spPr>
+        <p:txBody>
+          <a:bodyPr wrap="square">
+            <a:spAutoFit/>
+          </a:bodyPr>
+          <a:lstStyle/>
+          <a:p>
+            <a:pPr algn="l"/>
+            <a:r>
+              <a:rPr sz="1400" b="0">
+                <a:solidFill>
+                  <a:srgbClr val="2A3B46"/>
+                </a:solidFill>
+                <a:latin typeface="Calibri"/>
+              </a:rPr>
+              <a:t>Use --fix-supply-chain / --fix-policies / --create-mr; review diffs before merge.</a:t>
+            </a:r>
+          </a:p>
+        </p:txBody>
+      </p:sp>
+      <p:sp>
+        <p:nvSpPr>
+          <p:cNvPr id="21" name="Rectangle 20"/>
+          <p:cNvSpPr/>
+          <p:nvPr/>
+        </p:nvSpPr>
+        <p:spPr>
+          <a:xfrm>
+            <a:off x="594360" y="4023359"/>
+            <a:ext cx="10972800" cy="777240"/>
           </a:xfrm>
           <a:prstGeom prst="rect">
             <a:avLst/>
@@ -4999,14 +4905,92 @@
       </p:sp>
       <p:sp>
         <p:nvSpPr>
-          <p:cNvPr id="15" name="TextBox 14"/>
-          <p:cNvSpPr txBox="1"/>
-          <p:nvPr/>
-        </p:nvSpPr>
-        <p:spPr>
-          <a:xfrm>
-            <a:off x="777240" y="2267712"/>
-            <a:ext cx="4846320" cy="365760"/>
+          <p:cNvPr id="22" name="Rectangle 21"/>
+          <p:cNvSpPr/>
+          <p:nvPr/>
+        </p:nvSpPr>
+        <p:spPr>
+          <a:xfrm>
+            <a:off x="594360" y="4023359"/>
+            <a:ext cx="2011680" cy="777240"/>
+          </a:xfrm>
+          <a:prstGeom prst="rect">
+            <a:avLst/>
+          </a:prstGeom>
+          <a:solidFill>
+            <a:srgbClr val="1A6B63"/>
+          </a:solidFill>
+          <a:ln>
+            <a:noFill/>
+          </a:ln>
+        </p:spPr>
+        <p:style>
+          <a:lnRef idx="1">
+            <a:schemeClr val="accent1"/>
+          </a:lnRef>
+          <a:fillRef idx="3">
+            <a:schemeClr val="accent1"/>
+          </a:fillRef>
+          <a:effectRef idx="2">
+            <a:schemeClr val="accent1"/>
+          </a:effectRef>
+          <a:fontRef idx="minor">
+            <a:schemeClr val="lt1"/>
+          </a:fontRef>
+        </p:style>
+        <p:txBody>
+          <a:bodyPr rtlCol="0" anchor="ctr"/>
+          <a:lstStyle/>
+          <a:p>
+            <a:pPr algn="ctr"/>
+          </a:p>
+        </p:txBody>
+      </p:sp>
+      <p:sp>
+        <p:nvSpPr>
+          <p:cNvPr id="23" name="TextBox 22"/>
+          <p:cNvSpPr txBox="1"/>
+          <p:nvPr/>
+        </p:nvSpPr>
+        <p:spPr>
+          <a:xfrm>
+            <a:off x="685800" y="4251959"/>
+            <a:ext cx="1828800" cy="365760"/>
+          </a:xfrm>
+          <a:prstGeom prst="rect">
+            <a:avLst/>
+          </a:prstGeom>
+          <a:noFill/>
+        </p:spPr>
+        <p:txBody>
+          <a:bodyPr wrap="square">
+            <a:spAutoFit/>
+          </a:bodyPr>
+          <a:lstStyle/>
+          <a:p>
+            <a:pPr algn="ctr"/>
+            <a:r>
+              <a:rPr sz="1400" b="1">
+                <a:solidFill>
+                  <a:srgbClr val="FFFFFF"/>
+                </a:solidFill>
+                <a:latin typeface="Calibri"/>
+              </a:rPr>
+              <a:t>Document</a:t>
+            </a:r>
+          </a:p>
+        </p:txBody>
+      </p:sp>
+      <p:sp>
+        <p:nvSpPr>
+          <p:cNvPr id="24" name="TextBox 23"/>
+          <p:cNvSpPr txBox="1"/>
+          <p:nvPr/>
+        </p:nvSpPr>
+        <p:spPr>
+          <a:xfrm>
+            <a:off x="2834640" y="4251959"/>
+            <a:ext cx="8412480" cy="411480"/>
           </a:xfrm>
           <a:prstGeom prst="rect">
             <a:avLst/>
@@ -5021,62 +5005,27 @@
           <a:p>
             <a:pPr algn="l"/>
             <a:r>
-              <a:rPr sz="1300" b="0">
-                <a:solidFill>
-                  <a:srgbClr val="102230"/>
-                </a:solidFill>
-                <a:latin typeface="Calibri"/>
-              </a:rPr>
-              <a:t>Only approved / known artefact sources</a:t>
-            </a:r>
-          </a:p>
-        </p:txBody>
-      </p:sp>
-      <p:sp>
-        <p:nvSpPr>
-          <p:cNvPr id="16" name="TextBox 15"/>
-          <p:cNvSpPr txBox="1"/>
-          <p:nvPr/>
-        </p:nvSpPr>
-        <p:spPr>
-          <a:xfrm>
-            <a:off x="6080760" y="2267712"/>
-            <a:ext cx="5303520" cy="365760"/>
-          </a:xfrm>
-          <a:prstGeom prst="rect">
-            <a:avLst/>
-          </a:prstGeom>
-          <a:noFill/>
-        </p:spPr>
-        <p:txBody>
-          <a:bodyPr wrap="square">
-            <a:spAutoFit/>
-          </a:bodyPr>
-          <a:lstStyle/>
-          <a:p>
-            <a:pPr algn="l"/>
-            <a:r>
-              <a:rPr sz="1300" b="0">
+              <a:rPr sz="1400" b="0">
                 <a:solidFill>
                   <a:srgbClr val="2A3B46"/>
                 </a:solidFill>
                 <a:latin typeface="Calibri"/>
               </a:rPr>
-              <a:t>Image + include pinning policies; digest preferred</a:t>
-            </a:r>
-          </a:p>
-        </p:txBody>
-      </p:sp>
-      <p:sp>
-        <p:nvSpPr>
-          <p:cNvPr id="17" name="Rectangle 16"/>
+              <a:t>generate + gitstrings artefacts for Dedicated readiness packs.</a:t>
+            </a:r>
+          </a:p>
+        </p:txBody>
+      </p:sp>
+      <p:sp>
+        <p:nvSpPr>
+          <p:cNvPr id="25" name="Rectangle 24"/>
           <p:cNvSpPr/>
           <p:nvPr/>
         </p:nvSpPr>
         <p:spPr>
           <a:xfrm>
-            <a:off x="594360" y="2834640"/>
-            <a:ext cx="5212080" cy="640080"/>
+            <a:off x="594360" y="4892040"/>
+            <a:ext cx="10972800" cy="777240"/>
           </a:xfrm>
           <a:prstGeom prst="rect">
             <a:avLst/>
@@ -5112,20 +5061,20 @@
       </p:sp>
       <p:sp>
         <p:nvSpPr>
-          <p:cNvPr id="18" name="Rectangle 17"/>
+          <p:cNvPr id="26" name="Rectangle 25"/>
           <p:cNvSpPr/>
           <p:nvPr/>
         </p:nvSpPr>
         <p:spPr>
           <a:xfrm>
-            <a:off x="5897880" y="2834640"/>
-            <a:ext cx="5669280" cy="640080"/>
+            <a:off x="594360" y="4892040"/>
+            <a:ext cx="2011680" cy="777240"/>
           </a:xfrm>
           <a:prstGeom prst="rect">
             <a:avLst/>
           </a:prstGeom>
           <a:solidFill>
-            <a:srgbClr val="FFFFFF"/>
+            <a:srgbClr val="1A6B63"/>
           </a:solidFill>
           <a:ln>
             <a:noFill/>
@@ -5155,14 +5104,49 @@
       </p:sp>
       <p:sp>
         <p:nvSpPr>
-          <p:cNvPr id="19" name="TextBox 18"/>
-          <p:cNvSpPr txBox="1"/>
-          <p:nvPr/>
-        </p:nvSpPr>
-        <p:spPr>
-          <a:xfrm>
-            <a:off x="777240" y="2999232"/>
-            <a:ext cx="4846320" cy="365760"/>
+          <p:cNvPr id="27" name="TextBox 26"/>
+          <p:cNvSpPr txBox="1"/>
+          <p:nvPr/>
+        </p:nvSpPr>
+        <p:spPr>
+          <a:xfrm>
+            <a:off x="685800" y="5120640"/>
+            <a:ext cx="1828800" cy="365760"/>
+          </a:xfrm>
+          <a:prstGeom prst="rect">
+            <a:avLst/>
+          </a:prstGeom>
+          <a:noFill/>
+        </p:spPr>
+        <p:txBody>
+          <a:bodyPr wrap="square">
+            <a:spAutoFit/>
+          </a:bodyPr>
+          <a:lstStyle/>
+          <a:p>
+            <a:pPr algn="ctr"/>
+            <a:r>
+              <a:rPr sz="1400" b="1">
+                <a:solidFill>
+                  <a:srgbClr val="FFFFFF"/>
+                </a:solidFill>
+                <a:latin typeface="Calibri"/>
+              </a:rPr>
+              <a:t>Maintain</a:t>
+            </a:r>
+          </a:p>
+        </p:txBody>
+      </p:sp>
+      <p:sp>
+        <p:nvSpPr>
+          <p:cNvPr id="28" name="TextBox 27"/>
+          <p:cNvSpPr txBox="1"/>
+          <p:nvPr/>
+        </p:nvSpPr>
+        <p:spPr>
+          <a:xfrm>
+            <a:off x="2834640" y="5120640"/>
+            <a:ext cx="8412480" cy="411480"/>
           </a:xfrm>
           <a:prstGeom prst="rect">
             <a:avLst/>
@@ -5177,516 +5161,13 @@
           <a:p>
             <a:pPr algn="l"/>
             <a:r>
-              <a:rPr sz="1300" b="0">
-                <a:solidFill>
-                  <a:srgbClr val="102230"/>
-                </a:solidFill>
-                <a:latin typeface="Calibri"/>
-              </a:rPr>
-              <a:t>No mutable latest tags</a:t>
-            </a:r>
-          </a:p>
-        </p:txBody>
-      </p:sp>
-      <p:sp>
-        <p:nvSpPr>
-          <p:cNvPr id="20" name="TextBox 19"/>
-          <p:cNvSpPr txBox="1"/>
-          <p:nvPr/>
-        </p:nvSpPr>
-        <p:spPr>
-          <a:xfrm>
-            <a:off x="6080760" y="2999232"/>
-            <a:ext cx="5303520" cy="365760"/>
-          </a:xfrm>
-          <a:prstGeom prst="rect">
-            <a:avLst/>
-          </a:prstGeom>
-          <a:noFill/>
-        </p:spPr>
-        <p:txBody>
-          <a:bodyPr wrap="square">
-            <a:spAutoFit/>
-          </a:bodyPr>
-          <a:lstStyle/>
-          <a:p>
-            <a:pPr algn="l"/>
-            <a:r>
-              <a:rPr sz="1300" b="0">
+              <a:rPr sz="1400" b="0">
                 <a:solidFill>
                   <a:srgbClr val="2A3B46"/>
                 </a:solidFill>
                 <a:latin typeface="Calibri"/>
               </a:rPr>
-              <a:t>Gherkin rules fail :latest; auto-pin to sha256</a:t>
-            </a:r>
-          </a:p>
-        </p:txBody>
-      </p:sp>
-      <p:sp>
-        <p:nvSpPr>
-          <p:cNvPr id="21" name="Rectangle 20"/>
-          <p:cNvSpPr/>
-          <p:nvPr/>
-        </p:nvSpPr>
-        <p:spPr>
-          <a:xfrm>
-            <a:off x="594360" y="3566160"/>
-            <a:ext cx="5212080" cy="640080"/>
-          </a:xfrm>
-          <a:prstGeom prst="rect">
-            <a:avLst/>
-          </a:prstGeom>
-          <a:solidFill>
-            <a:srgbClr val="FFFFFF"/>
-          </a:solidFill>
-          <a:ln>
-            <a:noFill/>
-          </a:ln>
-        </p:spPr>
-        <p:style>
-          <a:lnRef idx="1">
-            <a:schemeClr val="accent1"/>
-          </a:lnRef>
-          <a:fillRef idx="3">
-            <a:schemeClr val="accent1"/>
-          </a:fillRef>
-          <a:effectRef idx="2">
-            <a:schemeClr val="accent1"/>
-          </a:effectRef>
-          <a:fontRef idx="minor">
-            <a:schemeClr val="lt1"/>
-          </a:fontRef>
-        </p:style>
-        <p:txBody>
-          <a:bodyPr rtlCol="0" anchor="ctr"/>
-          <a:lstStyle/>
-          <a:p>
-            <a:pPr algn="ctr"/>
-          </a:p>
-        </p:txBody>
-      </p:sp>
-      <p:sp>
-        <p:nvSpPr>
-          <p:cNvPr id="22" name="Rectangle 21"/>
-          <p:cNvSpPr/>
-          <p:nvPr/>
-        </p:nvSpPr>
-        <p:spPr>
-          <a:xfrm>
-            <a:off x="5897880" y="3566160"/>
-            <a:ext cx="5669280" cy="640080"/>
-          </a:xfrm>
-          <a:prstGeom prst="rect">
-            <a:avLst/>
-          </a:prstGeom>
-          <a:solidFill>
-            <a:srgbClr val="FFFFFF"/>
-          </a:solidFill>
-          <a:ln>
-            <a:noFill/>
-          </a:ln>
-        </p:spPr>
-        <p:style>
-          <a:lnRef idx="1">
-            <a:schemeClr val="accent1"/>
-          </a:lnRef>
-          <a:fillRef idx="3">
-            <a:schemeClr val="accent1"/>
-          </a:fillRef>
-          <a:effectRef idx="2">
-            <a:schemeClr val="accent1"/>
-          </a:effectRef>
-          <a:fontRef idx="minor">
-            <a:schemeClr val="lt1"/>
-          </a:fontRef>
-        </p:style>
-        <p:txBody>
-          <a:bodyPr rtlCol="0" anchor="ctr"/>
-          <a:lstStyle/>
-          <a:p>
-            <a:pPr algn="ctr"/>
-          </a:p>
-        </p:txBody>
-      </p:sp>
-      <p:sp>
-        <p:nvSpPr>
-          <p:cNvPr id="23" name="TextBox 22"/>
-          <p:cNvSpPr txBox="1"/>
-          <p:nvPr/>
-        </p:nvSpPr>
-        <p:spPr>
-          <a:xfrm>
-            <a:off x="777240" y="3730752"/>
-            <a:ext cx="4846320" cy="365760"/>
-          </a:xfrm>
-          <a:prstGeom prst="rect">
-            <a:avLst/>
-          </a:prstGeom>
-          <a:noFill/>
-        </p:spPr>
-        <p:txBody>
-          <a:bodyPr wrap="square">
-            <a:spAutoFit/>
-          </a:bodyPr>
-          <a:lstStyle/>
-          <a:p>
-            <a:pPr algn="l"/>
-            <a:r>
-              <a:rPr sz="1300" b="0">
-                <a:solidFill>
-                  <a:srgbClr val="102230"/>
-                </a:solidFill>
-                <a:latin typeface="Calibri"/>
-              </a:rPr>
-              <a:t>Versions within agreed freshness</a:t>
-            </a:r>
-          </a:p>
-        </p:txBody>
-      </p:sp>
-      <p:sp>
-        <p:nvSpPr>
-          <p:cNvPr id="24" name="TextBox 23"/>
-          <p:cNvSpPr txBox="1"/>
-          <p:nvPr/>
-        </p:nvSpPr>
-        <p:spPr>
-          <a:xfrm>
-            <a:off x="6080760" y="3730752"/>
-            <a:ext cx="5303520" cy="365760"/>
-          </a:xfrm>
-          <a:prstGeom prst="rect">
-            <a:avLst/>
-          </a:prstGeom>
-          <a:noFill/>
-        </p:spPr>
-        <p:txBody>
-          <a:bodyPr wrap="square">
-            <a:spAutoFit/>
-          </a:bodyPr>
-          <a:lstStyle/>
-          <a:p>
-            <a:pPr algn="l"/>
-            <a:r>
-              <a:rPr sz="1300" b="0">
-                <a:solidFill>
-                  <a:srgbClr val="2A3B46"/>
-                </a:solidFill>
-                <a:latin typeface="Calibri"/>
-              </a:rPr>
-              <a:t>Release-lag / latest-N / adoption-window scenarios</a:t>
-            </a:r>
-          </a:p>
-        </p:txBody>
-      </p:sp>
-      <p:sp>
-        <p:nvSpPr>
-          <p:cNvPr id="25" name="Rectangle 24"/>
-          <p:cNvSpPr/>
-          <p:nvPr/>
-        </p:nvSpPr>
-        <p:spPr>
-          <a:xfrm>
-            <a:off x="594360" y="4297680"/>
-            <a:ext cx="5212080" cy="640080"/>
-          </a:xfrm>
-          <a:prstGeom prst="rect">
-            <a:avLst/>
-          </a:prstGeom>
-          <a:solidFill>
-            <a:srgbClr val="FFFFFF"/>
-          </a:solidFill>
-          <a:ln>
-            <a:noFill/>
-          </a:ln>
-        </p:spPr>
-        <p:style>
-          <a:lnRef idx="1">
-            <a:schemeClr val="accent1"/>
-          </a:lnRef>
-          <a:fillRef idx="3">
-            <a:schemeClr val="accent1"/>
-          </a:fillRef>
-          <a:effectRef idx="2">
-            <a:schemeClr val="accent1"/>
-          </a:effectRef>
-          <a:fontRef idx="minor">
-            <a:schemeClr val="lt1"/>
-          </a:fontRef>
-        </p:style>
-        <p:txBody>
-          <a:bodyPr rtlCol="0" anchor="ctr"/>
-          <a:lstStyle/>
-          <a:p>
-            <a:pPr algn="ctr"/>
-          </a:p>
-        </p:txBody>
-      </p:sp>
-      <p:sp>
-        <p:nvSpPr>
-          <p:cNvPr id="26" name="Rectangle 25"/>
-          <p:cNvSpPr/>
-          <p:nvPr/>
-        </p:nvSpPr>
-        <p:spPr>
-          <a:xfrm>
-            <a:off x="5897880" y="4297680"/>
-            <a:ext cx="5669280" cy="640080"/>
-          </a:xfrm>
-          <a:prstGeom prst="rect">
-            <a:avLst/>
-          </a:prstGeom>
-          <a:solidFill>
-            <a:srgbClr val="FFFFFF"/>
-          </a:solidFill>
-          <a:ln>
-            <a:noFill/>
-          </a:ln>
-        </p:spPr>
-        <p:style>
-          <a:lnRef idx="1">
-            <a:schemeClr val="accent1"/>
-          </a:lnRef>
-          <a:fillRef idx="3">
-            <a:schemeClr val="accent1"/>
-          </a:fillRef>
-          <a:effectRef idx="2">
-            <a:schemeClr val="accent1"/>
-          </a:effectRef>
-          <a:fontRef idx="minor">
-            <a:schemeClr val="lt1"/>
-          </a:fontRef>
-        </p:style>
-        <p:txBody>
-          <a:bodyPr rtlCol="0" anchor="ctr"/>
-          <a:lstStyle/>
-          <a:p>
-            <a:pPr algn="ctr"/>
-          </a:p>
-        </p:txBody>
-      </p:sp>
-      <p:sp>
-        <p:nvSpPr>
-          <p:cNvPr id="27" name="TextBox 26"/>
-          <p:cNvSpPr txBox="1"/>
-          <p:nvPr/>
-        </p:nvSpPr>
-        <p:spPr>
-          <a:xfrm>
-            <a:off x="777240" y="4462272"/>
-            <a:ext cx="4846320" cy="365760"/>
-          </a:xfrm>
-          <a:prstGeom prst="rect">
-            <a:avLst/>
-          </a:prstGeom>
-          <a:noFill/>
-        </p:spPr>
-        <p:txBody>
-          <a:bodyPr wrap="square">
-            <a:spAutoFit/>
-          </a:bodyPr>
-          <a:lstStyle/>
-          <a:p>
-            <a:pPr algn="l"/>
-            <a:r>
-              <a:rPr sz="1300" b="0">
-                <a:solidFill>
-                  <a:srgbClr val="102230"/>
-                </a:solidFill>
-                <a:latin typeface="Calibri"/>
-              </a:rPr>
-              <a:t>Evidence for audits</a:t>
-            </a:r>
-          </a:p>
-        </p:txBody>
-      </p:sp>
-      <p:sp>
-        <p:nvSpPr>
-          <p:cNvPr id="28" name="TextBox 27"/>
-          <p:cNvSpPr txBox="1"/>
-          <p:nvPr/>
-        </p:nvSpPr>
-        <p:spPr>
-          <a:xfrm>
-            <a:off x="6080760" y="4462272"/>
-            <a:ext cx="5303520" cy="365760"/>
-          </a:xfrm>
-          <a:prstGeom prst="rect">
-            <a:avLst/>
-          </a:prstGeom>
-          <a:noFill/>
-        </p:spPr>
-        <p:txBody>
-          <a:bodyPr wrap="square">
-            <a:spAutoFit/>
-          </a:bodyPr>
-          <a:lstStyle/>
-          <a:p>
-            <a:pPr algn="l"/>
-            <a:r>
-              <a:rPr sz="1300" b="0">
-                <a:solidFill>
-                  <a:srgbClr val="2A3B46"/>
-                </a:solidFill>
-                <a:latin typeface="Calibri"/>
-              </a:rPr>
-              <a:t>Markdown/HTML/Code Quality reports + policy metadata IDs</a:t>
-            </a:r>
-          </a:p>
-        </p:txBody>
-      </p:sp>
-      <p:sp>
-        <p:nvSpPr>
-          <p:cNvPr id="29" name="Rectangle 28"/>
-          <p:cNvSpPr/>
-          <p:nvPr/>
-        </p:nvSpPr>
-        <p:spPr>
-          <a:xfrm>
-            <a:off x="594360" y="5029200"/>
-            <a:ext cx="5212080" cy="640080"/>
-          </a:xfrm>
-          <a:prstGeom prst="rect">
-            <a:avLst/>
-          </a:prstGeom>
-          <a:solidFill>
-            <a:srgbClr val="FFFFFF"/>
-          </a:solidFill>
-          <a:ln>
-            <a:noFill/>
-          </a:ln>
-        </p:spPr>
-        <p:style>
-          <a:lnRef idx="1">
-            <a:schemeClr val="accent1"/>
-          </a:lnRef>
-          <a:fillRef idx="3">
-            <a:schemeClr val="accent1"/>
-          </a:fillRef>
-          <a:effectRef idx="2">
-            <a:schemeClr val="accent1"/>
-          </a:effectRef>
-          <a:fontRef idx="minor">
-            <a:schemeClr val="lt1"/>
-          </a:fontRef>
-        </p:style>
-        <p:txBody>
-          <a:bodyPr rtlCol="0" anchor="ctr"/>
-          <a:lstStyle/>
-          <a:p>
-            <a:pPr algn="ctr"/>
-          </a:p>
-        </p:txBody>
-      </p:sp>
-      <p:sp>
-        <p:nvSpPr>
-          <p:cNvPr id="30" name="Rectangle 29"/>
-          <p:cNvSpPr/>
-          <p:nvPr/>
-        </p:nvSpPr>
-        <p:spPr>
-          <a:xfrm>
-            <a:off x="5897880" y="5029200"/>
-            <a:ext cx="5669280" cy="640080"/>
-          </a:xfrm>
-          <a:prstGeom prst="rect">
-            <a:avLst/>
-          </a:prstGeom>
-          <a:solidFill>
-            <a:srgbClr val="FFFFFF"/>
-          </a:solidFill>
-          <a:ln>
-            <a:noFill/>
-          </a:ln>
-        </p:spPr>
-        <p:style>
-          <a:lnRef idx="1">
-            <a:schemeClr val="accent1"/>
-          </a:lnRef>
-          <a:fillRef idx="3">
-            <a:schemeClr val="accent1"/>
-          </a:fillRef>
-          <a:effectRef idx="2">
-            <a:schemeClr val="accent1"/>
-          </a:effectRef>
-          <a:fontRef idx="minor">
-            <a:schemeClr val="lt1"/>
-          </a:fontRef>
-        </p:style>
-        <p:txBody>
-          <a:bodyPr rtlCol="0" anchor="ctr"/>
-          <a:lstStyle/>
-          <a:p>
-            <a:pPr algn="ctr"/>
-          </a:p>
-        </p:txBody>
-      </p:sp>
-      <p:sp>
-        <p:nvSpPr>
-          <p:cNvPr id="31" name="TextBox 30"/>
-          <p:cNvSpPr txBox="1"/>
-          <p:nvPr/>
-        </p:nvSpPr>
-        <p:spPr>
-          <a:xfrm>
-            <a:off x="777240" y="5193792"/>
-            <a:ext cx="4846320" cy="365760"/>
-          </a:xfrm>
-          <a:prstGeom prst="rect">
-            <a:avLst/>
-          </a:prstGeom>
-          <a:noFill/>
-        </p:spPr>
-        <p:txBody>
-          <a:bodyPr wrap="square">
-            <a:spAutoFit/>
-          </a:bodyPr>
-          <a:lstStyle/>
-          <a:p>
-            <a:pPr algn="l"/>
-            <a:r>
-              <a:rPr sz="1300" b="0">
-                <a:solidFill>
-                  <a:srgbClr val="102230"/>
-                </a:solidFill>
-                <a:latin typeface="Calibri"/>
-              </a:rPr>
-              <a:t>Sustainable remediation</a:t>
-            </a:r>
-          </a:p>
-        </p:txBody>
-      </p:sp>
-      <p:sp>
-        <p:nvSpPr>
-          <p:cNvPr id="32" name="TextBox 31"/>
-          <p:cNvSpPr txBox="1"/>
-          <p:nvPr/>
-        </p:nvSpPr>
-        <p:spPr>
-          <a:xfrm>
-            <a:off x="6080760" y="5193792"/>
-            <a:ext cx="5303520" cy="365760"/>
-          </a:xfrm>
-          <a:prstGeom prst="rect">
-            <a:avLst/>
-          </a:prstGeom>
-          <a:noFill/>
-        </p:spPr>
-        <p:txBody>
-          <a:bodyPr wrap="square">
-            <a:spAutoFit/>
-          </a:bodyPr>
-          <a:lstStyle/>
-          <a:p>
-            <a:pPr algn="l"/>
-            <a:r>
-              <a:rPr sz="1300" b="0">
-                <a:solidFill>
-                  <a:srgbClr val="2A3B46"/>
-                </a:solidFill>
-                <a:latin typeface="Calibri"/>
-              </a:rPr>
-              <a:t>Scheduled --fix-supply-chain --create-mr jobs</a:t>
+              <a:t>Readable Gherkin policies + CI gates keep standards ongoing after cutover.</a:t>
             </a:r>
           </a:p>
         </p:txBody>
@@ -5868,7 +5349,7 @@
                 </a:solidFill>
                 <a:latin typeface="Calibri"/>
               </a:rPr>
-              <a:t>End-to-end: discover → fix → prove</a:t>
+              <a:t>Supporting Nexus compliance demand</a:t>
             </a:r>
           </a:p>
         </p:txBody>
@@ -5903,7 +5384,7 @@
                 </a:solidFill>
                 <a:latin typeface="Calibri"/>
               </a:rPr>
-              <a:t>One toolchain across migration and compliance workstreams</a:t>
+              <a:t>Prove control: pin, version, lag windows, and remediation trail</a:t>
             </a:r>
           </a:p>
         </p:txBody>
@@ -5938,7 +5419,7 @@
                 </a:solidFill>
                 <a:latin typeface="Calibri"/>
               </a:rPr>
-              <a:t>Impact briefing  ·  Dedicated migration · Nexus · tech debt</a:t>
+              <a:t>Impact briefing  ·  Dedicated · Nexus · tech debt · ongoing standards</a:t>
             </a:r>
           </a:p>
         </p:txBody>
@@ -5973,7 +5454,7 @@
                 </a:solidFill>
                 <a:latin typeface="Calibri"/>
               </a:rPr>
-              <a:t>12 / 15</a:t>
+              <a:t>12 / 16</a:t>
             </a:r>
           </a:p>
         </p:txBody>
@@ -5986,8 +5467,164 @@
         </p:nvSpPr>
         <p:spPr>
           <a:xfrm>
-            <a:off x="502920" y="1554480"/>
-            <a:ext cx="3657600" cy="1965960"/>
+            <a:off x="594360" y="1371600"/>
+            <a:ext cx="5212080" cy="640080"/>
+          </a:xfrm>
+          <a:prstGeom prst="rect">
+            <a:avLst/>
+          </a:prstGeom>
+          <a:solidFill>
+            <a:srgbClr val="1A6B63"/>
+          </a:solidFill>
+          <a:ln>
+            <a:noFill/>
+          </a:ln>
+        </p:spPr>
+        <p:style>
+          <a:lnRef idx="1">
+            <a:schemeClr val="accent1"/>
+          </a:lnRef>
+          <a:fillRef idx="3">
+            <a:schemeClr val="accent1"/>
+          </a:fillRef>
+          <a:effectRef idx="2">
+            <a:schemeClr val="accent1"/>
+          </a:effectRef>
+          <a:fontRef idx="minor">
+            <a:schemeClr val="lt1"/>
+          </a:fontRef>
+        </p:style>
+        <p:txBody>
+          <a:bodyPr rtlCol="0" anchor="ctr"/>
+          <a:lstStyle/>
+          <a:p>
+            <a:pPr algn="ctr"/>
+          </a:p>
+        </p:txBody>
+      </p:sp>
+      <p:sp>
+        <p:nvSpPr>
+          <p:cNvPr id="10" name="Rectangle 9"/>
+          <p:cNvSpPr/>
+          <p:nvPr/>
+        </p:nvSpPr>
+        <p:spPr>
+          <a:xfrm>
+            <a:off x="5897880" y="1371600"/>
+            <a:ext cx="5669280" cy="640080"/>
+          </a:xfrm>
+          <a:prstGeom prst="rect">
+            <a:avLst/>
+          </a:prstGeom>
+          <a:solidFill>
+            <a:srgbClr val="1A6B63"/>
+          </a:solidFill>
+          <a:ln>
+            <a:noFill/>
+          </a:ln>
+        </p:spPr>
+        <p:style>
+          <a:lnRef idx="1">
+            <a:schemeClr val="accent1"/>
+          </a:lnRef>
+          <a:fillRef idx="3">
+            <a:schemeClr val="accent1"/>
+          </a:fillRef>
+          <a:effectRef idx="2">
+            <a:schemeClr val="accent1"/>
+          </a:effectRef>
+          <a:fontRef idx="minor">
+            <a:schemeClr val="lt1"/>
+          </a:fontRef>
+        </p:style>
+        <p:txBody>
+          <a:bodyPr rtlCol="0" anchor="ctr"/>
+          <a:lstStyle/>
+          <a:p>
+            <a:pPr algn="ctr"/>
+          </a:p>
+        </p:txBody>
+      </p:sp>
+      <p:sp>
+        <p:nvSpPr>
+          <p:cNvPr id="11" name="TextBox 10"/>
+          <p:cNvSpPr txBox="1"/>
+          <p:nvPr/>
+        </p:nvSpPr>
+        <p:spPr>
+          <a:xfrm>
+            <a:off x="777240" y="1536192"/>
+            <a:ext cx="4846320" cy="365760"/>
+          </a:xfrm>
+          <a:prstGeom prst="rect">
+            <a:avLst/>
+          </a:prstGeom>
+          <a:noFill/>
+        </p:spPr>
+        <p:txBody>
+          <a:bodyPr wrap="square">
+            <a:spAutoFit/>
+          </a:bodyPr>
+          <a:lstStyle/>
+          <a:p>
+            <a:pPr algn="l"/>
+            <a:r>
+              <a:rPr sz="1300" b="1">
+                <a:solidFill>
+                  <a:srgbClr val="FFFFFF"/>
+                </a:solidFill>
+                <a:latin typeface="Calibri"/>
+              </a:rPr>
+              <a:t>Nexus expectation</a:t>
+            </a:r>
+          </a:p>
+        </p:txBody>
+      </p:sp>
+      <p:sp>
+        <p:nvSpPr>
+          <p:cNvPr id="12" name="TextBox 11"/>
+          <p:cNvSpPr txBox="1"/>
+          <p:nvPr/>
+        </p:nvSpPr>
+        <p:spPr>
+          <a:xfrm>
+            <a:off x="6080760" y="1536192"/>
+            <a:ext cx="5303520" cy="365760"/>
+          </a:xfrm>
+          <a:prstGeom prst="rect">
+            <a:avLst/>
+          </a:prstGeom>
+          <a:noFill/>
+        </p:spPr>
+        <p:txBody>
+          <a:bodyPr wrap="square">
+            <a:spAutoFit/>
+          </a:bodyPr>
+          <a:lstStyle/>
+          <a:p>
+            <a:pPr algn="l"/>
+            <a:r>
+              <a:rPr sz="1300" b="1">
+                <a:solidFill>
+                  <a:srgbClr val="FFFFFF"/>
+                </a:solidFill>
+                <a:latin typeface="Calibri"/>
+              </a:rPr>
+              <a:t>gitlab-compliance response</a:t>
+            </a:r>
+          </a:p>
+        </p:txBody>
+      </p:sp>
+      <p:sp>
+        <p:nvSpPr>
+          <p:cNvPr id="13" name="Rectangle 12"/>
+          <p:cNvSpPr/>
+          <p:nvPr/>
+        </p:nvSpPr>
+        <p:spPr>
+          <a:xfrm>
+            <a:off x="594360" y="2103120"/>
+            <a:ext cx="5212080" cy="640080"/>
           </a:xfrm>
           <a:prstGeom prst="rect">
             <a:avLst/>
@@ -6023,127 +5660,14 @@
       </p:sp>
       <p:sp>
         <p:nvSpPr>
-          <p:cNvPr id="10" name="Rectangle 9"/>
+          <p:cNvPr id="14" name="Rectangle 13"/>
           <p:cNvSpPr/>
           <p:nvPr/>
         </p:nvSpPr>
         <p:spPr>
           <a:xfrm>
-            <a:off x="502920" y="1554480"/>
-            <a:ext cx="3657600" cy="91440"/>
-          </a:xfrm>
-          <a:prstGeom prst="rect">
-            <a:avLst/>
-          </a:prstGeom>
-          <a:solidFill>
-            <a:srgbClr val="1A6B63"/>
-          </a:solidFill>
-          <a:ln>
-            <a:noFill/>
-          </a:ln>
-        </p:spPr>
-        <p:style>
-          <a:lnRef idx="1">
-            <a:schemeClr val="accent1"/>
-          </a:lnRef>
-          <a:fillRef idx="3">
-            <a:schemeClr val="accent1"/>
-          </a:fillRef>
-          <a:effectRef idx="2">
-            <a:schemeClr val="accent1"/>
-          </a:effectRef>
-          <a:fontRef idx="minor">
-            <a:schemeClr val="lt1"/>
-          </a:fontRef>
-        </p:style>
-        <p:txBody>
-          <a:bodyPr rtlCol="0" anchor="ctr"/>
-          <a:lstStyle/>
-          <a:p>
-            <a:pPr algn="ctr"/>
-          </a:p>
-        </p:txBody>
-      </p:sp>
-      <p:sp>
-        <p:nvSpPr>
-          <p:cNvPr id="11" name="TextBox 10"/>
-          <p:cNvSpPr txBox="1"/>
-          <p:nvPr/>
-        </p:nvSpPr>
-        <p:spPr>
-          <a:xfrm>
-            <a:off x="731520" y="1874520"/>
-            <a:ext cx="3200400" cy="411480"/>
-          </a:xfrm>
-          <a:prstGeom prst="rect">
-            <a:avLst/>
-          </a:prstGeom>
-          <a:noFill/>
-        </p:spPr>
-        <p:txBody>
-          <a:bodyPr wrap="square">
-            <a:spAutoFit/>
-          </a:bodyPr>
-          <a:lstStyle/>
-          <a:p>
-            <a:pPr algn="l"/>
-            <a:r>
-              <a:rPr sz="1500" b="1">
-                <a:solidFill>
-                  <a:srgbClr val="102230"/>
-                </a:solidFill>
-                <a:latin typeface="Calibri"/>
-              </a:rPr>
-              <a:t>1. Shell check</a:t>
-            </a:r>
-          </a:p>
-        </p:txBody>
-      </p:sp>
-      <p:sp>
-        <p:nvSpPr>
-          <p:cNvPr id="12" name="TextBox 11"/>
-          <p:cNvSpPr txBox="1"/>
-          <p:nvPr/>
-        </p:nvSpPr>
-        <p:spPr>
-          <a:xfrm>
-            <a:off x="731520" y="2423160"/>
-            <a:ext cx="3200400" cy="822960"/>
-          </a:xfrm>
-          <a:prstGeom prst="rect">
-            <a:avLst/>
-          </a:prstGeom>
-          <a:noFill/>
-        </p:spPr>
-        <p:txBody>
-          <a:bodyPr wrap="square">
-            <a:spAutoFit/>
-          </a:bodyPr>
-          <a:lstStyle/>
-          <a:p>
-            <a:pPr algn="l"/>
-            <a:r>
-              <a:rPr sz="1300" b="0">
-                <a:solidFill>
-                  <a:srgbClr val="2A3B46"/>
-                </a:solidFill>
-                <a:latin typeface="Calibri"/>
-              </a:rPr>
-              <a:t>Scan repos; write COMPLIANCE-REPORT.md</a:t>
-            </a:r>
-          </a:p>
-        </p:txBody>
-      </p:sp>
-      <p:sp>
-        <p:nvSpPr>
-          <p:cNvPr id="13" name="Rectangle 12"/>
-          <p:cNvSpPr/>
-          <p:nvPr/>
-        </p:nvSpPr>
-        <p:spPr>
-          <a:xfrm>
-            <a:off x="4343400" y="1554480"/>
-            <a:ext cx="3657600" cy="1965960"/>
+            <a:off x="5897880" y="2103120"/>
+            <a:ext cx="5669280" cy="640080"/>
           </a:xfrm>
           <a:prstGeom prst="rect">
             <a:avLst/>
@@ -6179,57 +5703,14 @@
       </p:sp>
       <p:sp>
         <p:nvSpPr>
-          <p:cNvPr id="14" name="Rectangle 13"/>
-          <p:cNvSpPr/>
-          <p:nvPr/>
-        </p:nvSpPr>
-        <p:spPr>
-          <a:xfrm>
-            <a:off x="4343400" y="1554480"/>
-            <a:ext cx="3657600" cy="91440"/>
-          </a:xfrm>
-          <a:prstGeom prst="rect">
-            <a:avLst/>
-          </a:prstGeom>
-          <a:solidFill>
-            <a:srgbClr val="1A6B63"/>
-          </a:solidFill>
-          <a:ln>
-            <a:noFill/>
-          </a:ln>
-        </p:spPr>
-        <p:style>
-          <a:lnRef idx="1">
-            <a:schemeClr val="accent1"/>
-          </a:lnRef>
-          <a:fillRef idx="3">
-            <a:schemeClr val="accent1"/>
-          </a:fillRef>
-          <a:effectRef idx="2">
-            <a:schemeClr val="accent1"/>
-          </a:effectRef>
-          <a:fontRef idx="minor">
-            <a:schemeClr val="lt1"/>
-          </a:fontRef>
-        </p:style>
-        <p:txBody>
-          <a:bodyPr rtlCol="0" anchor="ctr"/>
-          <a:lstStyle/>
-          <a:p>
-            <a:pPr algn="ctr"/>
-          </a:p>
-        </p:txBody>
-      </p:sp>
-      <p:sp>
-        <p:nvSpPr>
           <p:cNvPr id="15" name="TextBox 14"/>
           <p:cNvSpPr txBox="1"/>
           <p:nvPr/>
         </p:nvSpPr>
         <p:spPr>
           <a:xfrm>
-            <a:off x="4572000" y="1874520"/>
-            <a:ext cx="3200400" cy="411480"/>
+            <a:off x="777240" y="2267712"/>
+            <a:ext cx="4846320" cy="365760"/>
           </a:xfrm>
           <a:prstGeom prst="rect">
             <a:avLst/>
@@ -6244,13 +5725,13 @@
           <a:p>
             <a:pPr algn="l"/>
             <a:r>
-              <a:rPr sz="1500" b="1">
+              <a:rPr sz="1300" b="0">
                 <a:solidFill>
                   <a:srgbClr val="102230"/>
                 </a:solidFill>
                 <a:latin typeface="Calibri"/>
               </a:rPr>
-              <a:t>2. Triage debt</a:t>
+              <a:t>Only approved / known artefact sources</a:t>
             </a:r>
           </a:p>
         </p:txBody>
@@ -6263,8 +5744,8 @@
         </p:nvSpPr>
         <p:spPr>
           <a:xfrm>
-            <a:off x="4572000" y="2423160"/>
-            <a:ext cx="3200400" cy="822960"/>
+            <a:off x="6080760" y="2267712"/>
+            <a:ext cx="5303520" cy="365760"/>
           </a:xfrm>
           <a:prstGeom prst="rect">
             <a:avLst/>
@@ -6285,7 +5766,7 @@
                 </a:solidFill>
                 <a:latin typeface="Calibri"/>
               </a:rPr>
-              <a:t>Group by pin / lag / rules / docs gaps</a:t>
+              <a:t>Image + include pinning policies; digest preferred</a:t>
             </a:r>
           </a:p>
         </p:txBody>
@@ -6298,8 +5779,8 @@
         </p:nvSpPr>
         <p:spPr>
           <a:xfrm>
-            <a:off x="8183880" y="1554480"/>
-            <a:ext cx="3657600" cy="1965960"/>
+            <a:off x="594360" y="2834640"/>
+            <a:ext cx="5212080" cy="640080"/>
           </a:xfrm>
           <a:prstGeom prst="rect">
             <a:avLst/>
@@ -6341,121 +5822,8 @@
         </p:nvSpPr>
         <p:spPr>
           <a:xfrm>
-            <a:off x="8183880" y="1554480"/>
-            <a:ext cx="3657600" cy="91440"/>
-          </a:xfrm>
-          <a:prstGeom prst="rect">
-            <a:avLst/>
-          </a:prstGeom>
-          <a:solidFill>
-            <a:srgbClr val="1A6B63"/>
-          </a:solidFill>
-          <a:ln>
-            <a:noFill/>
-          </a:ln>
-        </p:spPr>
-        <p:style>
-          <a:lnRef idx="1">
-            <a:schemeClr val="accent1"/>
-          </a:lnRef>
-          <a:fillRef idx="3">
-            <a:schemeClr val="accent1"/>
-          </a:fillRef>
-          <a:effectRef idx="2">
-            <a:schemeClr val="accent1"/>
-          </a:effectRef>
-          <a:fontRef idx="minor">
-            <a:schemeClr val="lt1"/>
-          </a:fontRef>
-        </p:style>
-        <p:txBody>
-          <a:bodyPr rtlCol="0" anchor="ctr"/>
-          <a:lstStyle/>
-          <a:p>
-            <a:pPr algn="ctr"/>
-          </a:p>
-        </p:txBody>
-      </p:sp>
-      <p:sp>
-        <p:nvSpPr>
-          <p:cNvPr id="19" name="TextBox 18"/>
-          <p:cNvSpPr txBox="1"/>
-          <p:nvPr/>
-        </p:nvSpPr>
-        <p:spPr>
-          <a:xfrm>
-            <a:off x="8412480" y="1874520"/>
-            <a:ext cx="3200400" cy="411480"/>
-          </a:xfrm>
-          <a:prstGeom prst="rect">
-            <a:avLst/>
-          </a:prstGeom>
-          <a:noFill/>
-        </p:spPr>
-        <p:txBody>
-          <a:bodyPr wrap="square">
-            <a:spAutoFit/>
-          </a:bodyPr>
-          <a:lstStyle/>
-          <a:p>
-            <a:pPr algn="l"/>
-            <a:r>
-              <a:rPr sz="1500" b="1">
-                <a:solidFill>
-                  <a:srgbClr val="102230"/>
-                </a:solidFill>
-                <a:latin typeface="Calibri"/>
-              </a:rPr>
-              <a:t>3. Auto-remediate</a:t>
-            </a:r>
-          </a:p>
-        </p:txBody>
-      </p:sp>
-      <p:sp>
-        <p:nvSpPr>
-          <p:cNvPr id="20" name="TextBox 19"/>
-          <p:cNvSpPr txBox="1"/>
-          <p:nvPr/>
-        </p:nvSpPr>
-        <p:spPr>
-          <a:xfrm>
-            <a:off x="8412480" y="2423160"/>
-            <a:ext cx="3200400" cy="822960"/>
-          </a:xfrm>
-          <a:prstGeom prst="rect">
-            <a:avLst/>
-          </a:prstGeom>
-          <a:noFill/>
-        </p:spPr>
-        <p:txBody>
-          <a:bodyPr wrap="square">
-            <a:spAutoFit/>
-          </a:bodyPr>
-          <a:lstStyle/>
-          <a:p>
-            <a:pPr algn="l"/>
-            <a:r>
-              <a:rPr sz="1300" b="0">
-                <a:solidFill>
-                  <a:srgbClr val="2A3B46"/>
-                </a:solidFill>
-                <a:latin typeface="Calibri"/>
-              </a:rPr>
-              <a:t>--fix-supply-chain [--fix-policies]</a:t>
-            </a:r>
-          </a:p>
-        </p:txBody>
-      </p:sp>
-      <p:sp>
-        <p:nvSpPr>
-          <p:cNvPr id="21" name="Rectangle 20"/>
-          <p:cNvSpPr/>
-          <p:nvPr/>
-        </p:nvSpPr>
-        <p:spPr>
-          <a:xfrm>
-            <a:off x="502920" y="3749039"/>
-            <a:ext cx="3657600" cy="1965960"/>
+            <a:off x="5897880" y="2834640"/>
+            <a:ext cx="5669280" cy="640080"/>
           </a:xfrm>
           <a:prstGeom prst="rect">
             <a:avLst/>
@@ -6491,127 +5859,84 @@
       </p:sp>
       <p:sp>
         <p:nvSpPr>
-          <p:cNvPr id="22" name="Rectangle 21"/>
+          <p:cNvPr id="19" name="TextBox 18"/>
+          <p:cNvSpPr txBox="1"/>
+          <p:nvPr/>
+        </p:nvSpPr>
+        <p:spPr>
+          <a:xfrm>
+            <a:off x="777240" y="2999232"/>
+            <a:ext cx="4846320" cy="365760"/>
+          </a:xfrm>
+          <a:prstGeom prst="rect">
+            <a:avLst/>
+          </a:prstGeom>
+          <a:noFill/>
+        </p:spPr>
+        <p:txBody>
+          <a:bodyPr wrap="square">
+            <a:spAutoFit/>
+          </a:bodyPr>
+          <a:lstStyle/>
+          <a:p>
+            <a:pPr algn="l"/>
+            <a:r>
+              <a:rPr sz="1300" b="0">
+                <a:solidFill>
+                  <a:srgbClr val="102230"/>
+                </a:solidFill>
+                <a:latin typeface="Calibri"/>
+              </a:rPr>
+              <a:t>No mutable latest tags</a:t>
+            </a:r>
+          </a:p>
+        </p:txBody>
+      </p:sp>
+      <p:sp>
+        <p:nvSpPr>
+          <p:cNvPr id="20" name="TextBox 19"/>
+          <p:cNvSpPr txBox="1"/>
+          <p:nvPr/>
+        </p:nvSpPr>
+        <p:spPr>
+          <a:xfrm>
+            <a:off x="6080760" y="2999232"/>
+            <a:ext cx="5303520" cy="365760"/>
+          </a:xfrm>
+          <a:prstGeom prst="rect">
+            <a:avLst/>
+          </a:prstGeom>
+          <a:noFill/>
+        </p:spPr>
+        <p:txBody>
+          <a:bodyPr wrap="square">
+            <a:spAutoFit/>
+          </a:bodyPr>
+          <a:lstStyle/>
+          <a:p>
+            <a:pPr algn="l"/>
+            <a:r>
+              <a:rPr sz="1300" b="0">
+                <a:solidFill>
+                  <a:srgbClr val="2A3B46"/>
+                </a:solidFill>
+                <a:latin typeface="Calibri"/>
+              </a:rPr>
+              <a:t>Gherkin rules fail :latest; auto-pin to sha256</a:t>
+            </a:r>
+          </a:p>
+        </p:txBody>
+      </p:sp>
+      <p:sp>
+        <p:nvSpPr>
+          <p:cNvPr id="21" name="Rectangle 20"/>
           <p:cNvSpPr/>
           <p:nvPr/>
         </p:nvSpPr>
         <p:spPr>
           <a:xfrm>
-            <a:off x="502920" y="3749039"/>
-            <a:ext cx="3657600" cy="91440"/>
-          </a:xfrm>
-          <a:prstGeom prst="rect">
-            <a:avLst/>
-          </a:prstGeom>
-          <a:solidFill>
-            <a:srgbClr val="1A6B63"/>
-          </a:solidFill>
-          <a:ln>
-            <a:noFill/>
-          </a:ln>
-        </p:spPr>
-        <p:style>
-          <a:lnRef idx="1">
-            <a:schemeClr val="accent1"/>
-          </a:lnRef>
-          <a:fillRef idx="3">
-            <a:schemeClr val="accent1"/>
-          </a:fillRef>
-          <a:effectRef idx="2">
-            <a:schemeClr val="accent1"/>
-          </a:effectRef>
-          <a:fontRef idx="minor">
-            <a:schemeClr val="lt1"/>
-          </a:fontRef>
-        </p:style>
-        <p:txBody>
-          <a:bodyPr rtlCol="0" anchor="ctr"/>
-          <a:lstStyle/>
-          <a:p>
-            <a:pPr algn="ctr"/>
-          </a:p>
-        </p:txBody>
-      </p:sp>
-      <p:sp>
-        <p:nvSpPr>
-          <p:cNvPr id="23" name="TextBox 22"/>
-          <p:cNvSpPr txBox="1"/>
-          <p:nvPr/>
-        </p:nvSpPr>
-        <p:spPr>
-          <a:xfrm>
-            <a:off x="731520" y="4069079"/>
-            <a:ext cx="3200400" cy="411480"/>
-          </a:xfrm>
-          <a:prstGeom prst="rect">
-            <a:avLst/>
-          </a:prstGeom>
-          <a:noFill/>
-        </p:spPr>
-        <p:txBody>
-          <a:bodyPr wrap="square">
-            <a:spAutoFit/>
-          </a:bodyPr>
-          <a:lstStyle/>
-          <a:p>
-            <a:pPr algn="l"/>
-            <a:r>
-              <a:rPr sz="1500" b="1">
-                <a:solidFill>
-                  <a:srgbClr val="102230"/>
-                </a:solidFill>
-                <a:latin typeface="Calibri"/>
-              </a:rPr>
-              <a:t>4. Human review</a:t>
-            </a:r>
-          </a:p>
-        </p:txBody>
-      </p:sp>
-      <p:sp>
-        <p:nvSpPr>
-          <p:cNvPr id="24" name="TextBox 23"/>
-          <p:cNvSpPr txBox="1"/>
-          <p:nvPr/>
-        </p:nvSpPr>
-        <p:spPr>
-          <a:xfrm>
-            <a:off x="731520" y="4617719"/>
-            <a:ext cx="3200400" cy="822960"/>
-          </a:xfrm>
-          <a:prstGeom prst="rect">
-            <a:avLst/>
-          </a:prstGeom>
-          <a:noFill/>
-        </p:spPr>
-        <p:txBody>
-          <a:bodyPr wrap="square">
-            <a:spAutoFit/>
-          </a:bodyPr>
-          <a:lstStyle/>
-          <a:p>
-            <a:pPr algn="l"/>
-            <a:r>
-              <a:rPr sz="1300" b="0">
-                <a:solidFill>
-                  <a:srgbClr val="2A3B46"/>
-                </a:solidFill>
-                <a:latin typeface="Calibri"/>
-              </a:rPr>
-              <a:t>--create-mr → approve digest/version bumps</a:t>
-            </a:r>
-          </a:p>
-        </p:txBody>
-      </p:sp>
-      <p:sp>
-        <p:nvSpPr>
-          <p:cNvPr id="25" name="Rectangle 24"/>
-          <p:cNvSpPr/>
-          <p:nvPr/>
-        </p:nvSpPr>
-        <p:spPr>
-          <a:xfrm>
-            <a:off x="4343400" y="3749039"/>
-            <a:ext cx="3657600" cy="1965960"/>
+            <a:off x="594360" y="3566160"/>
+            <a:ext cx="5212080" cy="640080"/>
           </a:xfrm>
           <a:prstGeom prst="rect">
             <a:avLst/>
@@ -6647,127 +5972,14 @@
       </p:sp>
       <p:sp>
         <p:nvSpPr>
-          <p:cNvPr id="26" name="Rectangle 25"/>
+          <p:cNvPr id="22" name="Rectangle 21"/>
           <p:cNvSpPr/>
           <p:nvPr/>
         </p:nvSpPr>
         <p:spPr>
           <a:xfrm>
-            <a:off x="4343400" y="3749039"/>
-            <a:ext cx="3657600" cy="91440"/>
-          </a:xfrm>
-          <a:prstGeom prst="rect">
-            <a:avLst/>
-          </a:prstGeom>
-          <a:solidFill>
-            <a:srgbClr val="1A6B63"/>
-          </a:solidFill>
-          <a:ln>
-            <a:noFill/>
-          </a:ln>
-        </p:spPr>
-        <p:style>
-          <a:lnRef idx="1">
-            <a:schemeClr val="accent1"/>
-          </a:lnRef>
-          <a:fillRef idx="3">
-            <a:schemeClr val="accent1"/>
-          </a:fillRef>
-          <a:effectRef idx="2">
-            <a:schemeClr val="accent1"/>
-          </a:effectRef>
-          <a:fontRef idx="minor">
-            <a:schemeClr val="lt1"/>
-          </a:fontRef>
-        </p:style>
-        <p:txBody>
-          <a:bodyPr rtlCol="0" anchor="ctr"/>
-          <a:lstStyle/>
-          <a:p>
-            <a:pPr algn="ctr"/>
-          </a:p>
-        </p:txBody>
-      </p:sp>
-      <p:sp>
-        <p:nvSpPr>
-          <p:cNvPr id="27" name="TextBox 26"/>
-          <p:cNvSpPr txBox="1"/>
-          <p:nvPr/>
-        </p:nvSpPr>
-        <p:spPr>
-          <a:xfrm>
-            <a:off x="4572000" y="4069079"/>
-            <a:ext cx="3200400" cy="411480"/>
-          </a:xfrm>
-          <a:prstGeom prst="rect">
-            <a:avLst/>
-          </a:prstGeom>
-          <a:noFill/>
-        </p:spPr>
-        <p:txBody>
-          <a:bodyPr wrap="square">
-            <a:spAutoFit/>
-          </a:bodyPr>
-          <a:lstStyle/>
-          <a:p>
-            <a:pPr algn="l"/>
-            <a:r>
-              <a:rPr sz="1500" b="1">
-                <a:solidFill>
-                  <a:srgbClr val="102230"/>
-                </a:solidFill>
-                <a:latin typeface="Calibri"/>
-              </a:rPr>
-              <a:t>5. Document</a:t>
-            </a:r>
-          </a:p>
-        </p:txBody>
-      </p:sp>
-      <p:sp>
-        <p:nvSpPr>
-          <p:cNvPr id="28" name="TextBox 27"/>
-          <p:cNvSpPr txBox="1"/>
-          <p:nvPr/>
-        </p:nvSpPr>
-        <p:spPr>
-          <a:xfrm>
-            <a:off x="4572000" y="4617719"/>
-            <a:ext cx="3200400" cy="822960"/>
-          </a:xfrm>
-          <a:prstGeom prst="rect">
-            <a:avLst/>
-          </a:prstGeom>
-          <a:noFill/>
-        </p:spPr>
-        <p:txBody>
-          <a:bodyPr wrap="square">
-            <a:spAutoFit/>
-          </a:bodyPr>
-          <a:lstStyle/>
-          <a:p>
-            <a:pPr algn="l"/>
-            <a:r>
-              <a:rPr sz="1300" b="0">
-                <a:solidFill>
-                  <a:srgbClr val="2A3B46"/>
-                </a:solidFill>
-                <a:latin typeface="Calibri"/>
-              </a:rPr>
-              <a:t>generate / document gitstrings for evidence</a:t>
-            </a:r>
-          </a:p>
-        </p:txBody>
-      </p:sp>
-      <p:sp>
-        <p:nvSpPr>
-          <p:cNvPr id="29" name="Rectangle 28"/>
-          <p:cNvSpPr/>
-          <p:nvPr/>
-        </p:nvSpPr>
-        <p:spPr>
-          <a:xfrm>
-            <a:off x="8183880" y="3749039"/>
-            <a:ext cx="3657600" cy="1965960"/>
+            <a:off x="5897880" y="3566160"/>
+            <a:ext cx="5669280" cy="640080"/>
           </a:xfrm>
           <a:prstGeom prst="rect">
             <a:avLst/>
@@ -6803,20 +6015,90 @@
       </p:sp>
       <p:sp>
         <p:nvSpPr>
-          <p:cNvPr id="30" name="Rectangle 29"/>
+          <p:cNvPr id="23" name="TextBox 22"/>
+          <p:cNvSpPr txBox="1"/>
+          <p:nvPr/>
+        </p:nvSpPr>
+        <p:spPr>
+          <a:xfrm>
+            <a:off x="777240" y="3730752"/>
+            <a:ext cx="4846320" cy="365760"/>
+          </a:xfrm>
+          <a:prstGeom prst="rect">
+            <a:avLst/>
+          </a:prstGeom>
+          <a:noFill/>
+        </p:spPr>
+        <p:txBody>
+          <a:bodyPr wrap="square">
+            <a:spAutoFit/>
+          </a:bodyPr>
+          <a:lstStyle/>
+          <a:p>
+            <a:pPr algn="l"/>
+            <a:r>
+              <a:rPr sz="1300" b="0">
+                <a:solidFill>
+                  <a:srgbClr val="102230"/>
+                </a:solidFill>
+                <a:latin typeface="Calibri"/>
+              </a:rPr>
+              <a:t>Versions within agreed freshness</a:t>
+            </a:r>
+          </a:p>
+        </p:txBody>
+      </p:sp>
+      <p:sp>
+        <p:nvSpPr>
+          <p:cNvPr id="24" name="TextBox 23"/>
+          <p:cNvSpPr txBox="1"/>
+          <p:nvPr/>
+        </p:nvSpPr>
+        <p:spPr>
+          <a:xfrm>
+            <a:off x="6080760" y="3730752"/>
+            <a:ext cx="5303520" cy="365760"/>
+          </a:xfrm>
+          <a:prstGeom prst="rect">
+            <a:avLst/>
+          </a:prstGeom>
+          <a:noFill/>
+        </p:spPr>
+        <p:txBody>
+          <a:bodyPr wrap="square">
+            <a:spAutoFit/>
+          </a:bodyPr>
+          <a:lstStyle/>
+          <a:p>
+            <a:pPr algn="l"/>
+            <a:r>
+              <a:rPr sz="1300" b="0">
+                <a:solidFill>
+                  <a:srgbClr val="2A3B46"/>
+                </a:solidFill>
+                <a:latin typeface="Calibri"/>
+              </a:rPr>
+              <a:t>Release-lag / latest-N / adoption-window scenarios</a:t>
+            </a:r>
+          </a:p>
+        </p:txBody>
+      </p:sp>
+      <p:sp>
+        <p:nvSpPr>
+          <p:cNvPr id="25" name="Rectangle 24"/>
           <p:cNvSpPr/>
           <p:nvPr/>
         </p:nvSpPr>
         <p:spPr>
           <a:xfrm>
-            <a:off x="8183880" y="3749039"/>
-            <a:ext cx="3657600" cy="91440"/>
+            <a:off x="594360" y="4297680"/>
+            <a:ext cx="5212080" cy="640080"/>
           </a:xfrm>
           <a:prstGeom prst="rect">
             <a:avLst/>
           </a:prstGeom>
           <a:solidFill>
-            <a:srgbClr val="1A6B63"/>
+            <a:srgbClr val="FFFFFF"/>
           </a:solidFill>
           <a:ln>
             <a:noFill/>
@@ -6846,14 +6128,213 @@
       </p:sp>
       <p:sp>
         <p:nvSpPr>
+          <p:cNvPr id="26" name="Rectangle 25"/>
+          <p:cNvSpPr/>
+          <p:nvPr/>
+        </p:nvSpPr>
+        <p:spPr>
+          <a:xfrm>
+            <a:off x="5897880" y="4297680"/>
+            <a:ext cx="5669280" cy="640080"/>
+          </a:xfrm>
+          <a:prstGeom prst="rect">
+            <a:avLst/>
+          </a:prstGeom>
+          <a:solidFill>
+            <a:srgbClr val="FFFFFF"/>
+          </a:solidFill>
+          <a:ln>
+            <a:noFill/>
+          </a:ln>
+        </p:spPr>
+        <p:style>
+          <a:lnRef idx="1">
+            <a:schemeClr val="accent1"/>
+          </a:lnRef>
+          <a:fillRef idx="3">
+            <a:schemeClr val="accent1"/>
+          </a:fillRef>
+          <a:effectRef idx="2">
+            <a:schemeClr val="accent1"/>
+          </a:effectRef>
+          <a:fontRef idx="minor">
+            <a:schemeClr val="lt1"/>
+          </a:fontRef>
+        </p:style>
+        <p:txBody>
+          <a:bodyPr rtlCol="0" anchor="ctr"/>
+          <a:lstStyle/>
+          <a:p>
+            <a:pPr algn="ctr"/>
+          </a:p>
+        </p:txBody>
+      </p:sp>
+      <p:sp>
+        <p:nvSpPr>
+          <p:cNvPr id="27" name="TextBox 26"/>
+          <p:cNvSpPr txBox="1"/>
+          <p:nvPr/>
+        </p:nvSpPr>
+        <p:spPr>
+          <a:xfrm>
+            <a:off x="777240" y="4462272"/>
+            <a:ext cx="4846320" cy="365760"/>
+          </a:xfrm>
+          <a:prstGeom prst="rect">
+            <a:avLst/>
+          </a:prstGeom>
+          <a:noFill/>
+        </p:spPr>
+        <p:txBody>
+          <a:bodyPr wrap="square">
+            <a:spAutoFit/>
+          </a:bodyPr>
+          <a:lstStyle/>
+          <a:p>
+            <a:pPr algn="l"/>
+            <a:r>
+              <a:rPr sz="1300" b="0">
+                <a:solidFill>
+                  <a:srgbClr val="102230"/>
+                </a:solidFill>
+                <a:latin typeface="Calibri"/>
+              </a:rPr>
+              <a:t>Evidence for audits</a:t>
+            </a:r>
+          </a:p>
+        </p:txBody>
+      </p:sp>
+      <p:sp>
+        <p:nvSpPr>
+          <p:cNvPr id="28" name="TextBox 27"/>
+          <p:cNvSpPr txBox="1"/>
+          <p:nvPr/>
+        </p:nvSpPr>
+        <p:spPr>
+          <a:xfrm>
+            <a:off x="6080760" y="4462272"/>
+            <a:ext cx="5303520" cy="365760"/>
+          </a:xfrm>
+          <a:prstGeom prst="rect">
+            <a:avLst/>
+          </a:prstGeom>
+          <a:noFill/>
+        </p:spPr>
+        <p:txBody>
+          <a:bodyPr wrap="square">
+            <a:spAutoFit/>
+          </a:bodyPr>
+          <a:lstStyle/>
+          <a:p>
+            <a:pPr algn="l"/>
+            <a:r>
+              <a:rPr sz="1300" b="0">
+                <a:solidFill>
+                  <a:srgbClr val="2A3B46"/>
+                </a:solidFill>
+                <a:latin typeface="Calibri"/>
+              </a:rPr>
+              <a:t>Markdown/HTML/Code Quality reports + policy metadata IDs</a:t>
+            </a:r>
+          </a:p>
+        </p:txBody>
+      </p:sp>
+      <p:sp>
+        <p:nvSpPr>
+          <p:cNvPr id="29" name="Rectangle 28"/>
+          <p:cNvSpPr/>
+          <p:nvPr/>
+        </p:nvSpPr>
+        <p:spPr>
+          <a:xfrm>
+            <a:off x="594360" y="5029200"/>
+            <a:ext cx="5212080" cy="640080"/>
+          </a:xfrm>
+          <a:prstGeom prst="rect">
+            <a:avLst/>
+          </a:prstGeom>
+          <a:solidFill>
+            <a:srgbClr val="FFFFFF"/>
+          </a:solidFill>
+          <a:ln>
+            <a:noFill/>
+          </a:ln>
+        </p:spPr>
+        <p:style>
+          <a:lnRef idx="1">
+            <a:schemeClr val="accent1"/>
+          </a:lnRef>
+          <a:fillRef idx="3">
+            <a:schemeClr val="accent1"/>
+          </a:fillRef>
+          <a:effectRef idx="2">
+            <a:schemeClr val="accent1"/>
+          </a:effectRef>
+          <a:fontRef idx="minor">
+            <a:schemeClr val="lt1"/>
+          </a:fontRef>
+        </p:style>
+        <p:txBody>
+          <a:bodyPr rtlCol="0" anchor="ctr"/>
+          <a:lstStyle/>
+          <a:p>
+            <a:pPr algn="ctr"/>
+          </a:p>
+        </p:txBody>
+      </p:sp>
+      <p:sp>
+        <p:nvSpPr>
+          <p:cNvPr id="30" name="Rectangle 29"/>
+          <p:cNvSpPr/>
+          <p:nvPr/>
+        </p:nvSpPr>
+        <p:spPr>
+          <a:xfrm>
+            <a:off x="5897880" y="5029200"/>
+            <a:ext cx="5669280" cy="640080"/>
+          </a:xfrm>
+          <a:prstGeom prst="rect">
+            <a:avLst/>
+          </a:prstGeom>
+          <a:solidFill>
+            <a:srgbClr val="FFFFFF"/>
+          </a:solidFill>
+          <a:ln>
+            <a:noFill/>
+          </a:ln>
+        </p:spPr>
+        <p:style>
+          <a:lnRef idx="1">
+            <a:schemeClr val="accent1"/>
+          </a:lnRef>
+          <a:fillRef idx="3">
+            <a:schemeClr val="accent1"/>
+          </a:fillRef>
+          <a:effectRef idx="2">
+            <a:schemeClr val="accent1"/>
+          </a:effectRef>
+          <a:fontRef idx="minor">
+            <a:schemeClr val="lt1"/>
+          </a:fontRef>
+        </p:style>
+        <p:txBody>
+          <a:bodyPr rtlCol="0" anchor="ctr"/>
+          <a:lstStyle/>
+          <a:p>
+            <a:pPr algn="ctr"/>
+          </a:p>
+        </p:txBody>
+      </p:sp>
+      <p:sp>
+        <p:nvSpPr>
           <p:cNvPr id="31" name="TextBox 30"/>
           <p:cNvSpPr txBox="1"/>
           <p:nvPr/>
         </p:nvSpPr>
         <p:spPr>
           <a:xfrm>
-            <a:off x="8412480" y="4069079"/>
-            <a:ext cx="3200400" cy="411480"/>
+            <a:off x="777240" y="5193792"/>
+            <a:ext cx="4846320" cy="365760"/>
           </a:xfrm>
           <a:prstGeom prst="rect">
             <a:avLst/>
@@ -6868,13 +6349,13 @@
           <a:p>
             <a:pPr algn="l"/>
             <a:r>
-              <a:rPr sz="1500" b="1">
+              <a:rPr sz="1300" b="0">
                 <a:solidFill>
                   <a:srgbClr val="102230"/>
                 </a:solidFill>
                 <a:latin typeface="Calibri"/>
               </a:rPr>
-              <a:t>6. Enforce</a:t>
+              <a:t>Sustainable standards</a:t>
             </a:r>
           </a:p>
         </p:txBody>
@@ -6887,8 +6368,8 @@
         </p:nvSpPr>
         <p:spPr>
           <a:xfrm>
-            <a:off x="8412480" y="4617719"/>
-            <a:ext cx="3200400" cy="822960"/>
+            <a:off x="6080760" y="5193792"/>
+            <a:ext cx="5303520" cy="365760"/>
           </a:xfrm>
           <a:prstGeom prst="rect">
             <a:avLst/>
@@ -6909,7 +6390,7 @@
                 </a:solidFill>
                 <a:latin typeface="Calibri"/>
               </a:rPr>
-              <a:t>CI gate + optional Pipeline Execution Policy</a:t>
+              <a:t>Readable Gherkin policies + scheduled supply-chain fix MRs</a:t>
             </a:r>
           </a:p>
         </p:txBody>
@@ -7091,7 +6572,7 @@
                 </a:solidFill>
                 <a:latin typeface="Calibri"/>
               </a:rPr>
-              <a:t>Command cheat sheet</a:t>
+              <a:t>End-to-end: discover → fix → prove → maintain</a:t>
             </a:r>
           </a:p>
         </p:txBody>
@@ -7126,7 +6607,7 @@
                 </a:solidFill>
                 <a:latin typeface="Calibri"/>
               </a:rPr>
-              <a:t>Copy-ready starting points from product docs</a:t>
+              <a:t>One toolchain across migration, compliance, and ongoing standards</a:t>
             </a:r>
           </a:p>
         </p:txBody>
@@ -7161,7 +6642,7 @@
                 </a:solidFill>
                 <a:latin typeface="Calibri"/>
               </a:rPr>
-              <a:t>Impact briefing  ·  Dedicated migration · Nexus · tech debt</a:t>
+              <a:t>Impact briefing  ·  Dedicated · Nexus · tech debt · ongoing standards</a:t>
             </a:r>
           </a:p>
         </p:txBody>
@@ -7196,7 +6677,7 @@
                 </a:solidFill>
                 <a:latin typeface="Calibri"/>
               </a:rPr>
-              <a:t>13 / 15</a:t>
+              <a:t>13 / 16</a:t>
             </a:r>
           </a:p>
         </p:txBody>
@@ -7209,8 +6690,8 @@
         </p:nvSpPr>
         <p:spPr>
           <a:xfrm>
-            <a:off x="502920" y="1371600"/>
-            <a:ext cx="11155680" cy="777240"/>
+            <a:off x="502920" y="1554480"/>
+            <a:ext cx="3657600" cy="1965960"/>
           </a:xfrm>
           <a:prstGeom prst="rect">
             <a:avLst/>
@@ -7252,8 +6733,8 @@
         </p:nvSpPr>
         <p:spPr>
           <a:xfrm>
-            <a:off x="502920" y="1371600"/>
-            <a:ext cx="2194560" cy="777240"/>
+            <a:off x="502920" y="1554480"/>
+            <a:ext cx="3657600" cy="91440"/>
           </a:xfrm>
           <a:prstGeom prst="rect">
             <a:avLst/>
@@ -7295,29 +6776,29 @@
         </p:nvSpPr>
         <p:spPr>
           <a:xfrm>
-            <a:off x="594360" y="1600200"/>
-            <a:ext cx="2011680" cy="365760"/>
-          </a:xfrm>
-          <a:prstGeom prst="rect">
-            <a:avLst/>
-          </a:prstGeom>
-          <a:noFill/>
-        </p:spPr>
-        <p:txBody>
-          <a:bodyPr wrap="square">
-            <a:spAutoFit/>
-          </a:bodyPr>
-          <a:lstStyle/>
-          <a:p>
-            <a:pPr algn="ctr"/>
-            <a:r>
-              <a:rPr sz="1300" b="1">
-                <a:solidFill>
-                  <a:srgbClr val="FFFFFF"/>
-                </a:solidFill>
-                <a:latin typeface="Calibri"/>
-              </a:rPr>
-              <a:t>Find debt</a:t>
+            <a:off x="731520" y="1874520"/>
+            <a:ext cx="3200400" cy="411480"/>
+          </a:xfrm>
+          <a:prstGeom prst="rect">
+            <a:avLst/>
+          </a:prstGeom>
+          <a:noFill/>
+        </p:spPr>
+        <p:txBody>
+          <a:bodyPr wrap="square">
+            <a:spAutoFit/>
+          </a:bodyPr>
+          <a:lstStyle/>
+          <a:p>
+            <a:pPr algn="l"/>
+            <a:r>
+              <a:rPr sz="1500" b="1">
+                <a:solidFill>
+                  <a:srgbClr val="102230"/>
+                </a:solidFill>
+                <a:latin typeface="Calibri"/>
+              </a:rPr>
+              <a:t>1. Shell check</a:t>
             </a:r>
           </a:p>
         </p:txBody>
@@ -7330,8 +6811,8 @@
         </p:nvSpPr>
         <p:spPr>
           <a:xfrm>
-            <a:off x="2880360" y="1554480"/>
-            <a:ext cx="8503920" cy="457200"/>
+            <a:off x="731520" y="2423160"/>
+            <a:ext cx="3200400" cy="822960"/>
           </a:xfrm>
           <a:prstGeom prst="rect">
             <a:avLst/>
@@ -7346,13 +6827,13 @@
           <a:p>
             <a:pPr algn="l"/>
             <a:r>
-              <a:rPr sz="1100" b="0">
+              <a:rPr sz="1300" b="0">
                 <a:solidFill>
                   <a:srgbClr val="2A3B46"/>
                 </a:solidFill>
                 <a:latin typeface="Calibri"/>
               </a:rPr>
-              <a:t>gitlab-compliance check -f policies/security/ -p .gitlab-ci.yml --format markdown -o COMPLIANCE-REPORT.md</a:t>
+              <a:t>Scan repos; write COMPLIANCE-REPORT.md</a:t>
             </a:r>
           </a:p>
         </p:txBody>
@@ -7365,8 +6846,8 @@
         </p:nvSpPr>
         <p:spPr>
           <a:xfrm>
-            <a:off x="502920" y="2240280"/>
-            <a:ext cx="11155680" cy="777240"/>
+            <a:off x="4343400" y="1554480"/>
+            <a:ext cx="3657600" cy="1965960"/>
           </a:xfrm>
           <a:prstGeom prst="rect">
             <a:avLst/>
@@ -7408,8 +6889,8 @@
         </p:nvSpPr>
         <p:spPr>
           <a:xfrm>
-            <a:off x="502920" y="2240280"/>
-            <a:ext cx="2194560" cy="777240"/>
+            <a:off x="4343400" y="1554480"/>
+            <a:ext cx="3657600" cy="91440"/>
           </a:xfrm>
           <a:prstGeom prst="rect">
             <a:avLst/>
@@ -7451,29 +6932,29 @@
         </p:nvSpPr>
         <p:spPr>
           <a:xfrm>
-            <a:off x="594360" y="2468880"/>
-            <a:ext cx="2011680" cy="365760"/>
-          </a:xfrm>
-          <a:prstGeom prst="rect">
-            <a:avLst/>
-          </a:prstGeom>
-          <a:noFill/>
-        </p:spPr>
-        <p:txBody>
-          <a:bodyPr wrap="square">
-            <a:spAutoFit/>
-          </a:bodyPr>
-          <a:lstStyle/>
-          <a:p>
-            <a:pPr algn="ctr"/>
-            <a:r>
-              <a:rPr sz="1300" b="1">
-                <a:solidFill>
-                  <a:srgbClr val="FFFFFF"/>
-                </a:solidFill>
-                <a:latin typeface="Calibri"/>
-              </a:rPr>
-              <a:t>Strict API</a:t>
+            <a:off x="4572000" y="1874520"/>
+            <a:ext cx="3200400" cy="411480"/>
+          </a:xfrm>
+          <a:prstGeom prst="rect">
+            <a:avLst/>
+          </a:prstGeom>
+          <a:noFill/>
+        </p:spPr>
+        <p:txBody>
+          <a:bodyPr wrap="square">
+            <a:spAutoFit/>
+          </a:bodyPr>
+          <a:lstStyle/>
+          <a:p>
+            <a:pPr algn="l"/>
+            <a:r>
+              <a:rPr sz="1500" b="1">
+                <a:solidFill>
+                  <a:srgbClr val="102230"/>
+                </a:solidFill>
+                <a:latin typeface="Calibri"/>
+              </a:rPr>
+              <a:t>2. Triage debt</a:t>
             </a:r>
           </a:p>
         </p:txBody>
@@ -7486,8 +6967,8 @@
         </p:nvSpPr>
         <p:spPr>
           <a:xfrm>
-            <a:off x="2880360" y="2423160"/>
-            <a:ext cx="8503920" cy="457200"/>
+            <a:off x="4572000" y="2423160"/>
+            <a:ext cx="3200400" cy="822960"/>
           </a:xfrm>
           <a:prstGeom prst="rect">
             <a:avLst/>
@@ -7502,13 +6983,13 @@
           <a:p>
             <a:pPr algn="l"/>
             <a:r>
-              <a:rPr sz="1100" b="0">
+              <a:rPr sz="1300" b="0">
                 <a:solidFill>
                   <a:srgbClr val="2A3B46"/>
                 </a:solidFill>
                 <a:latin typeface="Calibri"/>
               </a:rPr>
-              <a:t>gitlab-compliance check -f policies/ -p .gitlab-ci.yml --project "$CI_PROJECT_PATH" --strict</a:t>
+              <a:t>Group by pin / lag / rules / docs gaps</a:t>
             </a:r>
           </a:p>
         </p:txBody>
@@ -7521,8 +7002,8 @@
         </p:nvSpPr>
         <p:spPr>
           <a:xfrm>
-            <a:off x="502920" y="3108960"/>
-            <a:ext cx="11155680" cy="777240"/>
+            <a:off x="8183880" y="1554480"/>
+            <a:ext cx="3657600" cy="1965960"/>
           </a:xfrm>
           <a:prstGeom prst="rect">
             <a:avLst/>
@@ -7564,8 +7045,8 @@
         </p:nvSpPr>
         <p:spPr>
           <a:xfrm>
-            <a:off x="502920" y="3108960"/>
-            <a:ext cx="2194560" cy="777240"/>
+            <a:off x="8183880" y="1554480"/>
+            <a:ext cx="3657600" cy="91440"/>
           </a:xfrm>
           <a:prstGeom prst="rect">
             <a:avLst/>
@@ -7607,29 +7088,29 @@
         </p:nvSpPr>
         <p:spPr>
           <a:xfrm>
-            <a:off x="594360" y="3337560"/>
-            <a:ext cx="2011680" cy="365760"/>
-          </a:xfrm>
-          <a:prstGeom prst="rect">
-            <a:avLst/>
-          </a:prstGeom>
-          <a:noFill/>
-        </p:spPr>
-        <p:txBody>
-          <a:bodyPr wrap="square">
-            <a:spAutoFit/>
-          </a:bodyPr>
-          <a:lstStyle/>
-          <a:p>
-            <a:pPr algn="ctr"/>
-            <a:r>
-              <a:rPr sz="1300" b="1">
-                <a:solidFill>
-                  <a:srgbClr val="FFFFFF"/>
-                </a:solidFill>
-                <a:latin typeface="Calibri"/>
-              </a:rPr>
-              <a:t>Supply chain fix</a:t>
+            <a:off x="8412480" y="1874520"/>
+            <a:ext cx="3200400" cy="411480"/>
+          </a:xfrm>
+          <a:prstGeom prst="rect">
+            <a:avLst/>
+          </a:prstGeom>
+          <a:noFill/>
+        </p:spPr>
+        <p:txBody>
+          <a:bodyPr wrap="square">
+            <a:spAutoFit/>
+          </a:bodyPr>
+          <a:lstStyle/>
+          <a:p>
+            <a:pPr algn="l"/>
+            <a:r>
+              <a:rPr sz="1500" b="1">
+                <a:solidFill>
+                  <a:srgbClr val="102230"/>
+                </a:solidFill>
+                <a:latin typeface="Calibri"/>
+              </a:rPr>
+              <a:t>3. Auto-remediate</a:t>
             </a:r>
           </a:p>
         </p:txBody>
@@ -7642,8 +7123,8 @@
         </p:nvSpPr>
         <p:spPr>
           <a:xfrm>
-            <a:off x="2880360" y="3291840"/>
-            <a:ext cx="8503920" cy="457200"/>
+            <a:off x="8412480" y="2423160"/>
+            <a:ext cx="3200400" cy="822960"/>
           </a:xfrm>
           <a:prstGeom prst="rect">
             <a:avLst/>
@@ -7658,13 +7139,13 @@
           <a:p>
             <a:pPr algn="l"/>
             <a:r>
-              <a:rPr sz="1100" b="0">
+              <a:rPr sz="1300" b="0">
                 <a:solidFill>
                   <a:srgbClr val="2A3B46"/>
                 </a:solidFill>
                 <a:latin typeface="Calibri"/>
               </a:rPr>
-              <a:t>gitlab-compliance check -f policies/security/ -p .gitlab-ci.yml --fix-supply-chain --create-mr --project "$CI_PROJECT_PATH"</a:t>
+              <a:t>--fix-supply-chain [--fix-policies]</a:t>
             </a:r>
           </a:p>
         </p:txBody>
@@ -7677,8 +7158,8 @@
         </p:nvSpPr>
         <p:spPr>
           <a:xfrm>
-            <a:off x="502920" y="3977639"/>
-            <a:ext cx="11155680" cy="777240"/>
+            <a:off x="502920" y="3749039"/>
+            <a:ext cx="3657600" cy="1965960"/>
           </a:xfrm>
           <a:prstGeom prst="rect">
             <a:avLst/>
@@ -7720,8 +7201,8 @@
         </p:nvSpPr>
         <p:spPr>
           <a:xfrm>
-            <a:off x="502920" y="3977639"/>
-            <a:ext cx="2194560" cy="777240"/>
+            <a:off x="502920" y="3749039"/>
+            <a:ext cx="3657600" cy="91440"/>
           </a:xfrm>
           <a:prstGeom prst="rect">
             <a:avLst/>
@@ -7763,29 +7244,29 @@
         </p:nvSpPr>
         <p:spPr>
           <a:xfrm>
-            <a:off x="594360" y="4206239"/>
-            <a:ext cx="2011680" cy="365760"/>
-          </a:xfrm>
-          <a:prstGeom prst="rect">
-            <a:avLst/>
-          </a:prstGeom>
-          <a:noFill/>
-        </p:spPr>
-        <p:txBody>
-          <a:bodyPr wrap="square">
-            <a:spAutoFit/>
-          </a:bodyPr>
-          <a:lstStyle/>
-          <a:p>
-            <a:pPr algn="ctr"/>
-            <a:r>
-              <a:rPr sz="1300" b="1">
-                <a:solidFill>
-                  <a:srgbClr val="FFFFFF"/>
-                </a:solidFill>
-                <a:latin typeface="Calibri"/>
-              </a:rPr>
-              <a:t>Pipeline docs</a:t>
+            <a:off x="731520" y="4069079"/>
+            <a:ext cx="3200400" cy="411480"/>
+          </a:xfrm>
+          <a:prstGeom prst="rect">
+            <a:avLst/>
+          </a:prstGeom>
+          <a:noFill/>
+        </p:spPr>
+        <p:txBody>
+          <a:bodyPr wrap="square">
+            <a:spAutoFit/>
+          </a:bodyPr>
+          <a:lstStyle/>
+          <a:p>
+            <a:pPr algn="l"/>
+            <a:r>
+              <a:rPr sz="1500" b="1">
+                <a:solidFill>
+                  <a:srgbClr val="102230"/>
+                </a:solidFill>
+                <a:latin typeface="Calibri"/>
+              </a:rPr>
+              <a:t>4. Human review</a:t>
             </a:r>
           </a:p>
         </p:txBody>
@@ -7798,8 +7279,8 @@
         </p:nvSpPr>
         <p:spPr>
           <a:xfrm>
-            <a:off x="2880360" y="4160519"/>
-            <a:ext cx="8503920" cy="457200"/>
+            <a:off x="731520" y="4617719"/>
+            <a:ext cx="3200400" cy="822960"/>
           </a:xfrm>
           <a:prstGeom prst="rect">
             <a:avLst/>
@@ -7814,13 +7295,13 @@
           <a:p>
             <a:pPr algn="l"/>
             <a:r>
-              <a:rPr sz="1100" b="0">
+              <a:rPr sz="1300" b="0">
                 <a:solidFill>
                   <a:srgbClr val="2A3B46"/>
                 </a:solidFill>
                 <a:latin typeface="Calibri"/>
               </a:rPr>
-              <a:t>gitlab-compliance generate -i .gitlab-ci.yml --format html -o pipeline-reference/index.html</a:t>
+              <a:t>--create-mr → approve digest/version bumps</a:t>
             </a:r>
           </a:p>
         </p:txBody>
@@ -7833,8 +7314,8 @@
         </p:nvSpPr>
         <p:spPr>
           <a:xfrm>
-            <a:off x="502920" y="4846320"/>
-            <a:ext cx="11155680" cy="777240"/>
+            <a:off x="4343400" y="3749039"/>
+            <a:ext cx="3657600" cy="1965960"/>
           </a:xfrm>
           <a:prstGeom prst="rect">
             <a:avLst/>
@@ -7876,8 +7357,8 @@
         </p:nvSpPr>
         <p:spPr>
           <a:xfrm>
-            <a:off x="502920" y="4846320"/>
-            <a:ext cx="2194560" cy="777240"/>
+            <a:off x="4343400" y="3749039"/>
+            <a:ext cx="3657600" cy="91440"/>
           </a:xfrm>
           <a:prstGeom prst="rect">
             <a:avLst/>
@@ -7919,43 +7400,164 @@
         </p:nvSpPr>
         <p:spPr>
           <a:xfrm>
-            <a:off x="594360" y="5074920"/>
-            <a:ext cx="2011680" cy="365760"/>
-          </a:xfrm>
-          <a:prstGeom prst="rect">
-            <a:avLst/>
-          </a:prstGeom>
-          <a:noFill/>
-        </p:spPr>
-        <p:txBody>
-          <a:bodyPr wrap="square">
-            <a:spAutoFit/>
-          </a:bodyPr>
+            <a:off x="4572000" y="4069079"/>
+            <a:ext cx="3200400" cy="411480"/>
+          </a:xfrm>
+          <a:prstGeom prst="rect">
+            <a:avLst/>
+          </a:prstGeom>
+          <a:noFill/>
+        </p:spPr>
+        <p:txBody>
+          <a:bodyPr wrap="square">
+            <a:spAutoFit/>
+          </a:bodyPr>
+          <a:lstStyle/>
+          <a:p>
+            <a:pPr algn="l"/>
+            <a:r>
+              <a:rPr sz="1500" b="1">
+                <a:solidFill>
+                  <a:srgbClr val="102230"/>
+                </a:solidFill>
+                <a:latin typeface="Calibri"/>
+              </a:rPr>
+              <a:t>5. Document</a:t>
+            </a:r>
+          </a:p>
+        </p:txBody>
+      </p:sp>
+      <p:sp>
+        <p:nvSpPr>
+          <p:cNvPr id="28" name="TextBox 27"/>
+          <p:cNvSpPr txBox="1"/>
+          <p:nvPr/>
+        </p:nvSpPr>
+        <p:spPr>
+          <a:xfrm>
+            <a:off x="4572000" y="4617719"/>
+            <a:ext cx="3200400" cy="822960"/>
+          </a:xfrm>
+          <a:prstGeom prst="rect">
+            <a:avLst/>
+          </a:prstGeom>
+          <a:noFill/>
+        </p:spPr>
+        <p:txBody>
+          <a:bodyPr wrap="square">
+            <a:spAutoFit/>
+          </a:bodyPr>
+          <a:lstStyle/>
+          <a:p>
+            <a:pPr algn="l"/>
+            <a:r>
+              <a:rPr sz="1300" b="0">
+                <a:solidFill>
+                  <a:srgbClr val="2A3B46"/>
+                </a:solidFill>
+                <a:latin typeface="Calibri"/>
+              </a:rPr>
+              <a:t>generate / document gitstrings for evidence</a:t>
+            </a:r>
+          </a:p>
+        </p:txBody>
+      </p:sp>
+      <p:sp>
+        <p:nvSpPr>
+          <p:cNvPr id="29" name="Rectangle 28"/>
+          <p:cNvSpPr/>
+          <p:nvPr/>
+        </p:nvSpPr>
+        <p:spPr>
+          <a:xfrm>
+            <a:off x="8183880" y="3749039"/>
+            <a:ext cx="3657600" cy="1965960"/>
+          </a:xfrm>
+          <a:prstGeom prst="rect">
+            <a:avLst/>
+          </a:prstGeom>
+          <a:solidFill>
+            <a:srgbClr val="FFFFFF"/>
+          </a:solidFill>
+          <a:ln>
+            <a:noFill/>
+          </a:ln>
+        </p:spPr>
+        <p:style>
+          <a:lnRef idx="1">
+            <a:schemeClr val="accent1"/>
+          </a:lnRef>
+          <a:fillRef idx="3">
+            <a:schemeClr val="accent1"/>
+          </a:fillRef>
+          <a:effectRef idx="2">
+            <a:schemeClr val="accent1"/>
+          </a:effectRef>
+          <a:fontRef idx="minor">
+            <a:schemeClr val="lt1"/>
+          </a:fontRef>
+        </p:style>
+        <p:txBody>
+          <a:bodyPr rtlCol="0" anchor="ctr"/>
           <a:lstStyle/>
           <a:p>
             <a:pPr algn="ctr"/>
-            <a:r>
-              <a:rPr sz="1300" b="1">
-                <a:solidFill>
-                  <a:srgbClr val="FFFFFF"/>
-                </a:solidFill>
-                <a:latin typeface="Calibri"/>
-              </a:rPr>
-              <a:t>Fragment docs</a:t>
-            </a:r>
-          </a:p>
-        </p:txBody>
-      </p:sp>
-      <p:sp>
-        <p:nvSpPr>
-          <p:cNvPr id="28" name="TextBox 27"/>
-          <p:cNvSpPr txBox="1"/>
-          <p:nvPr/>
-        </p:nvSpPr>
-        <p:spPr>
-          <a:xfrm>
-            <a:off x="2880360" y="5029200"/>
-            <a:ext cx="8503920" cy="457200"/>
+          </a:p>
+        </p:txBody>
+      </p:sp>
+      <p:sp>
+        <p:nvSpPr>
+          <p:cNvPr id="30" name="Rectangle 29"/>
+          <p:cNvSpPr/>
+          <p:nvPr/>
+        </p:nvSpPr>
+        <p:spPr>
+          <a:xfrm>
+            <a:off x="8183880" y="3749039"/>
+            <a:ext cx="3657600" cy="91440"/>
+          </a:xfrm>
+          <a:prstGeom prst="rect">
+            <a:avLst/>
+          </a:prstGeom>
+          <a:solidFill>
+            <a:srgbClr val="1A6B63"/>
+          </a:solidFill>
+          <a:ln>
+            <a:noFill/>
+          </a:ln>
+        </p:spPr>
+        <p:style>
+          <a:lnRef idx="1">
+            <a:schemeClr val="accent1"/>
+          </a:lnRef>
+          <a:fillRef idx="3">
+            <a:schemeClr val="accent1"/>
+          </a:fillRef>
+          <a:effectRef idx="2">
+            <a:schemeClr val="accent1"/>
+          </a:effectRef>
+          <a:fontRef idx="minor">
+            <a:schemeClr val="lt1"/>
+          </a:fontRef>
+        </p:style>
+        <p:txBody>
+          <a:bodyPr rtlCol="0" anchor="ctr"/>
+          <a:lstStyle/>
+          <a:p>
+            <a:pPr algn="ctr"/>
+          </a:p>
+        </p:txBody>
+      </p:sp>
+      <p:sp>
+        <p:nvSpPr>
+          <p:cNvPr id="31" name="TextBox 30"/>
+          <p:cNvSpPr txBox="1"/>
+          <p:nvPr/>
+        </p:nvSpPr>
+        <p:spPr>
+          <a:xfrm>
+            <a:off x="8412480" y="4069079"/>
+            <a:ext cx="3200400" cy="411480"/>
           </a:xfrm>
           <a:prstGeom prst="rect">
             <a:avLst/>
@@ -7970,13 +7572,48 @@
           <a:p>
             <a:pPr algn="l"/>
             <a:r>
-              <a:rPr sz="1100" b="0">
+              <a:rPr sz="1500" b="1">
+                <a:solidFill>
+                  <a:srgbClr val="102230"/>
+                </a:solidFill>
+                <a:latin typeface="Calibri"/>
+              </a:rPr>
+              <a:t>6. Maintain</a:t>
+            </a:r>
+          </a:p>
+        </p:txBody>
+      </p:sp>
+      <p:sp>
+        <p:nvSpPr>
+          <p:cNvPr id="32" name="TextBox 31"/>
+          <p:cNvSpPr txBox="1"/>
+          <p:nvPr/>
+        </p:nvSpPr>
+        <p:spPr>
+          <a:xfrm>
+            <a:off x="8412480" y="4617719"/>
+            <a:ext cx="3200400" cy="822960"/>
+          </a:xfrm>
+          <a:prstGeom prst="rect">
+            <a:avLst/>
+          </a:prstGeom>
+          <a:noFill/>
+        </p:spPr>
+        <p:txBody>
+          <a:bodyPr wrap="square">
+            <a:spAutoFit/>
+          </a:bodyPr>
+          <a:lstStyle/>
+          <a:p>
+            <a:pPr algn="l"/>
+            <a:r>
+              <a:rPr sz="1300" b="0">
                 <a:solidFill>
                   <a:srgbClr val="2A3B46"/>
                 </a:solidFill>
                 <a:latin typeface="Calibri"/>
               </a:rPr>
-              <a:t>gitlab-compliance document gitstrings -i .gitlab-ci.yml -o README.md</a:t>
+              <a:t>Readable policies + CI gates keep standards ongoing</a:t>
             </a:r>
           </a:p>
         </p:txBody>
@@ -8158,7 +7795,7 @@
                 </a:solidFill>
                 <a:latin typeface="Calibri"/>
               </a:rPr>
-              <a:t>Impact measures</a:t>
+              <a:t>Command cheat sheet</a:t>
             </a:r>
           </a:p>
         </p:txBody>
@@ -8193,7 +7830,7 @@
                 </a:solidFill>
                 <a:latin typeface="Calibri"/>
               </a:rPr>
-              <a:t>How programme leads know debt is under control</a:t>
+              <a:t>Copy-ready starting points from product docs</a:t>
             </a:r>
           </a:p>
         </p:txBody>
@@ -8228,7 +7865,7 @@
                 </a:solidFill>
                 <a:latin typeface="Calibri"/>
               </a:rPr>
-              <a:t>Impact briefing  ·  Dedicated migration · Nexus · tech debt</a:t>
+              <a:t>Impact briefing  ·  Dedicated · Nexus · tech debt · ongoing standards</a:t>
             </a:r>
           </a:p>
         </p:txBody>
@@ -8263,7 +7900,7 @@
                 </a:solidFill>
                 <a:latin typeface="Calibri"/>
               </a:rPr>
-              <a:t>14 / 15</a:t>
+              <a:t>14 / 16</a:t>
             </a:r>
           </a:p>
         </p:txBody>
@@ -8276,8 +7913,8 @@
         </p:nvSpPr>
         <p:spPr>
           <a:xfrm>
-            <a:off x="502920" y="1554480"/>
-            <a:ext cx="3657600" cy="1965960"/>
+            <a:off x="502920" y="1371600"/>
+            <a:ext cx="11155680" cy="777240"/>
           </a:xfrm>
           <a:prstGeom prst="rect">
             <a:avLst/>
@@ -8313,14 +7950,92 @@
       </p:sp>
       <p:sp>
         <p:nvSpPr>
-          <p:cNvPr id="10" name="TextBox 9"/>
-          <p:cNvSpPr txBox="1"/>
-          <p:nvPr/>
-        </p:nvSpPr>
-        <p:spPr>
-          <a:xfrm>
-            <a:off x="731520" y="1874520"/>
-            <a:ext cx="3200400" cy="502920"/>
+          <p:cNvPr id="10" name="Rectangle 9"/>
+          <p:cNvSpPr/>
+          <p:nvPr/>
+        </p:nvSpPr>
+        <p:spPr>
+          <a:xfrm>
+            <a:off x="502920" y="1371600"/>
+            <a:ext cx="2194560" cy="777240"/>
+          </a:xfrm>
+          <a:prstGeom prst="rect">
+            <a:avLst/>
+          </a:prstGeom>
+          <a:solidFill>
+            <a:srgbClr val="1A6B63"/>
+          </a:solidFill>
+          <a:ln>
+            <a:noFill/>
+          </a:ln>
+        </p:spPr>
+        <p:style>
+          <a:lnRef idx="1">
+            <a:schemeClr val="accent1"/>
+          </a:lnRef>
+          <a:fillRef idx="3">
+            <a:schemeClr val="accent1"/>
+          </a:fillRef>
+          <a:effectRef idx="2">
+            <a:schemeClr val="accent1"/>
+          </a:effectRef>
+          <a:fontRef idx="minor">
+            <a:schemeClr val="lt1"/>
+          </a:fontRef>
+        </p:style>
+        <p:txBody>
+          <a:bodyPr rtlCol="0" anchor="ctr"/>
+          <a:lstStyle/>
+          <a:p>
+            <a:pPr algn="ctr"/>
+          </a:p>
+        </p:txBody>
+      </p:sp>
+      <p:sp>
+        <p:nvSpPr>
+          <p:cNvPr id="11" name="TextBox 10"/>
+          <p:cNvSpPr txBox="1"/>
+          <p:nvPr/>
+        </p:nvSpPr>
+        <p:spPr>
+          <a:xfrm>
+            <a:off x="594360" y="1600200"/>
+            <a:ext cx="2011680" cy="365760"/>
+          </a:xfrm>
+          <a:prstGeom prst="rect">
+            <a:avLst/>
+          </a:prstGeom>
+          <a:noFill/>
+        </p:spPr>
+        <p:txBody>
+          <a:bodyPr wrap="square">
+            <a:spAutoFit/>
+          </a:bodyPr>
+          <a:lstStyle/>
+          <a:p>
+            <a:pPr algn="ctr"/>
+            <a:r>
+              <a:rPr sz="1300" b="1">
+                <a:solidFill>
+                  <a:srgbClr val="FFFFFF"/>
+                </a:solidFill>
+                <a:latin typeface="Calibri"/>
+              </a:rPr>
+              <a:t>Find debt</a:t>
+            </a:r>
+          </a:p>
+        </p:txBody>
+      </p:sp>
+      <p:sp>
+        <p:nvSpPr>
+          <p:cNvPr id="12" name="TextBox 11"/>
+          <p:cNvSpPr txBox="1"/>
+          <p:nvPr/>
+        </p:nvSpPr>
+        <p:spPr>
+          <a:xfrm>
+            <a:off x="2880360" y="1554480"/>
+            <a:ext cx="8503920" cy="457200"/>
           </a:xfrm>
           <a:prstGeom prst="rect">
             <a:avLst/>
@@ -8335,62 +8050,27 @@
           <a:p>
             <a:pPr algn="l"/>
             <a:r>
-              <a:rPr sz="1500" b="1">
-                <a:solidFill>
-                  <a:srgbClr val="1A6B63"/>
-                </a:solidFill>
-                <a:latin typeface="Calibri"/>
-              </a:rPr>
-              <a:t>% projects scanned</a:t>
-            </a:r>
-          </a:p>
-        </p:txBody>
-      </p:sp>
-      <p:sp>
-        <p:nvSpPr>
-          <p:cNvPr id="11" name="TextBox 10"/>
-          <p:cNvSpPr txBox="1"/>
-          <p:nvPr/>
-        </p:nvSpPr>
-        <p:spPr>
-          <a:xfrm>
-            <a:off x="731520" y="2468880"/>
-            <a:ext cx="3200400" cy="777240"/>
-          </a:xfrm>
-          <a:prstGeom prst="rect">
-            <a:avLst/>
-          </a:prstGeom>
-          <a:noFill/>
-        </p:spPr>
-        <p:txBody>
-          <a:bodyPr wrap="square">
-            <a:spAutoFit/>
-          </a:bodyPr>
-          <a:lstStyle/>
-          <a:p>
-            <a:pPr algn="l"/>
-            <a:r>
-              <a:rPr sz="1300" b="0">
+              <a:rPr sz="1100" b="0">
                 <a:solidFill>
                   <a:srgbClr val="2A3B46"/>
                 </a:solidFill>
                 <a:latin typeface="Calibri"/>
               </a:rPr>
-              <a:t>Migration cohort coverage via shell/CI check</a:t>
-            </a:r>
-          </a:p>
-        </p:txBody>
-      </p:sp>
-      <p:sp>
-        <p:nvSpPr>
-          <p:cNvPr id="12" name="Rectangle 11"/>
+              <a:t>gitlab-compliance check -f policies/security/ -p .gitlab-ci.yml --format markdown -o COMPLIANCE-REPORT.md</a:t>
+            </a:r>
+          </a:p>
+        </p:txBody>
+      </p:sp>
+      <p:sp>
+        <p:nvSpPr>
+          <p:cNvPr id="13" name="Rectangle 12"/>
           <p:cNvSpPr/>
           <p:nvPr/>
         </p:nvSpPr>
         <p:spPr>
           <a:xfrm>
-            <a:off x="4343400" y="1554480"/>
-            <a:ext cx="3657600" cy="1965960"/>
+            <a:off x="502920" y="2240280"/>
+            <a:ext cx="11155680" cy="777240"/>
           </a:xfrm>
           <a:prstGeom prst="rect">
             <a:avLst/>
@@ -8426,14 +8106,92 @@
       </p:sp>
       <p:sp>
         <p:nvSpPr>
-          <p:cNvPr id="13" name="TextBox 12"/>
-          <p:cNvSpPr txBox="1"/>
-          <p:nvPr/>
-        </p:nvSpPr>
-        <p:spPr>
-          <a:xfrm>
-            <a:off x="4572000" y="1874520"/>
-            <a:ext cx="3200400" cy="502920"/>
+          <p:cNvPr id="14" name="Rectangle 13"/>
+          <p:cNvSpPr/>
+          <p:nvPr/>
+        </p:nvSpPr>
+        <p:spPr>
+          <a:xfrm>
+            <a:off x="502920" y="2240280"/>
+            <a:ext cx="2194560" cy="777240"/>
+          </a:xfrm>
+          <a:prstGeom prst="rect">
+            <a:avLst/>
+          </a:prstGeom>
+          <a:solidFill>
+            <a:srgbClr val="1A6B63"/>
+          </a:solidFill>
+          <a:ln>
+            <a:noFill/>
+          </a:ln>
+        </p:spPr>
+        <p:style>
+          <a:lnRef idx="1">
+            <a:schemeClr val="accent1"/>
+          </a:lnRef>
+          <a:fillRef idx="3">
+            <a:schemeClr val="accent1"/>
+          </a:fillRef>
+          <a:effectRef idx="2">
+            <a:schemeClr val="accent1"/>
+          </a:effectRef>
+          <a:fontRef idx="minor">
+            <a:schemeClr val="lt1"/>
+          </a:fontRef>
+        </p:style>
+        <p:txBody>
+          <a:bodyPr rtlCol="0" anchor="ctr"/>
+          <a:lstStyle/>
+          <a:p>
+            <a:pPr algn="ctr"/>
+          </a:p>
+        </p:txBody>
+      </p:sp>
+      <p:sp>
+        <p:nvSpPr>
+          <p:cNvPr id="15" name="TextBox 14"/>
+          <p:cNvSpPr txBox="1"/>
+          <p:nvPr/>
+        </p:nvSpPr>
+        <p:spPr>
+          <a:xfrm>
+            <a:off x="594360" y="2468880"/>
+            <a:ext cx="2011680" cy="365760"/>
+          </a:xfrm>
+          <a:prstGeom prst="rect">
+            <a:avLst/>
+          </a:prstGeom>
+          <a:noFill/>
+        </p:spPr>
+        <p:txBody>
+          <a:bodyPr wrap="square">
+            <a:spAutoFit/>
+          </a:bodyPr>
+          <a:lstStyle/>
+          <a:p>
+            <a:pPr algn="ctr"/>
+            <a:r>
+              <a:rPr sz="1300" b="1">
+                <a:solidFill>
+                  <a:srgbClr val="FFFFFF"/>
+                </a:solidFill>
+                <a:latin typeface="Calibri"/>
+              </a:rPr>
+              <a:t>Strict API</a:t>
+            </a:r>
+          </a:p>
+        </p:txBody>
+      </p:sp>
+      <p:sp>
+        <p:nvSpPr>
+          <p:cNvPr id="16" name="TextBox 15"/>
+          <p:cNvSpPr txBox="1"/>
+          <p:nvPr/>
+        </p:nvSpPr>
+        <p:spPr>
+          <a:xfrm>
+            <a:off x="2880360" y="2423160"/>
+            <a:ext cx="8503920" cy="457200"/>
           </a:xfrm>
           <a:prstGeom prst="rect">
             <a:avLst/>
@@ -8448,62 +8206,27 @@
           <a:p>
             <a:pPr algn="l"/>
             <a:r>
-              <a:rPr sz="1500" b="1">
-                <a:solidFill>
-                  <a:srgbClr val="1A6B63"/>
-                </a:solidFill>
-                <a:latin typeface="Calibri"/>
-              </a:rPr>
-              <a:t>Open critical findings</a:t>
-            </a:r>
-          </a:p>
-        </p:txBody>
-      </p:sp>
-      <p:sp>
-        <p:nvSpPr>
-          <p:cNvPr id="14" name="TextBox 13"/>
-          <p:cNvSpPr txBox="1"/>
-          <p:nvPr/>
-        </p:nvSpPr>
-        <p:spPr>
-          <a:xfrm>
-            <a:off x="4572000" y="2468880"/>
-            <a:ext cx="3200400" cy="777240"/>
-          </a:xfrm>
-          <a:prstGeom prst="rect">
-            <a:avLst/>
-          </a:prstGeom>
-          <a:noFill/>
-        </p:spPr>
-        <p:txBody>
-          <a:bodyPr wrap="square">
-            <a:spAutoFit/>
-          </a:bodyPr>
-          <a:lstStyle/>
-          <a:p>
-            <a:pPr algn="l"/>
-            <a:r>
-              <a:rPr sz="1300" b="0">
+              <a:rPr sz="1100" b="0">
                 <a:solidFill>
                   <a:srgbClr val="2A3B46"/>
                 </a:solidFill>
                 <a:latin typeface="Calibri"/>
               </a:rPr>
-              <a:t>Unpinned / latest / lag beyond policy</a:t>
-            </a:r>
-          </a:p>
-        </p:txBody>
-      </p:sp>
-      <p:sp>
-        <p:nvSpPr>
-          <p:cNvPr id="15" name="Rectangle 14"/>
+              <a:t>gitlab-compliance check -f policies/ -p .gitlab-ci.yml --project "$CI_PROJECT_PATH" --strict</a:t>
+            </a:r>
+          </a:p>
+        </p:txBody>
+      </p:sp>
+      <p:sp>
+        <p:nvSpPr>
+          <p:cNvPr id="17" name="Rectangle 16"/>
           <p:cNvSpPr/>
           <p:nvPr/>
         </p:nvSpPr>
         <p:spPr>
           <a:xfrm>
-            <a:off x="8183880" y="1554480"/>
-            <a:ext cx="3657600" cy="1965960"/>
+            <a:off x="502920" y="3108960"/>
+            <a:ext cx="11155680" cy="777240"/>
           </a:xfrm>
           <a:prstGeom prst="rect">
             <a:avLst/>
@@ -8539,84 +8262,127 @@
       </p:sp>
       <p:sp>
         <p:nvSpPr>
-          <p:cNvPr id="16" name="TextBox 15"/>
-          <p:cNvSpPr txBox="1"/>
-          <p:nvPr/>
-        </p:nvSpPr>
-        <p:spPr>
-          <a:xfrm>
-            <a:off x="8412480" y="1874520"/>
-            <a:ext cx="3200400" cy="502920"/>
-          </a:xfrm>
-          <a:prstGeom prst="rect">
-            <a:avLst/>
-          </a:prstGeom>
-          <a:noFill/>
-        </p:spPr>
-        <p:txBody>
-          <a:bodyPr wrap="square">
-            <a:spAutoFit/>
-          </a:bodyPr>
-          <a:lstStyle/>
-          <a:p>
-            <a:pPr algn="l"/>
-            <a:r>
-              <a:rPr sz="1500" b="1">
-                <a:solidFill>
-                  <a:srgbClr val="1A6B63"/>
-                </a:solidFill>
-                <a:latin typeface="Calibri"/>
-              </a:rPr>
-              <a:t>Time to remediate</a:t>
-            </a:r>
-          </a:p>
-        </p:txBody>
-      </p:sp>
-      <p:sp>
-        <p:nvSpPr>
-          <p:cNvPr id="17" name="TextBox 16"/>
-          <p:cNvSpPr txBox="1"/>
-          <p:nvPr/>
-        </p:nvSpPr>
-        <p:spPr>
-          <a:xfrm>
-            <a:off x="8412480" y="2468880"/>
-            <a:ext cx="3200400" cy="777240"/>
-          </a:xfrm>
-          <a:prstGeom prst="rect">
-            <a:avLst/>
-          </a:prstGeom>
-          <a:noFill/>
-        </p:spPr>
-        <p:txBody>
-          <a:bodyPr wrap="square">
-            <a:spAutoFit/>
-          </a:bodyPr>
-          <a:lstStyle/>
-          <a:p>
-            <a:pPr algn="l"/>
-            <a:r>
-              <a:rPr sz="1300" b="0">
-                <a:solidFill>
-                  <a:srgbClr val="2A3B46"/>
-                </a:solidFill>
-                <a:latin typeface="Calibri"/>
-              </a:rPr>
-              <a:t>Finding → merged supply-chain MR</a:t>
-            </a:r>
-          </a:p>
-        </p:txBody>
-      </p:sp>
-      <p:sp>
-        <p:nvSpPr>
           <p:cNvPr id="18" name="Rectangle 17"/>
           <p:cNvSpPr/>
           <p:nvPr/>
         </p:nvSpPr>
         <p:spPr>
           <a:xfrm>
-            <a:off x="502920" y="3749039"/>
-            <a:ext cx="3657600" cy="1965960"/>
+            <a:off x="502920" y="3108960"/>
+            <a:ext cx="2194560" cy="777240"/>
+          </a:xfrm>
+          <a:prstGeom prst="rect">
+            <a:avLst/>
+          </a:prstGeom>
+          <a:solidFill>
+            <a:srgbClr val="1A6B63"/>
+          </a:solidFill>
+          <a:ln>
+            <a:noFill/>
+          </a:ln>
+        </p:spPr>
+        <p:style>
+          <a:lnRef idx="1">
+            <a:schemeClr val="accent1"/>
+          </a:lnRef>
+          <a:fillRef idx="3">
+            <a:schemeClr val="accent1"/>
+          </a:fillRef>
+          <a:effectRef idx="2">
+            <a:schemeClr val="accent1"/>
+          </a:effectRef>
+          <a:fontRef idx="minor">
+            <a:schemeClr val="lt1"/>
+          </a:fontRef>
+        </p:style>
+        <p:txBody>
+          <a:bodyPr rtlCol="0" anchor="ctr"/>
+          <a:lstStyle/>
+          <a:p>
+            <a:pPr algn="ctr"/>
+          </a:p>
+        </p:txBody>
+      </p:sp>
+      <p:sp>
+        <p:nvSpPr>
+          <p:cNvPr id="19" name="TextBox 18"/>
+          <p:cNvSpPr txBox="1"/>
+          <p:nvPr/>
+        </p:nvSpPr>
+        <p:spPr>
+          <a:xfrm>
+            <a:off x="594360" y="3337560"/>
+            <a:ext cx="2011680" cy="365760"/>
+          </a:xfrm>
+          <a:prstGeom prst="rect">
+            <a:avLst/>
+          </a:prstGeom>
+          <a:noFill/>
+        </p:spPr>
+        <p:txBody>
+          <a:bodyPr wrap="square">
+            <a:spAutoFit/>
+          </a:bodyPr>
+          <a:lstStyle/>
+          <a:p>
+            <a:pPr algn="ctr"/>
+            <a:r>
+              <a:rPr sz="1300" b="1">
+                <a:solidFill>
+                  <a:srgbClr val="FFFFFF"/>
+                </a:solidFill>
+                <a:latin typeface="Calibri"/>
+              </a:rPr>
+              <a:t>Supply chain fix</a:t>
+            </a:r>
+          </a:p>
+        </p:txBody>
+      </p:sp>
+      <p:sp>
+        <p:nvSpPr>
+          <p:cNvPr id="20" name="TextBox 19"/>
+          <p:cNvSpPr txBox="1"/>
+          <p:nvPr/>
+        </p:nvSpPr>
+        <p:spPr>
+          <a:xfrm>
+            <a:off x="2880360" y="3291840"/>
+            <a:ext cx="8503920" cy="457200"/>
+          </a:xfrm>
+          <a:prstGeom prst="rect">
+            <a:avLst/>
+          </a:prstGeom>
+          <a:noFill/>
+        </p:spPr>
+        <p:txBody>
+          <a:bodyPr wrap="square">
+            <a:spAutoFit/>
+          </a:bodyPr>
+          <a:lstStyle/>
+          <a:p>
+            <a:pPr algn="l"/>
+            <a:r>
+              <a:rPr sz="1100" b="0">
+                <a:solidFill>
+                  <a:srgbClr val="2A3B46"/>
+                </a:solidFill>
+                <a:latin typeface="Calibri"/>
+              </a:rPr>
+              <a:t>gitlab-compliance check -f policies/security/ -p .gitlab-ci.yml --fix-supply-chain --create-mr --project "$CI_PROJECT_PATH"</a:t>
+            </a:r>
+          </a:p>
+        </p:txBody>
+      </p:sp>
+      <p:sp>
+        <p:nvSpPr>
+          <p:cNvPr id="21" name="Rectangle 20"/>
+          <p:cNvSpPr/>
+          <p:nvPr/>
+        </p:nvSpPr>
+        <p:spPr>
+          <a:xfrm>
+            <a:off x="502920" y="3977639"/>
+            <a:ext cx="11155680" cy="777240"/>
           </a:xfrm>
           <a:prstGeom prst="rect">
             <a:avLst/>
@@ -8652,14 +8418,92 @@
       </p:sp>
       <p:sp>
         <p:nvSpPr>
-          <p:cNvPr id="19" name="TextBox 18"/>
-          <p:cNvSpPr txBox="1"/>
-          <p:nvPr/>
-        </p:nvSpPr>
-        <p:spPr>
-          <a:xfrm>
-            <a:off x="731520" y="4069079"/>
-            <a:ext cx="3200400" cy="502920"/>
+          <p:cNvPr id="22" name="Rectangle 21"/>
+          <p:cNvSpPr/>
+          <p:nvPr/>
+        </p:nvSpPr>
+        <p:spPr>
+          <a:xfrm>
+            <a:off x="502920" y="3977639"/>
+            <a:ext cx="2194560" cy="777240"/>
+          </a:xfrm>
+          <a:prstGeom prst="rect">
+            <a:avLst/>
+          </a:prstGeom>
+          <a:solidFill>
+            <a:srgbClr val="1A6B63"/>
+          </a:solidFill>
+          <a:ln>
+            <a:noFill/>
+          </a:ln>
+        </p:spPr>
+        <p:style>
+          <a:lnRef idx="1">
+            <a:schemeClr val="accent1"/>
+          </a:lnRef>
+          <a:fillRef idx="3">
+            <a:schemeClr val="accent1"/>
+          </a:fillRef>
+          <a:effectRef idx="2">
+            <a:schemeClr val="accent1"/>
+          </a:effectRef>
+          <a:fontRef idx="minor">
+            <a:schemeClr val="lt1"/>
+          </a:fontRef>
+        </p:style>
+        <p:txBody>
+          <a:bodyPr rtlCol="0" anchor="ctr"/>
+          <a:lstStyle/>
+          <a:p>
+            <a:pPr algn="ctr"/>
+          </a:p>
+        </p:txBody>
+      </p:sp>
+      <p:sp>
+        <p:nvSpPr>
+          <p:cNvPr id="23" name="TextBox 22"/>
+          <p:cNvSpPr txBox="1"/>
+          <p:nvPr/>
+        </p:nvSpPr>
+        <p:spPr>
+          <a:xfrm>
+            <a:off x="594360" y="4206239"/>
+            <a:ext cx="2011680" cy="365760"/>
+          </a:xfrm>
+          <a:prstGeom prst="rect">
+            <a:avLst/>
+          </a:prstGeom>
+          <a:noFill/>
+        </p:spPr>
+        <p:txBody>
+          <a:bodyPr wrap="square">
+            <a:spAutoFit/>
+          </a:bodyPr>
+          <a:lstStyle/>
+          <a:p>
+            <a:pPr algn="ctr"/>
+            <a:r>
+              <a:rPr sz="1300" b="1">
+                <a:solidFill>
+                  <a:srgbClr val="FFFFFF"/>
+                </a:solidFill>
+                <a:latin typeface="Calibri"/>
+              </a:rPr>
+              <a:t>Pipeline docs</a:t>
+            </a:r>
+          </a:p>
+        </p:txBody>
+      </p:sp>
+      <p:sp>
+        <p:nvSpPr>
+          <p:cNvPr id="24" name="TextBox 23"/>
+          <p:cNvSpPr txBox="1"/>
+          <p:nvPr/>
+        </p:nvSpPr>
+        <p:spPr>
+          <a:xfrm>
+            <a:off x="2880360" y="4160519"/>
+            <a:ext cx="8503920" cy="457200"/>
           </a:xfrm>
           <a:prstGeom prst="rect">
             <a:avLst/>
@@ -8674,62 +8518,27 @@
           <a:p>
             <a:pPr algn="l"/>
             <a:r>
-              <a:rPr sz="1500" b="1">
-                <a:solidFill>
-                  <a:srgbClr val="1A6B63"/>
-                </a:solidFill>
-                <a:latin typeface="Calibri"/>
-              </a:rPr>
-              <a:t>Docs freshness</a:t>
-            </a:r>
-          </a:p>
-        </p:txBody>
-      </p:sp>
-      <p:sp>
-        <p:nvSpPr>
-          <p:cNvPr id="20" name="TextBox 19"/>
-          <p:cNvSpPr txBox="1"/>
-          <p:nvPr/>
-        </p:nvSpPr>
-        <p:spPr>
-          <a:xfrm>
-            <a:off x="731520" y="4663439"/>
-            <a:ext cx="3200400" cy="777240"/>
-          </a:xfrm>
-          <a:prstGeom prst="rect">
-            <a:avLst/>
-          </a:prstGeom>
-          <a:noFill/>
-        </p:spPr>
-        <p:txBody>
-          <a:bodyPr wrap="square">
-            <a:spAutoFit/>
-          </a:bodyPr>
-          <a:lstStyle/>
-          <a:p>
-            <a:pPr algn="l"/>
-            <a:r>
-              <a:rPr sz="1300" b="0">
+              <a:rPr sz="1100" b="0">
                 <a:solidFill>
                   <a:srgbClr val="2A3B46"/>
                 </a:solidFill>
                 <a:latin typeface="Calibri"/>
               </a:rPr>
-              <a:t>generate artefacts attached to readiness packs</a:t>
-            </a:r>
-          </a:p>
-        </p:txBody>
-      </p:sp>
-      <p:sp>
-        <p:nvSpPr>
-          <p:cNvPr id="21" name="Rectangle 20"/>
+              <a:t>gitlab-compliance generate -i .gitlab-ci.yml --format html -o pipeline-reference/index.html</a:t>
+            </a:r>
+          </a:p>
+        </p:txBody>
+      </p:sp>
+      <p:sp>
+        <p:nvSpPr>
+          <p:cNvPr id="25" name="Rectangle 24"/>
           <p:cNvSpPr/>
           <p:nvPr/>
         </p:nvSpPr>
         <p:spPr>
           <a:xfrm>
-            <a:off x="4343400" y="3749039"/>
-            <a:ext cx="3657600" cy="1965960"/>
+            <a:off x="502920" y="4846320"/>
+            <a:ext cx="11155680" cy="777240"/>
           </a:xfrm>
           <a:prstGeom prst="rect">
             <a:avLst/>
@@ -8765,90 +8574,20 @@
       </p:sp>
       <p:sp>
         <p:nvSpPr>
-          <p:cNvPr id="22" name="TextBox 21"/>
-          <p:cNvSpPr txBox="1"/>
-          <p:nvPr/>
-        </p:nvSpPr>
-        <p:spPr>
-          <a:xfrm>
-            <a:off x="4572000" y="4069079"/>
-            <a:ext cx="3200400" cy="502920"/>
-          </a:xfrm>
-          <a:prstGeom prst="rect">
-            <a:avLst/>
-          </a:prstGeom>
-          <a:noFill/>
-        </p:spPr>
-        <p:txBody>
-          <a:bodyPr wrap="square">
-            <a:spAutoFit/>
-          </a:bodyPr>
-          <a:lstStyle/>
-          <a:p>
-            <a:pPr algn="l"/>
-            <a:r>
-              <a:rPr sz="1500" b="1">
-                <a:solidFill>
-                  <a:srgbClr val="1A6B63"/>
-                </a:solidFill>
-                <a:latin typeface="Calibri"/>
-              </a:rPr>
-              <a:t>Gate maturity</a:t>
-            </a:r>
-          </a:p>
-        </p:txBody>
-      </p:sp>
-      <p:sp>
-        <p:nvSpPr>
-          <p:cNvPr id="23" name="TextBox 22"/>
-          <p:cNvSpPr txBox="1"/>
-          <p:nvPr/>
-        </p:nvSpPr>
-        <p:spPr>
-          <a:xfrm>
-            <a:off x="4572000" y="4663439"/>
-            <a:ext cx="3200400" cy="777240"/>
-          </a:xfrm>
-          <a:prstGeom prst="rect">
-            <a:avLst/>
-          </a:prstGeom>
-          <a:noFill/>
-        </p:spPr>
-        <p:txBody>
-          <a:bodyPr wrap="square">
-            <a:spAutoFit/>
-          </a:bodyPr>
-          <a:lstStyle/>
-          <a:p>
-            <a:pPr algn="l"/>
-            <a:r>
-              <a:rPr sz="1300" b="0">
-                <a:solidFill>
-                  <a:srgbClr val="2A3B46"/>
-                </a:solidFill>
-                <a:latin typeface="Calibri"/>
-              </a:rPr>
-              <a:t>Warn-only → blocking → org-wide injection</a:t>
-            </a:r>
-          </a:p>
-        </p:txBody>
-      </p:sp>
-      <p:sp>
-        <p:nvSpPr>
-          <p:cNvPr id="24" name="Rectangle 23"/>
+          <p:cNvPr id="26" name="Rectangle 25"/>
           <p:cNvSpPr/>
           <p:nvPr/>
         </p:nvSpPr>
         <p:spPr>
           <a:xfrm>
-            <a:off x="8183880" y="3749039"/>
-            <a:ext cx="3657600" cy="1965960"/>
+            <a:off x="502920" y="4846320"/>
+            <a:ext cx="2194560" cy="777240"/>
           </a:xfrm>
           <a:prstGeom prst="rect">
             <a:avLst/>
           </a:prstGeom>
           <a:solidFill>
-            <a:srgbClr val="FFFFFF"/>
+            <a:srgbClr val="1A6B63"/>
           </a:solidFill>
           <a:ln>
             <a:noFill/>
@@ -8878,14 +8617,49 @@
       </p:sp>
       <p:sp>
         <p:nvSpPr>
-          <p:cNvPr id="25" name="TextBox 24"/>
-          <p:cNvSpPr txBox="1"/>
-          <p:nvPr/>
-        </p:nvSpPr>
-        <p:spPr>
-          <a:xfrm>
-            <a:off x="8412480" y="4069079"/>
-            <a:ext cx="3200400" cy="502920"/>
+          <p:cNvPr id="27" name="TextBox 26"/>
+          <p:cNvSpPr txBox="1"/>
+          <p:nvPr/>
+        </p:nvSpPr>
+        <p:spPr>
+          <a:xfrm>
+            <a:off x="594360" y="5074920"/>
+            <a:ext cx="2011680" cy="365760"/>
+          </a:xfrm>
+          <a:prstGeom prst="rect">
+            <a:avLst/>
+          </a:prstGeom>
+          <a:noFill/>
+        </p:spPr>
+        <p:txBody>
+          <a:bodyPr wrap="square">
+            <a:spAutoFit/>
+          </a:bodyPr>
+          <a:lstStyle/>
+          <a:p>
+            <a:pPr algn="ctr"/>
+            <a:r>
+              <a:rPr sz="1300" b="1">
+                <a:solidFill>
+                  <a:srgbClr val="FFFFFF"/>
+                </a:solidFill>
+                <a:latin typeface="Calibri"/>
+              </a:rPr>
+              <a:t>Fragment docs</a:t>
+            </a:r>
+          </a:p>
+        </p:txBody>
+      </p:sp>
+      <p:sp>
+        <p:nvSpPr>
+          <p:cNvPr id="28" name="TextBox 27"/>
+          <p:cNvSpPr txBox="1"/>
+          <p:nvPr/>
+        </p:nvSpPr>
+        <p:spPr>
+          <a:xfrm>
+            <a:off x="2880360" y="5029200"/>
+            <a:ext cx="8503920" cy="457200"/>
           </a:xfrm>
           <a:prstGeom prst="rect">
             <a:avLst/>
@@ -8900,48 +8674,13 @@
           <a:p>
             <a:pPr algn="l"/>
             <a:r>
-              <a:rPr sz="1500" b="1">
-                <a:solidFill>
-                  <a:srgbClr val="1A6B63"/>
-                </a:solidFill>
-                <a:latin typeface="Calibri"/>
-              </a:rPr>
-              <a:t>Nexus alignment</a:t>
-            </a:r>
-          </a:p>
-        </p:txBody>
-      </p:sp>
-      <p:sp>
-        <p:nvSpPr>
-          <p:cNvPr id="26" name="TextBox 25"/>
-          <p:cNvSpPr txBox="1"/>
-          <p:nvPr/>
-        </p:nvSpPr>
-        <p:spPr>
-          <a:xfrm>
-            <a:off x="8412480" y="4663439"/>
-            <a:ext cx="3200400" cy="777240"/>
-          </a:xfrm>
-          <a:prstGeom prst="rect">
-            <a:avLst/>
-          </a:prstGeom>
-          <a:noFill/>
-        </p:spPr>
-        <p:txBody>
-          <a:bodyPr wrap="square">
-            <a:spAutoFit/>
-          </a:bodyPr>
-          <a:lstStyle/>
-          <a:p>
-            <a:pPr algn="l"/>
-            <a:r>
-              <a:rPr sz="1300" b="0">
+              <a:rPr sz="1100" b="0">
                 <a:solidFill>
                   <a:srgbClr val="2A3B46"/>
                 </a:solidFill>
                 <a:latin typeface="Calibri"/>
               </a:rPr>
-              <a:t>Digest pins + approved version windows in force</a:t>
+              <a:t>gitlab-compliance document gitstrings -i .gitlab-ci.yml -o README.md</a:t>
             </a:r>
           </a:p>
         </p:txBody>
@@ -8979,6 +8718,49 @@
             <a:avLst/>
           </a:prstGeom>
           <a:solidFill>
+            <a:srgbClr val="F5F7F8"/>
+          </a:solidFill>
+          <a:ln>
+            <a:noFill/>
+          </a:ln>
+        </p:spPr>
+        <p:style>
+          <a:lnRef idx="1">
+            <a:schemeClr val="accent1"/>
+          </a:lnRef>
+          <a:fillRef idx="3">
+            <a:schemeClr val="accent1"/>
+          </a:fillRef>
+          <a:effectRef idx="2">
+            <a:schemeClr val="accent1"/>
+          </a:effectRef>
+          <a:fontRef idx="minor">
+            <a:schemeClr val="lt1"/>
+          </a:fontRef>
+        </p:style>
+        <p:txBody>
+          <a:bodyPr rtlCol="0" anchor="ctr"/>
+          <a:lstStyle/>
+          <a:p>
+            <a:pPr algn="ctr"/>
+          </a:p>
+        </p:txBody>
+      </p:sp>
+      <p:sp>
+        <p:nvSpPr>
+          <p:cNvPr id="3" name="Rectangle 2"/>
+          <p:cNvSpPr/>
+          <p:nvPr/>
+        </p:nvSpPr>
+        <p:spPr>
+          <a:xfrm>
+            <a:off x="0" y="0"/>
+            <a:ext cx="12191695" cy="1143000"/>
+          </a:xfrm>
+          <a:prstGeom prst="rect">
+            <a:avLst/>
+          </a:prstGeom>
+          <a:solidFill>
             <a:srgbClr val="102230"/>
           </a:solidFill>
           <a:ln>
@@ -9009,14 +8791,14 @@
       </p:sp>
       <p:sp>
         <p:nvSpPr>
-          <p:cNvPr id="3" name="Rectangle 2"/>
+          <p:cNvPr id="4" name="Rectangle 3"/>
           <p:cNvSpPr/>
           <p:nvPr/>
         </p:nvSpPr>
         <p:spPr>
           <a:xfrm>
-            <a:off x="0" y="0"/>
-            <a:ext cx="182880" cy="6858000"/>
+            <a:off x="0" y="1143000"/>
+            <a:ext cx="12191695" cy="64008"/>
           </a:xfrm>
           <a:prstGeom prst="rect">
             <a:avLst/>
@@ -9052,6 +8834,928 @@
       </p:sp>
       <p:sp>
         <p:nvSpPr>
+          <p:cNvPr id="5" name="TextBox 4"/>
+          <p:cNvSpPr txBox="1"/>
+          <p:nvPr/>
+        </p:nvSpPr>
+        <p:spPr>
+          <a:xfrm>
+            <a:off x="594360" y="228600"/>
+            <a:ext cx="10972800" cy="457200"/>
+          </a:xfrm>
+          <a:prstGeom prst="rect">
+            <a:avLst/>
+          </a:prstGeom>
+          <a:noFill/>
+        </p:spPr>
+        <p:txBody>
+          <a:bodyPr wrap="square">
+            <a:spAutoFit/>
+          </a:bodyPr>
+          <a:lstStyle/>
+          <a:p>
+            <a:pPr algn="l"/>
+            <a:r>
+              <a:rPr sz="2400" b="1">
+                <a:solidFill>
+                  <a:srgbClr val="FFFFFF"/>
+                </a:solidFill>
+                <a:latin typeface="Calibri"/>
+              </a:rPr>
+              <a:t>Impact measures</a:t>
+            </a:r>
+          </a:p>
+        </p:txBody>
+      </p:sp>
+      <p:sp>
+        <p:nvSpPr>
+          <p:cNvPr id="6" name="TextBox 5"/>
+          <p:cNvSpPr txBox="1"/>
+          <p:nvPr/>
+        </p:nvSpPr>
+        <p:spPr>
+          <a:xfrm>
+            <a:off x="594360" y="713232"/>
+            <a:ext cx="10972800" cy="320040"/>
+          </a:xfrm>
+          <a:prstGeom prst="rect">
+            <a:avLst/>
+          </a:prstGeom>
+          <a:noFill/>
+        </p:spPr>
+        <p:txBody>
+          <a:bodyPr wrap="square">
+            <a:spAutoFit/>
+          </a:bodyPr>
+          <a:lstStyle/>
+          <a:p>
+            <a:pPr algn="l"/>
+            <a:r>
+              <a:rPr sz="1300" b="0">
+                <a:solidFill>
+                  <a:srgbClr val="3CA094"/>
+                </a:solidFill>
+                <a:latin typeface="Calibri"/>
+              </a:rPr>
+              <a:t>How programme leads know debt is under control — and stays that way</a:t>
+            </a:r>
+          </a:p>
+        </p:txBody>
+      </p:sp>
+      <p:sp>
+        <p:nvSpPr>
+          <p:cNvPr id="7" name="TextBox 6"/>
+          <p:cNvSpPr txBox="1"/>
+          <p:nvPr/>
+        </p:nvSpPr>
+        <p:spPr>
+          <a:xfrm>
+            <a:off x="594360" y="6446520"/>
+            <a:ext cx="8229600" cy="256032"/>
+          </a:xfrm>
+          <a:prstGeom prst="rect">
+            <a:avLst/>
+          </a:prstGeom>
+          <a:noFill/>
+        </p:spPr>
+        <p:txBody>
+          <a:bodyPr wrap="square">
+            <a:spAutoFit/>
+          </a:bodyPr>
+          <a:lstStyle/>
+          <a:p>
+            <a:pPr algn="l"/>
+            <a:r>
+              <a:rPr sz="1100" b="0">
+                <a:solidFill>
+                  <a:srgbClr val="5E707A"/>
+                </a:solidFill>
+                <a:latin typeface="Calibri"/>
+              </a:rPr>
+              <a:t>Impact briefing  ·  Dedicated · Nexus · tech debt · ongoing standards</a:t>
+            </a:r>
+          </a:p>
+        </p:txBody>
+      </p:sp>
+      <p:sp>
+        <p:nvSpPr>
+          <p:cNvPr id="8" name="TextBox 7"/>
+          <p:cNvSpPr txBox="1"/>
+          <p:nvPr/>
+        </p:nvSpPr>
+        <p:spPr>
+          <a:xfrm>
+            <a:off x="10241280" y="6446520"/>
+            <a:ext cx="1371600" cy="256032"/>
+          </a:xfrm>
+          <a:prstGeom prst="rect">
+            <a:avLst/>
+          </a:prstGeom>
+          <a:noFill/>
+        </p:spPr>
+        <p:txBody>
+          <a:bodyPr wrap="square">
+            <a:spAutoFit/>
+          </a:bodyPr>
+          <a:lstStyle/>
+          <a:p>
+            <a:pPr algn="r"/>
+            <a:r>
+              <a:rPr sz="1100" b="0">
+                <a:solidFill>
+                  <a:srgbClr val="5E707A"/>
+                </a:solidFill>
+                <a:latin typeface="Calibri"/>
+              </a:rPr>
+              <a:t>15 / 16</a:t>
+            </a:r>
+          </a:p>
+        </p:txBody>
+      </p:sp>
+      <p:sp>
+        <p:nvSpPr>
+          <p:cNvPr id="9" name="Rectangle 8"/>
+          <p:cNvSpPr/>
+          <p:nvPr/>
+        </p:nvSpPr>
+        <p:spPr>
+          <a:xfrm>
+            <a:off x="502920" y="1554480"/>
+            <a:ext cx="3657600" cy="1965960"/>
+          </a:xfrm>
+          <a:prstGeom prst="rect">
+            <a:avLst/>
+          </a:prstGeom>
+          <a:solidFill>
+            <a:srgbClr val="FFFFFF"/>
+          </a:solidFill>
+          <a:ln>
+            <a:noFill/>
+          </a:ln>
+        </p:spPr>
+        <p:style>
+          <a:lnRef idx="1">
+            <a:schemeClr val="accent1"/>
+          </a:lnRef>
+          <a:fillRef idx="3">
+            <a:schemeClr val="accent1"/>
+          </a:fillRef>
+          <a:effectRef idx="2">
+            <a:schemeClr val="accent1"/>
+          </a:effectRef>
+          <a:fontRef idx="minor">
+            <a:schemeClr val="lt1"/>
+          </a:fontRef>
+        </p:style>
+        <p:txBody>
+          <a:bodyPr rtlCol="0" anchor="ctr"/>
+          <a:lstStyle/>
+          <a:p>
+            <a:pPr algn="ctr"/>
+          </a:p>
+        </p:txBody>
+      </p:sp>
+      <p:sp>
+        <p:nvSpPr>
+          <p:cNvPr id="10" name="TextBox 9"/>
+          <p:cNvSpPr txBox="1"/>
+          <p:nvPr/>
+        </p:nvSpPr>
+        <p:spPr>
+          <a:xfrm>
+            <a:off x="731520" y="1874520"/>
+            <a:ext cx="3200400" cy="502920"/>
+          </a:xfrm>
+          <a:prstGeom prst="rect">
+            <a:avLst/>
+          </a:prstGeom>
+          <a:noFill/>
+        </p:spPr>
+        <p:txBody>
+          <a:bodyPr wrap="square">
+            <a:spAutoFit/>
+          </a:bodyPr>
+          <a:lstStyle/>
+          <a:p>
+            <a:pPr algn="l"/>
+            <a:r>
+              <a:rPr sz="1500" b="1">
+                <a:solidFill>
+                  <a:srgbClr val="1A6B63"/>
+                </a:solidFill>
+                <a:latin typeface="Calibri"/>
+              </a:rPr>
+              <a:t>% projects scanned</a:t>
+            </a:r>
+          </a:p>
+        </p:txBody>
+      </p:sp>
+      <p:sp>
+        <p:nvSpPr>
+          <p:cNvPr id="11" name="TextBox 10"/>
+          <p:cNvSpPr txBox="1"/>
+          <p:nvPr/>
+        </p:nvSpPr>
+        <p:spPr>
+          <a:xfrm>
+            <a:off x="731520" y="2468880"/>
+            <a:ext cx="3200400" cy="777240"/>
+          </a:xfrm>
+          <a:prstGeom prst="rect">
+            <a:avLst/>
+          </a:prstGeom>
+          <a:noFill/>
+        </p:spPr>
+        <p:txBody>
+          <a:bodyPr wrap="square">
+            <a:spAutoFit/>
+          </a:bodyPr>
+          <a:lstStyle/>
+          <a:p>
+            <a:pPr algn="l"/>
+            <a:r>
+              <a:rPr sz="1300" b="0">
+                <a:solidFill>
+                  <a:srgbClr val="2A3B46"/>
+                </a:solidFill>
+                <a:latin typeface="Calibri"/>
+              </a:rPr>
+              <a:t>Migration cohort coverage via shell/CI check</a:t>
+            </a:r>
+          </a:p>
+        </p:txBody>
+      </p:sp>
+      <p:sp>
+        <p:nvSpPr>
+          <p:cNvPr id="12" name="Rectangle 11"/>
+          <p:cNvSpPr/>
+          <p:nvPr/>
+        </p:nvSpPr>
+        <p:spPr>
+          <a:xfrm>
+            <a:off x="4343400" y="1554480"/>
+            <a:ext cx="3657600" cy="1965960"/>
+          </a:xfrm>
+          <a:prstGeom prst="rect">
+            <a:avLst/>
+          </a:prstGeom>
+          <a:solidFill>
+            <a:srgbClr val="FFFFFF"/>
+          </a:solidFill>
+          <a:ln>
+            <a:noFill/>
+          </a:ln>
+        </p:spPr>
+        <p:style>
+          <a:lnRef idx="1">
+            <a:schemeClr val="accent1"/>
+          </a:lnRef>
+          <a:fillRef idx="3">
+            <a:schemeClr val="accent1"/>
+          </a:fillRef>
+          <a:effectRef idx="2">
+            <a:schemeClr val="accent1"/>
+          </a:effectRef>
+          <a:fontRef idx="minor">
+            <a:schemeClr val="lt1"/>
+          </a:fontRef>
+        </p:style>
+        <p:txBody>
+          <a:bodyPr rtlCol="0" anchor="ctr"/>
+          <a:lstStyle/>
+          <a:p>
+            <a:pPr algn="ctr"/>
+          </a:p>
+        </p:txBody>
+      </p:sp>
+      <p:sp>
+        <p:nvSpPr>
+          <p:cNvPr id="13" name="TextBox 12"/>
+          <p:cNvSpPr txBox="1"/>
+          <p:nvPr/>
+        </p:nvSpPr>
+        <p:spPr>
+          <a:xfrm>
+            <a:off x="4572000" y="1874520"/>
+            <a:ext cx="3200400" cy="502920"/>
+          </a:xfrm>
+          <a:prstGeom prst="rect">
+            <a:avLst/>
+          </a:prstGeom>
+          <a:noFill/>
+        </p:spPr>
+        <p:txBody>
+          <a:bodyPr wrap="square">
+            <a:spAutoFit/>
+          </a:bodyPr>
+          <a:lstStyle/>
+          <a:p>
+            <a:pPr algn="l"/>
+            <a:r>
+              <a:rPr sz="1500" b="1">
+                <a:solidFill>
+                  <a:srgbClr val="1A6B63"/>
+                </a:solidFill>
+                <a:latin typeface="Calibri"/>
+              </a:rPr>
+              <a:t>Open critical findings</a:t>
+            </a:r>
+          </a:p>
+        </p:txBody>
+      </p:sp>
+      <p:sp>
+        <p:nvSpPr>
+          <p:cNvPr id="14" name="TextBox 13"/>
+          <p:cNvSpPr txBox="1"/>
+          <p:nvPr/>
+        </p:nvSpPr>
+        <p:spPr>
+          <a:xfrm>
+            <a:off x="4572000" y="2468880"/>
+            <a:ext cx="3200400" cy="777240"/>
+          </a:xfrm>
+          <a:prstGeom prst="rect">
+            <a:avLst/>
+          </a:prstGeom>
+          <a:noFill/>
+        </p:spPr>
+        <p:txBody>
+          <a:bodyPr wrap="square">
+            <a:spAutoFit/>
+          </a:bodyPr>
+          <a:lstStyle/>
+          <a:p>
+            <a:pPr algn="l"/>
+            <a:r>
+              <a:rPr sz="1300" b="0">
+                <a:solidFill>
+                  <a:srgbClr val="2A3B46"/>
+                </a:solidFill>
+                <a:latin typeface="Calibri"/>
+              </a:rPr>
+              <a:t>Unpinned / latest / lag beyond policy</a:t>
+            </a:r>
+          </a:p>
+        </p:txBody>
+      </p:sp>
+      <p:sp>
+        <p:nvSpPr>
+          <p:cNvPr id="15" name="Rectangle 14"/>
+          <p:cNvSpPr/>
+          <p:nvPr/>
+        </p:nvSpPr>
+        <p:spPr>
+          <a:xfrm>
+            <a:off x="8183880" y="1554480"/>
+            <a:ext cx="3657600" cy="1965960"/>
+          </a:xfrm>
+          <a:prstGeom prst="rect">
+            <a:avLst/>
+          </a:prstGeom>
+          <a:solidFill>
+            <a:srgbClr val="FFFFFF"/>
+          </a:solidFill>
+          <a:ln>
+            <a:noFill/>
+          </a:ln>
+        </p:spPr>
+        <p:style>
+          <a:lnRef idx="1">
+            <a:schemeClr val="accent1"/>
+          </a:lnRef>
+          <a:fillRef idx="3">
+            <a:schemeClr val="accent1"/>
+          </a:fillRef>
+          <a:effectRef idx="2">
+            <a:schemeClr val="accent1"/>
+          </a:effectRef>
+          <a:fontRef idx="minor">
+            <a:schemeClr val="lt1"/>
+          </a:fontRef>
+        </p:style>
+        <p:txBody>
+          <a:bodyPr rtlCol="0" anchor="ctr"/>
+          <a:lstStyle/>
+          <a:p>
+            <a:pPr algn="ctr"/>
+          </a:p>
+        </p:txBody>
+      </p:sp>
+      <p:sp>
+        <p:nvSpPr>
+          <p:cNvPr id="16" name="TextBox 15"/>
+          <p:cNvSpPr txBox="1"/>
+          <p:nvPr/>
+        </p:nvSpPr>
+        <p:spPr>
+          <a:xfrm>
+            <a:off x="8412480" y="1874520"/>
+            <a:ext cx="3200400" cy="502920"/>
+          </a:xfrm>
+          <a:prstGeom prst="rect">
+            <a:avLst/>
+          </a:prstGeom>
+          <a:noFill/>
+        </p:spPr>
+        <p:txBody>
+          <a:bodyPr wrap="square">
+            <a:spAutoFit/>
+          </a:bodyPr>
+          <a:lstStyle/>
+          <a:p>
+            <a:pPr algn="l"/>
+            <a:r>
+              <a:rPr sz="1500" b="1">
+                <a:solidFill>
+                  <a:srgbClr val="1A6B63"/>
+                </a:solidFill>
+                <a:latin typeface="Calibri"/>
+              </a:rPr>
+              <a:t>Time to remediate</a:t>
+            </a:r>
+          </a:p>
+        </p:txBody>
+      </p:sp>
+      <p:sp>
+        <p:nvSpPr>
+          <p:cNvPr id="17" name="TextBox 16"/>
+          <p:cNvSpPr txBox="1"/>
+          <p:nvPr/>
+        </p:nvSpPr>
+        <p:spPr>
+          <a:xfrm>
+            <a:off x="8412480" y="2468880"/>
+            <a:ext cx="3200400" cy="777240"/>
+          </a:xfrm>
+          <a:prstGeom prst="rect">
+            <a:avLst/>
+          </a:prstGeom>
+          <a:noFill/>
+        </p:spPr>
+        <p:txBody>
+          <a:bodyPr wrap="square">
+            <a:spAutoFit/>
+          </a:bodyPr>
+          <a:lstStyle/>
+          <a:p>
+            <a:pPr algn="l"/>
+            <a:r>
+              <a:rPr sz="1300" b="0">
+                <a:solidFill>
+                  <a:srgbClr val="2A3B46"/>
+                </a:solidFill>
+                <a:latin typeface="Calibri"/>
+              </a:rPr>
+              <a:t>Finding → merged supply-chain MR</a:t>
+            </a:r>
+          </a:p>
+        </p:txBody>
+      </p:sp>
+      <p:sp>
+        <p:nvSpPr>
+          <p:cNvPr id="18" name="Rectangle 17"/>
+          <p:cNvSpPr/>
+          <p:nvPr/>
+        </p:nvSpPr>
+        <p:spPr>
+          <a:xfrm>
+            <a:off x="502920" y="3749039"/>
+            <a:ext cx="3657600" cy="1965960"/>
+          </a:xfrm>
+          <a:prstGeom prst="rect">
+            <a:avLst/>
+          </a:prstGeom>
+          <a:solidFill>
+            <a:srgbClr val="FFFFFF"/>
+          </a:solidFill>
+          <a:ln>
+            <a:noFill/>
+          </a:ln>
+        </p:spPr>
+        <p:style>
+          <a:lnRef idx="1">
+            <a:schemeClr val="accent1"/>
+          </a:lnRef>
+          <a:fillRef idx="3">
+            <a:schemeClr val="accent1"/>
+          </a:fillRef>
+          <a:effectRef idx="2">
+            <a:schemeClr val="accent1"/>
+          </a:effectRef>
+          <a:fontRef idx="minor">
+            <a:schemeClr val="lt1"/>
+          </a:fontRef>
+        </p:style>
+        <p:txBody>
+          <a:bodyPr rtlCol="0" anchor="ctr"/>
+          <a:lstStyle/>
+          <a:p>
+            <a:pPr algn="ctr"/>
+          </a:p>
+        </p:txBody>
+      </p:sp>
+      <p:sp>
+        <p:nvSpPr>
+          <p:cNvPr id="19" name="TextBox 18"/>
+          <p:cNvSpPr txBox="1"/>
+          <p:nvPr/>
+        </p:nvSpPr>
+        <p:spPr>
+          <a:xfrm>
+            <a:off x="731520" y="4069079"/>
+            <a:ext cx="3200400" cy="502920"/>
+          </a:xfrm>
+          <a:prstGeom prst="rect">
+            <a:avLst/>
+          </a:prstGeom>
+          <a:noFill/>
+        </p:spPr>
+        <p:txBody>
+          <a:bodyPr wrap="square">
+            <a:spAutoFit/>
+          </a:bodyPr>
+          <a:lstStyle/>
+          <a:p>
+            <a:pPr algn="l"/>
+            <a:r>
+              <a:rPr sz="1500" b="1">
+                <a:solidFill>
+                  <a:srgbClr val="1A6B63"/>
+                </a:solidFill>
+                <a:latin typeface="Calibri"/>
+              </a:rPr>
+              <a:t>Docs freshness</a:t>
+            </a:r>
+          </a:p>
+        </p:txBody>
+      </p:sp>
+      <p:sp>
+        <p:nvSpPr>
+          <p:cNvPr id="20" name="TextBox 19"/>
+          <p:cNvSpPr txBox="1"/>
+          <p:nvPr/>
+        </p:nvSpPr>
+        <p:spPr>
+          <a:xfrm>
+            <a:off x="731520" y="4663439"/>
+            <a:ext cx="3200400" cy="777240"/>
+          </a:xfrm>
+          <a:prstGeom prst="rect">
+            <a:avLst/>
+          </a:prstGeom>
+          <a:noFill/>
+        </p:spPr>
+        <p:txBody>
+          <a:bodyPr wrap="square">
+            <a:spAutoFit/>
+          </a:bodyPr>
+          <a:lstStyle/>
+          <a:p>
+            <a:pPr algn="l"/>
+            <a:r>
+              <a:rPr sz="1300" b="0">
+                <a:solidFill>
+                  <a:srgbClr val="2A3B46"/>
+                </a:solidFill>
+                <a:latin typeface="Calibri"/>
+              </a:rPr>
+              <a:t>generate artefacts attached to readiness packs</a:t>
+            </a:r>
+          </a:p>
+        </p:txBody>
+      </p:sp>
+      <p:sp>
+        <p:nvSpPr>
+          <p:cNvPr id="21" name="Rectangle 20"/>
+          <p:cNvSpPr/>
+          <p:nvPr/>
+        </p:nvSpPr>
+        <p:spPr>
+          <a:xfrm>
+            <a:off x="4343400" y="3749039"/>
+            <a:ext cx="3657600" cy="1965960"/>
+          </a:xfrm>
+          <a:prstGeom prst="rect">
+            <a:avLst/>
+          </a:prstGeom>
+          <a:solidFill>
+            <a:srgbClr val="FFFFFF"/>
+          </a:solidFill>
+          <a:ln>
+            <a:noFill/>
+          </a:ln>
+        </p:spPr>
+        <p:style>
+          <a:lnRef idx="1">
+            <a:schemeClr val="accent1"/>
+          </a:lnRef>
+          <a:fillRef idx="3">
+            <a:schemeClr val="accent1"/>
+          </a:fillRef>
+          <a:effectRef idx="2">
+            <a:schemeClr val="accent1"/>
+          </a:effectRef>
+          <a:fontRef idx="minor">
+            <a:schemeClr val="lt1"/>
+          </a:fontRef>
+        </p:style>
+        <p:txBody>
+          <a:bodyPr rtlCol="0" anchor="ctr"/>
+          <a:lstStyle/>
+          <a:p>
+            <a:pPr algn="ctr"/>
+          </a:p>
+        </p:txBody>
+      </p:sp>
+      <p:sp>
+        <p:nvSpPr>
+          <p:cNvPr id="22" name="TextBox 21"/>
+          <p:cNvSpPr txBox="1"/>
+          <p:nvPr/>
+        </p:nvSpPr>
+        <p:spPr>
+          <a:xfrm>
+            <a:off x="4572000" y="4069079"/>
+            <a:ext cx="3200400" cy="502920"/>
+          </a:xfrm>
+          <a:prstGeom prst="rect">
+            <a:avLst/>
+          </a:prstGeom>
+          <a:noFill/>
+        </p:spPr>
+        <p:txBody>
+          <a:bodyPr wrap="square">
+            <a:spAutoFit/>
+          </a:bodyPr>
+          <a:lstStyle/>
+          <a:p>
+            <a:pPr algn="l"/>
+            <a:r>
+              <a:rPr sz="1500" b="1">
+                <a:solidFill>
+                  <a:srgbClr val="1A6B63"/>
+                </a:solidFill>
+                <a:latin typeface="Calibri"/>
+              </a:rPr>
+              <a:t>Policy clarity</a:t>
+            </a:r>
+          </a:p>
+        </p:txBody>
+      </p:sp>
+      <p:sp>
+        <p:nvSpPr>
+          <p:cNvPr id="23" name="TextBox 22"/>
+          <p:cNvSpPr txBox="1"/>
+          <p:nvPr/>
+        </p:nvSpPr>
+        <p:spPr>
+          <a:xfrm>
+            <a:off x="4572000" y="4663439"/>
+            <a:ext cx="3200400" cy="777240"/>
+          </a:xfrm>
+          <a:prstGeom prst="rect">
+            <a:avLst/>
+          </a:prstGeom>
+          <a:noFill/>
+        </p:spPr>
+        <p:txBody>
+          <a:bodyPr wrap="square">
+            <a:spAutoFit/>
+          </a:bodyPr>
+          <a:lstStyle/>
+          <a:p>
+            <a:pPr algn="l"/>
+            <a:r>
+              <a:rPr sz="1300" b="0">
+                <a:solidFill>
+                  <a:srgbClr val="2A3B46"/>
+                </a:solidFill>
+                <a:latin typeface="Calibri"/>
+              </a:rPr>
+              <a:t>Teams can explain failed scenarios without YAML experts</a:t>
+            </a:r>
+          </a:p>
+        </p:txBody>
+      </p:sp>
+      <p:sp>
+        <p:nvSpPr>
+          <p:cNvPr id="24" name="Rectangle 23"/>
+          <p:cNvSpPr/>
+          <p:nvPr/>
+        </p:nvSpPr>
+        <p:spPr>
+          <a:xfrm>
+            <a:off x="8183880" y="3749039"/>
+            <a:ext cx="3657600" cy="1965960"/>
+          </a:xfrm>
+          <a:prstGeom prst="rect">
+            <a:avLst/>
+          </a:prstGeom>
+          <a:solidFill>
+            <a:srgbClr val="FFFFFF"/>
+          </a:solidFill>
+          <a:ln>
+            <a:noFill/>
+          </a:ln>
+        </p:spPr>
+        <p:style>
+          <a:lnRef idx="1">
+            <a:schemeClr val="accent1"/>
+          </a:lnRef>
+          <a:fillRef idx="3">
+            <a:schemeClr val="accent1"/>
+          </a:fillRef>
+          <a:effectRef idx="2">
+            <a:schemeClr val="accent1"/>
+          </a:effectRef>
+          <a:fontRef idx="minor">
+            <a:schemeClr val="lt1"/>
+          </a:fontRef>
+        </p:style>
+        <p:txBody>
+          <a:bodyPr rtlCol="0" anchor="ctr"/>
+          <a:lstStyle/>
+          <a:p>
+            <a:pPr algn="ctr"/>
+          </a:p>
+        </p:txBody>
+      </p:sp>
+      <p:sp>
+        <p:nvSpPr>
+          <p:cNvPr id="25" name="TextBox 24"/>
+          <p:cNvSpPr txBox="1"/>
+          <p:nvPr/>
+        </p:nvSpPr>
+        <p:spPr>
+          <a:xfrm>
+            <a:off x="8412480" y="4069079"/>
+            <a:ext cx="3200400" cy="502920"/>
+          </a:xfrm>
+          <a:prstGeom prst="rect">
+            <a:avLst/>
+          </a:prstGeom>
+          <a:noFill/>
+        </p:spPr>
+        <p:txBody>
+          <a:bodyPr wrap="square">
+            <a:spAutoFit/>
+          </a:bodyPr>
+          <a:lstStyle/>
+          <a:p>
+            <a:pPr algn="l"/>
+            <a:r>
+              <a:rPr sz="1500" b="1">
+                <a:solidFill>
+                  <a:srgbClr val="1A6B63"/>
+                </a:solidFill>
+                <a:latin typeface="Calibri"/>
+              </a:rPr>
+              <a:t>Standards stickiness</a:t>
+            </a:r>
+          </a:p>
+        </p:txBody>
+      </p:sp>
+      <p:sp>
+        <p:nvSpPr>
+          <p:cNvPr id="26" name="TextBox 25"/>
+          <p:cNvSpPr txBox="1"/>
+          <p:nvPr/>
+        </p:nvSpPr>
+        <p:spPr>
+          <a:xfrm>
+            <a:off x="8412480" y="4663439"/>
+            <a:ext cx="3200400" cy="777240"/>
+          </a:xfrm>
+          <a:prstGeom prst="rect">
+            <a:avLst/>
+          </a:prstGeom>
+          <a:noFill/>
+        </p:spPr>
+        <p:txBody>
+          <a:bodyPr wrap="square">
+            <a:spAutoFit/>
+          </a:bodyPr>
+          <a:lstStyle/>
+          <a:p>
+            <a:pPr algn="l"/>
+            <a:r>
+              <a:rPr sz="1300" b="0">
+                <a:solidFill>
+                  <a:srgbClr val="2A3B46"/>
+                </a:solidFill>
+                <a:latin typeface="Calibri"/>
+              </a:rPr>
+              <a:t>Readable policies enforced after Dedicated cutover</a:t>
+            </a:r>
+          </a:p>
+        </p:txBody>
+      </p:sp>
+    </p:spTree>
+  </p:cSld>
+  <p:clrMapOvr>
+    <a:masterClrMapping/>
+  </p:clrMapOvr>
+</p:sld>
+</file>
+
+<file path=ppt/slides/slide16.xml><?xml version="1.0" encoding="utf-8"?>
+<p:sld xmlns:a="http://schemas.openxmlformats.org/drawingml/2006/main" xmlns:p="http://schemas.openxmlformats.org/presentationml/2006/main" xmlns:r="http://schemas.openxmlformats.org/officeDocument/2006/relationships">
+  <p:cSld>
+    <p:spTree>
+      <p:nvGrpSpPr>
+        <p:cNvPr id="1" name=""/>
+        <p:cNvGrpSpPr/>
+        <p:nvPr/>
+      </p:nvGrpSpPr>
+      <p:grpSpPr/>
+      <p:sp>
+        <p:nvSpPr>
+          <p:cNvPr id="2" name="Rectangle 1"/>
+          <p:cNvSpPr/>
+          <p:nvPr/>
+        </p:nvSpPr>
+        <p:spPr>
+          <a:xfrm>
+            <a:off x="0" y="0"/>
+            <a:ext cx="12191695" cy="6858000"/>
+          </a:xfrm>
+          <a:prstGeom prst="rect">
+            <a:avLst/>
+          </a:prstGeom>
+          <a:solidFill>
+            <a:srgbClr val="102230"/>
+          </a:solidFill>
+          <a:ln>
+            <a:noFill/>
+          </a:ln>
+        </p:spPr>
+        <p:style>
+          <a:lnRef idx="1">
+            <a:schemeClr val="accent1"/>
+          </a:lnRef>
+          <a:fillRef idx="3">
+            <a:schemeClr val="accent1"/>
+          </a:fillRef>
+          <a:effectRef idx="2">
+            <a:schemeClr val="accent1"/>
+          </a:effectRef>
+          <a:fontRef idx="minor">
+            <a:schemeClr val="lt1"/>
+          </a:fontRef>
+        </p:style>
+        <p:txBody>
+          <a:bodyPr rtlCol="0" anchor="ctr"/>
+          <a:lstStyle/>
+          <a:p>
+            <a:pPr algn="ctr"/>
+          </a:p>
+        </p:txBody>
+      </p:sp>
+      <p:sp>
+        <p:nvSpPr>
+          <p:cNvPr id="3" name="Rectangle 2"/>
+          <p:cNvSpPr/>
+          <p:nvPr/>
+        </p:nvSpPr>
+        <p:spPr>
+          <a:xfrm>
+            <a:off x="0" y="0"/>
+            <a:ext cx="182880" cy="6858000"/>
+          </a:xfrm>
+          <a:prstGeom prst="rect">
+            <a:avLst/>
+          </a:prstGeom>
+          <a:solidFill>
+            <a:srgbClr val="1A6B63"/>
+          </a:solidFill>
+          <a:ln>
+            <a:noFill/>
+          </a:ln>
+        </p:spPr>
+        <p:style>
+          <a:lnRef idx="1">
+            <a:schemeClr val="accent1"/>
+          </a:lnRef>
+          <a:fillRef idx="3">
+            <a:schemeClr val="accent1"/>
+          </a:fillRef>
+          <a:effectRef idx="2">
+            <a:schemeClr val="accent1"/>
+          </a:effectRef>
+          <a:fontRef idx="minor">
+            <a:schemeClr val="lt1"/>
+          </a:fontRef>
+        </p:style>
+        <p:txBody>
+          <a:bodyPr rtlCol="0" anchor="ctr"/>
+          <a:lstStyle/>
+          <a:p>
+            <a:pPr algn="ctr"/>
+          </a:p>
+        </p:txBody>
+      </p:sp>
+      <p:sp>
+        <p:nvSpPr>
           <p:cNvPr id="4" name="TextBox 3"/>
           <p:cNvSpPr txBox="1"/>
           <p:nvPr/>
@@ -9183,7 +9887,7 @@
                 </a:solidFill>
                 <a:latin typeface="Calibri"/>
               </a:rPr>
-              <a:t>5.  Agree Nexus-aligned pin rules, then move CI from warn-only to blocking</a:t>
+              <a:t>5.  Author Nexus-aligned rules as readable Gherkin — then move CI from warn-only to blocking</a:t>
             </a:r>
           </a:p>
         </p:txBody>
@@ -9470,7 +10174,7 @@
                 </a:solidFill>
                 <a:latin typeface="Calibri"/>
               </a:rPr>
-              <a:t>Impact briefing  ·  Dedicated migration · Nexus · tech debt</a:t>
+              <a:t>Impact briefing  ·  Dedicated · Nexus · tech debt · ongoing standards</a:t>
             </a:r>
           </a:p>
         </p:txBody>
@@ -9505,7 +10209,7 @@
                 </a:solidFill>
                 <a:latin typeface="Calibri"/>
               </a:rPr>
-              <a:t>2 / 15</a:t>
+              <a:t>2 / 16</a:t>
             </a:r>
           </a:p>
         </p:txBody>
@@ -9592,7 +10296,7 @@
                 </a:solidFill>
                 <a:latin typeface="Calibri"/>
               </a:rPr>
-              <a:t>4.  Deep dive on each capability and the outcome it creates</a:t>
+              <a:t>4.  Ongoing standards via easy-to-understand Gherkin policies</a:t>
             </a:r>
           </a:p>
           <a:p>
@@ -9608,7 +10312,7 @@
                 </a:solidFill>
                 <a:latin typeface="Calibri"/>
               </a:rPr>
-              <a:t>5.  End-to-end debt discovery → remediate → prove compliance</a:t>
+              <a:t>5.  Deep dive on each capability and the outcome it creates</a:t>
             </a:r>
           </a:p>
           <a:p>
@@ -9624,7 +10328,23 @@
                 </a:solidFill>
                 <a:latin typeface="Calibri"/>
               </a:rPr>
-              <a:t>6.  Recommended rollout for migration programmes</a:t>
+              <a:t>6.  End-to-end debt discovery → remediate → prove → maintain</a:t>
+            </a:r>
+          </a:p>
+          <a:p>
+            <a:pPr>
+              <a:spcAft>
+                <a:spcPts val="800"/>
+              </a:spcAft>
+            </a:pPr>
+            <a:r>
+              <a:rPr sz="1900" b="0">
+                <a:solidFill>
+                  <a:srgbClr val="2A3B46"/>
+                </a:solidFill>
+                <a:latin typeface="Calibri"/>
+              </a:rPr>
+              <a:t>7.  Recommended rollout for migration programmes</a:t>
             </a:r>
           </a:p>
         </p:txBody>
@@ -9876,7 +10596,7 @@
                 </a:solidFill>
                 <a:latin typeface="Calibri"/>
               </a:rPr>
-              <a:t>Impact briefing  ·  Dedicated migration · Nexus · tech debt</a:t>
+              <a:t>Impact briefing  ·  Dedicated · Nexus · tech debt · ongoing standards</a:t>
             </a:r>
           </a:p>
         </p:txBody>
@@ -9911,7 +10631,7 @@
                 </a:solidFill>
                 <a:latin typeface="Calibri"/>
               </a:rPr>
-              <a:t>3 / 15</a:t>
+              <a:t>3 / 16</a:t>
             </a:r>
           </a:p>
         </p:txBody>
@@ -10579,7 +11299,7 @@
                 </a:solidFill>
                 <a:latin typeface="Calibri"/>
               </a:rPr>
-              <a:t>Impact briefing  ·  Dedicated migration · Nexus · tech debt</a:t>
+              <a:t>Impact briefing  ·  Dedicated · Nexus · tech debt · ongoing standards</a:t>
             </a:r>
           </a:p>
         </p:txBody>
@@ -10614,7 +11334,7 @@
                 </a:solidFill>
                 <a:latin typeface="Calibri"/>
               </a:rPr>
-              <a:t>4 / 15</a:t>
+              <a:t>4 / 16</a:t>
             </a:r>
           </a:p>
         </p:txBody>
@@ -12079,7 +12799,7 @@
                 </a:solidFill>
                 <a:latin typeface="Calibri"/>
               </a:rPr>
-              <a:t>Four levers — one outcome: visible, fixable debt</a:t>
+              <a:t>Find debt now — keep standards clear afterwards</a:t>
             </a:r>
           </a:p>
         </p:txBody>
@@ -12114,7 +12834,7 @@
                 </a:solidFill>
                 <a:latin typeface="Calibri"/>
               </a:rPr>
-              <a:t>Impact briefing  ·  Dedicated migration · Nexus · tech debt</a:t>
+              <a:t>Impact briefing  ·  Dedicated · Nexus · tech debt · ongoing standards</a:t>
             </a:r>
           </a:p>
         </p:txBody>
@@ -12149,7 +12869,7 @@
                 </a:solidFill>
                 <a:latin typeface="Calibri"/>
               </a:rPr>
-              <a:t>5 / 15</a:t>
+              <a:t>5 / 16</a:t>
             </a:r>
           </a:p>
         </p:txBody>
@@ -12162,8 +12882,8 @@
         </p:nvSpPr>
         <p:spPr>
           <a:xfrm>
-            <a:off x="594360" y="1417320"/>
-            <a:ext cx="10972800" cy="987552"/>
+            <a:off x="594360" y="1371600"/>
+            <a:ext cx="10972800" cy="822960"/>
           </a:xfrm>
           <a:prstGeom prst="rect">
             <a:avLst/>
@@ -12205,8 +12925,8 @@
         </p:nvSpPr>
         <p:spPr>
           <a:xfrm>
-            <a:off x="594360" y="1417320"/>
-            <a:ext cx="2194560" cy="987552"/>
+            <a:off x="594360" y="1371600"/>
+            <a:ext cx="2194560" cy="822960"/>
           </a:xfrm>
           <a:prstGeom prst="rect">
             <a:avLst/>
@@ -12248,8 +12968,8 @@
         </p:nvSpPr>
         <p:spPr>
           <a:xfrm>
-            <a:off x="685800" y="1709928"/>
-            <a:ext cx="2011680" cy="411480"/>
+            <a:off x="685800" y="1600200"/>
+            <a:ext cx="2011680" cy="365760"/>
           </a:xfrm>
           <a:prstGeom prst="rect">
             <a:avLst/>
@@ -12264,7 +12984,7 @@
           <a:p>
             <a:pPr algn="ctr"/>
             <a:r>
-              <a:rPr sz="1500" b="1">
+              <a:rPr sz="1400" b="1">
                 <a:solidFill>
                   <a:srgbClr val="FFFFFF"/>
                 </a:solidFill>
@@ -12283,8 +13003,8 @@
         </p:nvSpPr>
         <p:spPr>
           <a:xfrm>
-            <a:off x="3017520" y="1554480"/>
-            <a:ext cx="8229600" cy="320040"/>
+            <a:off x="3017520" y="1481328"/>
+            <a:ext cx="8229600" cy="274320"/>
           </a:xfrm>
           <a:prstGeom prst="rect">
             <a:avLst/>
@@ -12299,7 +13019,7 @@
           <a:p>
             <a:pPr algn="l"/>
             <a:r>
-              <a:rPr sz="1400" b="0">
+              <a:rPr sz="1300" b="0">
                 <a:solidFill>
                   <a:srgbClr val="2A3B46"/>
                 </a:solidFill>
@@ -12318,8 +13038,8 @@
         </p:nvSpPr>
         <p:spPr>
           <a:xfrm>
-            <a:off x="3017520" y="1920240"/>
-            <a:ext cx="8229600" cy="320040"/>
+            <a:off x="3017520" y="1810512"/>
+            <a:ext cx="8229600" cy="274320"/>
           </a:xfrm>
           <a:prstGeom prst="rect">
             <a:avLst/>
@@ -12334,7 +13054,7 @@
           <a:p>
             <a:pPr algn="l"/>
             <a:r>
-              <a:rPr sz="1300" b="1">
+              <a:rPr sz="1200" b="1">
                 <a:solidFill>
                   <a:srgbClr val="1A6B63"/>
                 </a:solidFill>
@@ -12353,8 +13073,8 @@
         </p:nvSpPr>
         <p:spPr>
           <a:xfrm>
-            <a:off x="594360" y="2514600"/>
-            <a:ext cx="10972800" cy="987552"/>
+            <a:off x="594360" y="2267712"/>
+            <a:ext cx="10972800" cy="822960"/>
           </a:xfrm>
           <a:prstGeom prst="rect">
             <a:avLst/>
@@ -12396,8 +13116,8 @@
         </p:nvSpPr>
         <p:spPr>
           <a:xfrm>
-            <a:off x="594360" y="2514600"/>
-            <a:ext cx="2194560" cy="987552"/>
+            <a:off x="594360" y="2267712"/>
+            <a:ext cx="2194560" cy="822960"/>
           </a:xfrm>
           <a:prstGeom prst="rect">
             <a:avLst/>
@@ -12439,8 +13159,8 @@
         </p:nvSpPr>
         <p:spPr>
           <a:xfrm>
-            <a:off x="685800" y="2807208"/>
-            <a:ext cx="2011680" cy="411480"/>
+            <a:off x="685800" y="2496312"/>
+            <a:ext cx="2011680" cy="365760"/>
           </a:xfrm>
           <a:prstGeom prst="rect">
             <a:avLst/>
@@ -12455,7 +13175,7 @@
           <a:p>
             <a:pPr algn="ctr"/>
             <a:r>
-              <a:rPr sz="1500" b="1">
+              <a:rPr sz="1400" b="1">
                 <a:solidFill>
                   <a:srgbClr val="FFFFFF"/>
                 </a:solidFill>
@@ -12474,8 +13194,8 @@
         </p:nvSpPr>
         <p:spPr>
           <a:xfrm>
-            <a:off x="3017520" y="2651760"/>
-            <a:ext cx="8229600" cy="320040"/>
+            <a:off x="3017520" y="2377440"/>
+            <a:ext cx="8229600" cy="274320"/>
           </a:xfrm>
           <a:prstGeom prst="rect">
             <a:avLst/>
@@ -12490,7 +13210,7 @@
           <a:p>
             <a:pPr algn="l"/>
             <a:r>
-              <a:rPr sz="1400" b="0">
+              <a:rPr sz="1300" b="0">
                 <a:solidFill>
                   <a:srgbClr val="2A3B46"/>
                 </a:solidFill>
@@ -12509,8 +13229,8 @@
         </p:nvSpPr>
         <p:spPr>
           <a:xfrm>
-            <a:off x="3017520" y="3017520"/>
-            <a:ext cx="8229600" cy="320040"/>
+            <a:off x="3017520" y="2706624"/>
+            <a:ext cx="8229600" cy="274320"/>
           </a:xfrm>
           <a:prstGeom prst="rect">
             <a:avLst/>
@@ -12525,7 +13245,7 @@
           <a:p>
             <a:pPr algn="l"/>
             <a:r>
-              <a:rPr sz="1300" b="1">
+              <a:rPr sz="1200" b="1">
                 <a:solidFill>
                   <a:srgbClr val="1A6B63"/>
                 </a:solidFill>
@@ -12544,8 +13264,8 @@
         </p:nvSpPr>
         <p:spPr>
           <a:xfrm>
-            <a:off x="594360" y="3611880"/>
-            <a:ext cx="10972800" cy="987552"/>
+            <a:off x="594360" y="3163824"/>
+            <a:ext cx="10972800" cy="822960"/>
           </a:xfrm>
           <a:prstGeom prst="rect">
             <a:avLst/>
@@ -12587,8 +13307,8 @@
         </p:nvSpPr>
         <p:spPr>
           <a:xfrm>
-            <a:off x="594360" y="3611880"/>
-            <a:ext cx="2194560" cy="987552"/>
+            <a:off x="594360" y="3163824"/>
+            <a:ext cx="2194560" cy="822960"/>
           </a:xfrm>
           <a:prstGeom prst="rect">
             <a:avLst/>
@@ -12630,8 +13350,8 @@
         </p:nvSpPr>
         <p:spPr>
           <a:xfrm>
-            <a:off x="685800" y="3904488"/>
-            <a:ext cx="2011680" cy="411480"/>
+            <a:off x="685800" y="3392424"/>
+            <a:ext cx="2011680" cy="365760"/>
           </a:xfrm>
           <a:prstGeom prst="rect">
             <a:avLst/>
@@ -12646,7 +13366,7 @@
           <a:p>
             <a:pPr algn="ctr"/>
             <a:r>
-              <a:rPr sz="1500" b="1">
+              <a:rPr sz="1400" b="1">
                 <a:solidFill>
                   <a:srgbClr val="FFFFFF"/>
                 </a:solidFill>
@@ -12665,8 +13385,8 @@
         </p:nvSpPr>
         <p:spPr>
           <a:xfrm>
-            <a:off x="3017520" y="3749040"/>
-            <a:ext cx="8229600" cy="320040"/>
+            <a:off x="3017520" y="3273552"/>
+            <a:ext cx="8229600" cy="274320"/>
           </a:xfrm>
           <a:prstGeom prst="rect">
             <a:avLst/>
@@ -12681,7 +13401,7 @@
           <a:p>
             <a:pPr algn="l"/>
             <a:r>
-              <a:rPr sz="1400" b="0">
+              <a:rPr sz="1300" b="0">
                 <a:solidFill>
                   <a:srgbClr val="2A3B46"/>
                 </a:solidFill>
@@ -12700,8 +13420,8 @@
         </p:nvSpPr>
         <p:spPr>
           <a:xfrm>
-            <a:off x="3017520" y="4114800"/>
-            <a:ext cx="8229600" cy="320040"/>
+            <a:off x="3017520" y="3602736"/>
+            <a:ext cx="8229600" cy="274320"/>
           </a:xfrm>
           <a:prstGeom prst="rect">
             <a:avLst/>
@@ -12716,7 +13436,7 @@
           <a:p>
             <a:pPr algn="l"/>
             <a:r>
-              <a:rPr sz="1300" b="1">
+              <a:rPr sz="1200" b="1">
                 <a:solidFill>
                   <a:srgbClr val="1A6B63"/>
                 </a:solidFill>
@@ -12735,8 +13455,8 @@
         </p:nvSpPr>
         <p:spPr>
           <a:xfrm>
-            <a:off x="594360" y="4709159"/>
-            <a:ext cx="10972800" cy="987552"/>
+            <a:off x="594360" y="4059935"/>
+            <a:ext cx="10972800" cy="822960"/>
           </a:xfrm>
           <a:prstGeom prst="rect">
             <a:avLst/>
@@ -12778,8 +13498,8 @@
         </p:nvSpPr>
         <p:spPr>
           <a:xfrm>
-            <a:off x="594360" y="4709159"/>
-            <a:ext cx="2194560" cy="987552"/>
+            <a:off x="594360" y="4059935"/>
+            <a:ext cx="2194560" cy="822960"/>
           </a:xfrm>
           <a:prstGeom prst="rect">
             <a:avLst/>
@@ -12821,8 +13541,8 @@
         </p:nvSpPr>
         <p:spPr>
           <a:xfrm>
-            <a:off x="685800" y="5001767"/>
-            <a:ext cx="2011680" cy="411480"/>
+            <a:off x="685800" y="4288535"/>
+            <a:ext cx="2011680" cy="365760"/>
           </a:xfrm>
           <a:prstGeom prst="rect">
             <a:avLst/>
@@ -12837,7 +13557,7 @@
           <a:p>
             <a:pPr algn="ctr"/>
             <a:r>
-              <a:rPr sz="1500" b="1">
+              <a:rPr sz="1400" b="1">
                 <a:solidFill>
                   <a:srgbClr val="FFFFFF"/>
                 </a:solidFill>
@@ -12856,8 +13576,8 @@
         </p:nvSpPr>
         <p:spPr>
           <a:xfrm>
-            <a:off x="3017520" y="4846319"/>
-            <a:ext cx="8229600" cy="320040"/>
+            <a:off x="3017520" y="4169663"/>
+            <a:ext cx="8229600" cy="274320"/>
           </a:xfrm>
           <a:prstGeom prst="rect">
             <a:avLst/>
@@ -12872,7 +13592,7 @@
           <a:p>
             <a:pPr algn="l"/>
             <a:r>
-              <a:rPr sz="1400" b="0">
+              <a:rPr sz="1300" b="0">
                 <a:solidFill>
                   <a:srgbClr val="2A3B46"/>
                 </a:solidFill>
@@ -12891,8 +13611,8 @@
         </p:nvSpPr>
         <p:spPr>
           <a:xfrm>
-            <a:off x="3017520" y="5212079"/>
-            <a:ext cx="8229600" cy="320040"/>
+            <a:off x="3017520" y="4498847"/>
+            <a:ext cx="8229600" cy="274320"/>
           </a:xfrm>
           <a:prstGeom prst="rect">
             <a:avLst/>
@@ -12907,13 +13627,204 @@
           <a:p>
             <a:pPr algn="l"/>
             <a:r>
-              <a:rPr sz="1300" b="1">
+              <a:rPr sz="1200" b="1">
                 <a:solidFill>
                   <a:srgbClr val="1A6B63"/>
                 </a:solidFill>
                 <a:latin typeface="Calibri"/>
               </a:rPr>
               <a:t>Impact: Expose pipeline shape for migration reviews</a:t>
+            </a:r>
+          </a:p>
+        </p:txBody>
+      </p:sp>
+      <p:sp>
+        <p:nvSpPr>
+          <p:cNvPr id="29" name="Rectangle 28"/>
+          <p:cNvSpPr/>
+          <p:nvPr/>
+        </p:nvSpPr>
+        <p:spPr>
+          <a:xfrm>
+            <a:off x="594360" y="4956048"/>
+            <a:ext cx="10972800" cy="822960"/>
+          </a:xfrm>
+          <a:prstGeom prst="rect">
+            <a:avLst/>
+          </a:prstGeom>
+          <a:solidFill>
+            <a:srgbClr val="FFFFFF"/>
+          </a:solidFill>
+          <a:ln>
+            <a:noFill/>
+          </a:ln>
+        </p:spPr>
+        <p:style>
+          <a:lnRef idx="1">
+            <a:schemeClr val="accent1"/>
+          </a:lnRef>
+          <a:fillRef idx="3">
+            <a:schemeClr val="accent1"/>
+          </a:fillRef>
+          <a:effectRef idx="2">
+            <a:schemeClr val="accent1"/>
+          </a:effectRef>
+          <a:fontRef idx="minor">
+            <a:schemeClr val="lt1"/>
+          </a:fontRef>
+        </p:style>
+        <p:txBody>
+          <a:bodyPr rtlCol="0" anchor="ctr"/>
+          <a:lstStyle/>
+          <a:p>
+            <a:pPr algn="ctr"/>
+          </a:p>
+        </p:txBody>
+      </p:sp>
+      <p:sp>
+        <p:nvSpPr>
+          <p:cNvPr id="30" name="Rectangle 29"/>
+          <p:cNvSpPr/>
+          <p:nvPr/>
+        </p:nvSpPr>
+        <p:spPr>
+          <a:xfrm>
+            <a:off x="594360" y="4956048"/>
+            <a:ext cx="2194560" cy="822960"/>
+          </a:xfrm>
+          <a:prstGeom prst="rect">
+            <a:avLst/>
+          </a:prstGeom>
+          <a:solidFill>
+            <a:srgbClr val="1A6B63"/>
+          </a:solidFill>
+          <a:ln>
+            <a:noFill/>
+          </a:ln>
+        </p:spPr>
+        <p:style>
+          <a:lnRef idx="1">
+            <a:schemeClr val="accent1"/>
+          </a:lnRef>
+          <a:fillRef idx="3">
+            <a:schemeClr val="accent1"/>
+          </a:fillRef>
+          <a:effectRef idx="2">
+            <a:schemeClr val="accent1"/>
+          </a:effectRef>
+          <a:fontRef idx="minor">
+            <a:schemeClr val="lt1"/>
+          </a:fontRef>
+        </p:style>
+        <p:txBody>
+          <a:bodyPr rtlCol="0" anchor="ctr"/>
+          <a:lstStyle/>
+          <a:p>
+            <a:pPr algn="ctr"/>
+          </a:p>
+        </p:txBody>
+      </p:sp>
+      <p:sp>
+        <p:nvSpPr>
+          <p:cNvPr id="31" name="TextBox 30"/>
+          <p:cNvSpPr txBox="1"/>
+          <p:nvPr/>
+        </p:nvSpPr>
+        <p:spPr>
+          <a:xfrm>
+            <a:off x="685800" y="5184648"/>
+            <a:ext cx="2011680" cy="365760"/>
+          </a:xfrm>
+          <a:prstGeom prst="rect">
+            <a:avLst/>
+          </a:prstGeom>
+          <a:noFill/>
+        </p:spPr>
+        <p:txBody>
+          <a:bodyPr wrap="square">
+            <a:spAutoFit/>
+          </a:bodyPr>
+          <a:lstStyle/>
+          <a:p>
+            <a:pPr algn="ctr"/>
+            <a:r>
+              <a:rPr sz="1400" b="1">
+                <a:solidFill>
+                  <a:srgbClr val="FFFFFF"/>
+                </a:solidFill>
+                <a:latin typeface="Calibri"/>
+              </a:rPr>
+              <a:t>Policies</a:t>
+            </a:r>
+          </a:p>
+        </p:txBody>
+      </p:sp>
+      <p:sp>
+        <p:nvSpPr>
+          <p:cNvPr id="32" name="TextBox 31"/>
+          <p:cNvSpPr txBox="1"/>
+          <p:nvPr/>
+        </p:nvSpPr>
+        <p:spPr>
+          <a:xfrm>
+            <a:off x="3017520" y="5065776"/>
+            <a:ext cx="8229600" cy="274320"/>
+          </a:xfrm>
+          <a:prstGeom prst="rect">
+            <a:avLst/>
+          </a:prstGeom>
+          <a:noFill/>
+        </p:spPr>
+        <p:txBody>
+          <a:bodyPr wrap="square">
+            <a:spAutoFit/>
+          </a:bodyPr>
+          <a:lstStyle/>
+          <a:p>
+            <a:pPr algn="l"/>
+            <a:r>
+              <a:rPr sz="1300" b="0">
+                <a:solidFill>
+                  <a:srgbClr val="2A3B46"/>
+                </a:solidFill>
+                <a:latin typeface="Calibri"/>
+              </a:rPr>
+              <a:t>Readable Gherkin scenarios shared by security and delivery</a:t>
+            </a:r>
+          </a:p>
+        </p:txBody>
+      </p:sp>
+      <p:sp>
+        <p:nvSpPr>
+          <p:cNvPr id="33" name="TextBox 32"/>
+          <p:cNvSpPr txBox="1"/>
+          <p:nvPr/>
+        </p:nvSpPr>
+        <p:spPr>
+          <a:xfrm>
+            <a:off x="3017520" y="5394960"/>
+            <a:ext cx="8229600" cy="274320"/>
+          </a:xfrm>
+          <a:prstGeom prst="rect">
+            <a:avLst/>
+          </a:prstGeom>
+          <a:noFill/>
+        </p:spPr>
+        <p:txBody>
+          <a:bodyPr wrap="square">
+            <a:spAutoFit/>
+          </a:bodyPr>
+          <a:lstStyle/>
+          <a:p>
+            <a:pPr algn="l"/>
+            <a:r>
+              <a:rPr sz="1200" b="1">
+                <a:solidFill>
+                  <a:srgbClr val="1A6B63"/>
+                </a:solidFill>
+                <a:latin typeface="Calibri"/>
+              </a:rPr>
+              <a:t>Impact: Maintain ongoing standards without wiki drift</a:t>
             </a:r>
           </a:p>
         </p:txBody>
@@ -13095,7 +14006,7 @@
                 </a:solidFill>
                 <a:latin typeface="Calibri"/>
               </a:rPr>
-              <a:t>check — find debt with proof</a:t>
+              <a:t>Ongoing standards — written so people understand them</a:t>
             </a:r>
           </a:p>
         </p:txBody>
@@ -13130,7 +14041,7 @@
                 </a:solidFill>
                 <a:latin typeface="Calibri"/>
               </a:rPr>
-              <a:t>gitlab-compliance check -f policies/ -p .gitlab-ci.yml</a:t>
+              <a:t>Gherkin policies stay the living contract after migration</a:t>
             </a:r>
           </a:p>
         </p:txBody>
@@ -13165,7 +14076,7 @@
                 </a:solidFill>
                 <a:latin typeface="Calibri"/>
               </a:rPr>
-              <a:t>Impact briefing  ·  Dedicated migration · Nexus · tech debt</a:t>
+              <a:t>Impact briefing  ·  Dedicated · Nexus · tech debt · ongoing standards</a:t>
             </a:r>
           </a:p>
         </p:txBody>
@@ -13200,7 +14111,7 @@
                 </a:solidFill>
                 <a:latin typeface="Calibri"/>
               </a:rPr>
-              <a:t>6 / 15</a:t>
+              <a:t>6 / 16</a:t>
             </a:r>
           </a:p>
         </p:txBody>
@@ -13213,25 +14124,21 @@
         </p:nvSpPr>
         <p:spPr>
           <a:xfrm>
-            <a:off x="731520" y="1463040"/>
-            <a:ext cx="10515600" cy="2011680"/>
-          </a:xfrm>
-          <a:prstGeom prst="rect">
-            <a:avLst/>
-          </a:prstGeom>
-          <a:noFill/>
-        </p:spPr>
-        <p:txBody>
-          <a:bodyPr wrap="square">
-            <a:spAutoFit/>
-          </a:bodyPr>
-          <a:lstStyle/>
-          <a:p>
-            <a:pPr>
-              <a:spcAft>
-                <a:spcPts val="800"/>
-              </a:spcAft>
-            </a:pPr>
+            <a:off x="640080" y="1371600"/>
+            <a:ext cx="10972800" cy="411480"/>
+          </a:xfrm>
+          <a:prstGeom prst="rect">
+            <a:avLst/>
+          </a:prstGeom>
+          <a:noFill/>
+        </p:spPr>
+        <p:txBody>
+          <a:bodyPr wrap="square">
+            <a:spAutoFit/>
+          </a:bodyPr>
+          <a:lstStyle/>
+          <a:p>
+            <a:pPr algn="l"/>
             <a:r>
               <a:rPr sz="1500" b="0">
                 <a:solidFill>
@@ -13239,55 +14146,7 @@
                 </a:solidFill>
                 <a:latin typeface="Calibri"/>
               </a:rPr>
-              <a:t>Runs readable Gherkin policies against pipeline YAML (and optional GitLab API settings)</a:t>
-            </a:r>
-          </a:p>
-          <a:p>
-            <a:pPr>
-              <a:spcAft>
-                <a:spcPts val="800"/>
-              </a:spcAft>
-            </a:pPr>
-            <a:r>
-              <a:rPr sz="1500" b="0">
-                <a:solidFill>
-                  <a:srgbClr val="2A3B46"/>
-                </a:solidFill>
-                <a:latin typeface="Calibri"/>
-              </a:rPr>
-              <a:t>Reports violations with path:line so teams can act without guessing</a:t>
-            </a:r>
-          </a:p>
-          <a:p>
-            <a:pPr>
-              <a:spcAft>
-                <a:spcPts val="800"/>
-              </a:spcAft>
-            </a:pPr>
-            <a:r>
-              <a:rPr sz="1500" b="0">
-                <a:solidFill>
-                  <a:srgbClr val="2A3B46"/>
-                </a:solidFill>
-                <a:latin typeface="Calibri"/>
-              </a:rPr>
-              <a:t>Output formats that fit migration programmes: console, markdown, HTML, MR comment, Code Quality</a:t>
-            </a:r>
-          </a:p>
-          <a:p>
-            <a:pPr>
-              <a:spcAft>
-                <a:spcPts val="800"/>
-              </a:spcAft>
-            </a:pPr>
-            <a:r>
-              <a:rPr sz="1500" b="0">
-                <a:solidFill>
-                  <a:srgbClr val="2A3B46"/>
-                </a:solidFill>
-                <a:latin typeface="Calibri"/>
-              </a:rPr>
-              <a:t>Warn-only first (allow_failure), then enforce — same policies, stronger gate</a:t>
+              <a:t>Migration finds debt once. Readable policies keep the same rules enforceable every merge.</a:t>
             </a:r>
           </a:p>
         </p:txBody>
@@ -13300,8 +14159,8 @@
         </p:nvSpPr>
         <p:spPr>
           <a:xfrm>
-            <a:off x="594360" y="3657600"/>
-            <a:ext cx="10972800" cy="2194560"/>
+            <a:off x="594360" y="1920240"/>
+            <a:ext cx="5486400" cy="3931920"/>
           </a:xfrm>
           <a:prstGeom prst="rect">
             <a:avLst/>
@@ -13343,8 +14202,8 @@
         </p:nvSpPr>
         <p:spPr>
           <a:xfrm>
-            <a:off x="868680" y="3840480"/>
-            <a:ext cx="10424160" cy="320040"/>
+            <a:off x="868680" y="2103120"/>
+            <a:ext cx="4937760" cy="365760"/>
           </a:xfrm>
           <a:prstGeom prst="rect">
             <a:avLst/>
@@ -13365,7 +14224,7 @@
                 </a:solidFill>
                 <a:latin typeface="Calibri"/>
               </a:rPr>
-              <a:t>Migration / Nexus impact</a:t>
+              <a:t>Why easy-to-understand policies matter</a:t>
             </a:r>
           </a:p>
         </p:txBody>
@@ -13378,8 +14237,8 @@
         </p:nvSpPr>
         <p:spPr>
           <a:xfrm>
-            <a:off x="868680" y="4251960"/>
-            <a:ext cx="10424160" cy="1371600"/>
+            <a:off x="868680" y="2651760"/>
+            <a:ext cx="4937760" cy="2926080"/>
           </a:xfrm>
           <a:prstGeom prst="rect">
             <a:avLst/>
@@ -13398,13 +14257,13 @@
               </a:spcAft>
             </a:pPr>
             <a:r>
-              <a:rPr sz="1400" b="0">
+              <a:rPr sz="1300" b="0">
                 <a:solidFill>
                   <a:srgbClr val="2A3B46"/>
                 </a:solidFill>
                 <a:latin typeface="Calibri"/>
               </a:rPr>
-              <a:t>Creates a repeatable readiness scorecard per project before Dedicated move</a:t>
+              <a:t>Security and delivery share one language — not buried YAML lore</a:t>
             </a:r>
           </a:p>
           <a:p>
@@ -13414,13 +14273,13 @@
               </a:spcAft>
             </a:pPr>
             <a:r>
-              <a:rPr sz="1400" b="0">
+              <a:rPr sz="1300" b="0">
                 <a:solidFill>
                   <a:srgbClr val="2A3B46"/>
                 </a:solidFill>
                 <a:latin typeface="Calibri"/>
               </a:rPr>
-              <a:t>Makes Nexus pin/version expectations testable — not a spreadsheet exercise</a:t>
+              <a:t>New Nexus / Dedicated rules are written as scenarios, not slides</a:t>
             </a:r>
           </a:p>
           <a:p>
@@ -13430,13 +14289,305 @@
               </a:spcAft>
             </a:pPr>
             <a:r>
-              <a:rPr sz="1400" b="0">
+              <a:rPr sz="1300" b="0">
                 <a:solidFill>
                   <a:srgbClr val="2A3B46"/>
                 </a:solidFill>
                 <a:latin typeface="Calibri"/>
               </a:rPr>
-              <a:t>Surfaces debt early enough to schedule remediation inside the migration plan</a:t>
+              <a:t>Policy packs version in a repo or OCI registry — segregation of duty</a:t>
+            </a:r>
+          </a:p>
+          <a:p>
+            <a:pPr>
+              <a:spcAft>
+                <a:spcPts val="800"/>
+              </a:spcAft>
+            </a:pPr>
+            <a:r>
+              <a:rPr sz="1300" b="0">
+                <a:solidFill>
+                  <a:srgbClr val="2A3B46"/>
+                </a:solidFill>
+                <a:latin typeface="Calibri"/>
+              </a:rPr>
+              <a:t>Metadata IDs and titles make audit findings explainable</a:t>
+            </a:r>
+          </a:p>
+          <a:p>
+            <a:pPr>
+              <a:spcAft>
+                <a:spcPts val="800"/>
+              </a:spcAft>
+            </a:pPr>
+            <a:r>
+              <a:rPr sz="1300" b="0">
+                <a:solidFill>
+                  <a:srgbClr val="2A3B46"/>
+                </a:solidFill>
+                <a:latin typeface="Calibri"/>
+              </a:rPr>
+              <a:t>Standards survive staff change because the contract is in CI</a:t>
+            </a:r>
+          </a:p>
+        </p:txBody>
+      </p:sp>
+      <p:sp>
+        <p:nvSpPr>
+          <p:cNvPr id="13" name="Rectangle 12"/>
+          <p:cNvSpPr/>
+          <p:nvPr/>
+        </p:nvSpPr>
+        <p:spPr>
+          <a:xfrm>
+            <a:off x="6309360" y="1920240"/>
+            <a:ext cx="5303520" cy="3931920"/>
+          </a:xfrm>
+          <a:prstGeom prst="rect">
+            <a:avLst/>
+          </a:prstGeom>
+          <a:solidFill>
+            <a:srgbClr val="FFFFFF"/>
+          </a:solidFill>
+          <a:ln>
+            <a:noFill/>
+          </a:ln>
+        </p:spPr>
+        <p:style>
+          <a:lnRef idx="1">
+            <a:schemeClr val="accent1"/>
+          </a:lnRef>
+          <a:fillRef idx="3">
+            <a:schemeClr val="accent1"/>
+          </a:fillRef>
+          <a:effectRef idx="2">
+            <a:schemeClr val="accent1"/>
+          </a:effectRef>
+          <a:fontRef idx="minor">
+            <a:schemeClr val="lt1"/>
+          </a:fontRef>
+        </p:style>
+        <p:txBody>
+          <a:bodyPr rtlCol="0" anchor="ctr"/>
+          <a:lstStyle/>
+          <a:p>
+            <a:pPr algn="ctr"/>
+          </a:p>
+        </p:txBody>
+      </p:sp>
+      <p:sp>
+        <p:nvSpPr>
+          <p:cNvPr id="14" name="Rectangle 13"/>
+          <p:cNvSpPr/>
+          <p:nvPr/>
+        </p:nvSpPr>
+        <p:spPr>
+          <a:xfrm>
+            <a:off x="6309360" y="1920240"/>
+            <a:ext cx="5303520" cy="73152"/>
+          </a:xfrm>
+          <a:prstGeom prst="rect">
+            <a:avLst/>
+          </a:prstGeom>
+          <a:solidFill>
+            <a:srgbClr val="1A6B63"/>
+          </a:solidFill>
+          <a:ln>
+            <a:noFill/>
+          </a:ln>
+        </p:spPr>
+        <p:style>
+          <a:lnRef idx="1">
+            <a:schemeClr val="accent1"/>
+          </a:lnRef>
+          <a:fillRef idx="3">
+            <a:schemeClr val="accent1"/>
+          </a:fillRef>
+          <a:effectRef idx="2">
+            <a:schemeClr val="accent1"/>
+          </a:effectRef>
+          <a:fontRef idx="minor">
+            <a:schemeClr val="lt1"/>
+          </a:fontRef>
+        </p:style>
+        <p:txBody>
+          <a:bodyPr rtlCol="0" anchor="ctr"/>
+          <a:lstStyle/>
+          <a:p>
+            <a:pPr algn="ctr"/>
+          </a:p>
+        </p:txBody>
+      </p:sp>
+      <p:sp>
+        <p:nvSpPr>
+          <p:cNvPr id="15" name="TextBox 14"/>
+          <p:cNvSpPr txBox="1"/>
+          <p:nvPr/>
+        </p:nvSpPr>
+        <p:spPr>
+          <a:xfrm>
+            <a:off x="6537960" y="2148840"/>
+            <a:ext cx="4846320" cy="3474720"/>
+          </a:xfrm>
+          <a:prstGeom prst="rect">
+            <a:avLst/>
+          </a:prstGeom>
+          <a:noFill/>
+        </p:spPr>
+        <p:txBody>
+          <a:bodyPr wrap="square">
+            <a:spAutoFit/>
+          </a:bodyPr>
+          <a:lstStyle/>
+          <a:p>
+            <a:pPr>
+              <a:spcAft>
+                <a:spcPts val="400"/>
+              </a:spcAft>
+            </a:pPr>
+            <a:r>
+              <a:rPr sz="1200" b="0">
+                <a:solidFill>
+                  <a:srgbClr val="5E707A"/>
+                </a:solidFill>
+                <a:latin typeface="Consolas"/>
+              </a:rPr>
+              <a:t># Anyone can read the standard</a:t>
+            </a:r>
+          </a:p>
+          <a:p>
+            <a:pPr>
+              <a:spcAft>
+                <a:spcPts val="400"/>
+              </a:spcAft>
+            </a:pPr>
+            <a:r>
+              <a:rPr sz="1300" b="1">
+                <a:solidFill>
+                  <a:srgbClr val="102230"/>
+                </a:solidFill>
+                <a:latin typeface="Consolas"/>
+              </a:rPr>
+              <a:t>Scenario: Job images must not use latest</a:t>
+            </a:r>
+          </a:p>
+          <a:p>
+            <a:pPr>
+              <a:spcAft>
+                <a:spcPts val="400"/>
+              </a:spcAft>
+            </a:pPr>
+            <a:r>
+              <a:rPr sz="1300" b="1">
+                <a:solidFill>
+                  <a:srgbClr val="1A6B63"/>
+                </a:solidFill>
+                <a:latin typeface="Consolas"/>
+              </a:rPr>
+              <a:t>  Given I have any job defined</a:t>
+            </a:r>
+          </a:p>
+          <a:p>
+            <a:pPr>
+              <a:spcAft>
+                <a:spcPts val="400"/>
+              </a:spcAft>
+            </a:pPr>
+            <a:r>
+              <a:rPr sz="1300" b="1">
+                <a:solidFill>
+                  <a:srgbClr val="1A6B63"/>
+                </a:solidFill>
+                <a:latin typeface="Consolas"/>
+              </a:rPr>
+              <a:t>  When it has image</a:t>
+            </a:r>
+          </a:p>
+          <a:p>
+            <a:pPr>
+              <a:spcAft>
+                <a:spcPts val="400"/>
+              </a:spcAft>
+            </a:pPr>
+            <a:r>
+              <a:rPr sz="1300" b="1">
+                <a:solidFill>
+                  <a:srgbClr val="1A6B63"/>
+                </a:solidFill>
+                <a:latin typeface="Consolas"/>
+              </a:rPr>
+              <a:t>  Then its image must not match ":latest$"</a:t>
+            </a:r>
+          </a:p>
+          <a:p>
+            <a:pPr>
+              <a:spcAft>
+                <a:spcPts val="400"/>
+              </a:spcAft>
+            </a:pPr>
+          </a:p>
+          <a:p>
+            <a:pPr>
+              <a:spcAft>
+                <a:spcPts val="400"/>
+              </a:spcAft>
+            </a:pPr>
+            <a:r>
+              <a:rPr sz="1200" b="0">
+                <a:solidFill>
+                  <a:srgbClr val="5E707A"/>
+                </a:solidFill>
+                <a:latin typeface="Consolas"/>
+              </a:rPr>
+              <a:t># METADATA keeps ownership clear</a:t>
+            </a:r>
+          </a:p>
+          <a:p>
+            <a:pPr>
+              <a:spcAft>
+                <a:spcPts val="400"/>
+              </a:spcAft>
+            </a:pPr>
+            <a:r>
+              <a:rPr sz="1200" b="0">
+                <a:solidFill>
+                  <a:srgbClr val="5E707A"/>
+                </a:solidFill>
+                <a:latin typeface="Consolas"/>
+              </a:rPr>
+              <a:t># title: Disallow latest image tags</a:t>
+            </a:r>
+          </a:p>
+          <a:p>
+            <a:pPr>
+              <a:spcAft>
+                <a:spcPts val="400"/>
+              </a:spcAft>
+            </a:pPr>
+            <a:r>
+              <a:rPr sz="1200" b="0">
+                <a:solidFill>
+                  <a:srgbClr val="5E707A"/>
+                </a:solidFill>
+                <a:latin typeface="Consolas"/>
+              </a:rPr>
+              <a:t># custom.id: GLCI-IMAGE-PINNING-001</a:t>
+            </a:r>
+          </a:p>
+          <a:p>
+            <a:pPr>
+              <a:spcAft>
+                <a:spcPts val="400"/>
+              </a:spcAft>
+            </a:pPr>
+            <a:r>
+              <a:rPr sz="1200" b="0">
+                <a:solidFill>
+                  <a:srgbClr val="5E707A"/>
+                </a:solidFill>
+                <a:latin typeface="Consolas"/>
+              </a:rPr>
+              <a:t># custom.severity: HIGH</a:t>
             </a:r>
           </a:p>
         </p:txBody>
@@ -13618,7 +14769,7 @@
                 </a:solidFill>
                 <a:latin typeface="Calibri"/>
               </a:rPr>
-              <a:t>Shell scan — inventory before you migrate</a:t>
+              <a:t>check — find debt with proof</a:t>
             </a:r>
           </a:p>
         </p:txBody>
@@ -13653,7 +14804,7 @@
                 </a:solidFill>
                 <a:latin typeface="Calibri"/>
               </a:rPr>
-              <a:t>Local CLI sweeps across repositories (same engine as CI)</a:t>
+              <a:t>gitlab-compliance check -f policies/ -p .gitlab-ci.yml</a:t>
             </a:r>
           </a:p>
         </p:txBody>
@@ -13688,7 +14839,7 @@
                 </a:solidFill>
                 <a:latin typeface="Calibri"/>
               </a:rPr>
-              <a:t>Impact briefing  ·  Dedicated migration · Nexus · tech debt</a:t>
+              <a:t>Impact briefing  ·  Dedicated · Nexus · tech debt · ongoing standards</a:t>
             </a:r>
           </a:p>
         </p:txBody>
@@ -13723,7 +14874,7 @@
                 </a:solidFill>
                 <a:latin typeface="Calibri"/>
               </a:rPr>
-              <a:t>7 / 15</a:t>
+              <a:t>7 / 16</a:t>
             </a:r>
           </a:p>
         </p:txBody>
@@ -13736,29 +14887,81 @@
         </p:nvSpPr>
         <p:spPr>
           <a:xfrm>
-            <a:off x="640080" y="1417320"/>
-            <a:ext cx="10972800" cy="457200"/>
-          </a:xfrm>
-          <a:prstGeom prst="rect">
-            <a:avLst/>
-          </a:prstGeom>
-          <a:noFill/>
-        </p:spPr>
-        <p:txBody>
-          <a:bodyPr wrap="square">
-            <a:spAutoFit/>
-          </a:bodyPr>
-          <a:lstStyle/>
-          <a:p>
-            <a:pPr algn="l"/>
-            <a:r>
-              <a:rPr sz="1400" b="0">
+            <a:off x="731520" y="1463040"/>
+            <a:ext cx="10515600" cy="2011680"/>
+          </a:xfrm>
+          <a:prstGeom prst="rect">
+            <a:avLst/>
+          </a:prstGeom>
+          <a:noFill/>
+        </p:spPr>
+        <p:txBody>
+          <a:bodyPr wrap="square">
+            <a:spAutoFit/>
+          </a:bodyPr>
+          <a:lstStyle/>
+          <a:p>
+            <a:pPr>
+              <a:spcAft>
+                <a:spcPts val="800"/>
+              </a:spcAft>
+            </a:pPr>
+            <a:r>
+              <a:rPr sz="1500" b="0">
                 <a:solidFill>
                   <a:srgbClr val="2A3B46"/>
                 </a:solidFill>
                 <a:latin typeface="Calibri"/>
               </a:rPr>
-              <a:t>There is no separate “shellcheck” product mode — impact comes from running check in the shell to discover debt at scale.</a:t>
+              <a:t>Runs readable Gherkin policies against pipeline YAML (and optional GitLab API settings)</a:t>
+            </a:r>
+          </a:p>
+          <a:p>
+            <a:pPr>
+              <a:spcAft>
+                <a:spcPts val="800"/>
+              </a:spcAft>
+            </a:pPr>
+            <a:r>
+              <a:rPr sz="1500" b="0">
+                <a:solidFill>
+                  <a:srgbClr val="2A3B46"/>
+                </a:solidFill>
+                <a:latin typeface="Calibri"/>
+              </a:rPr>
+              <a:t>Reports violations with path:line so teams can act without guessing</a:t>
+            </a:r>
+          </a:p>
+          <a:p>
+            <a:pPr>
+              <a:spcAft>
+                <a:spcPts val="800"/>
+              </a:spcAft>
+            </a:pPr>
+            <a:r>
+              <a:rPr sz="1500" b="0">
+                <a:solidFill>
+                  <a:srgbClr val="2A3B46"/>
+                </a:solidFill>
+                <a:latin typeface="Calibri"/>
+              </a:rPr>
+              <a:t>Output formats that fit migration programmes: console, markdown, HTML, MR comment, Code Quality</a:t>
+            </a:r>
+          </a:p>
+          <a:p>
+            <a:pPr>
+              <a:spcAft>
+                <a:spcPts val="800"/>
+              </a:spcAft>
+            </a:pPr>
+            <a:r>
+              <a:rPr sz="1500" b="0">
+                <a:solidFill>
+                  <a:srgbClr val="2A3B46"/>
+                </a:solidFill>
+                <a:latin typeface="Calibri"/>
+              </a:rPr>
+              <a:t>Warn-only first (allow_failure), then enforce — same readable policies, stronger gate</a:t>
             </a:r>
           </a:p>
         </p:txBody>
@@ -13771,8 +14974,8 @@
         </p:nvSpPr>
         <p:spPr>
           <a:xfrm>
-            <a:off x="594360" y="2011680"/>
-            <a:ext cx="10972800" cy="1828800"/>
+            <a:off x="594360" y="3657600"/>
+            <a:ext cx="10972800" cy="2194560"/>
           </a:xfrm>
           <a:prstGeom prst="rect">
             <a:avLst/>
@@ -13814,97 +15017,29 @@
         </p:nvSpPr>
         <p:spPr>
           <a:xfrm>
-            <a:off x="868680" y="2194560"/>
-            <a:ext cx="10424160" cy="1463040"/>
-          </a:xfrm>
-          <a:prstGeom prst="rect">
-            <a:avLst/>
-          </a:prstGeom>
-          <a:noFill/>
-        </p:spPr>
-        <p:txBody>
-          <a:bodyPr wrap="square">
-            <a:spAutoFit/>
-          </a:bodyPr>
-          <a:lstStyle/>
-          <a:p>
-            <a:pPr>
-              <a:spcAft>
-                <a:spcPts val="400"/>
-              </a:spcAft>
-            </a:pPr>
-            <a:r>
-              <a:rPr sz="1300" b="0">
-                <a:solidFill>
-                  <a:srgbClr val="5E707A"/>
-                </a:solidFill>
-                <a:latin typeface="Consolas"/>
-              </a:rPr>
-              <a:t># Example: scan a clone for supply-chain and pin debt</a:t>
-            </a:r>
-          </a:p>
-          <a:p>
-            <a:pPr>
-              <a:spcAft>
-                <a:spcPts val="400"/>
-              </a:spcAft>
-            </a:pPr>
-            <a:r>
-              <a:rPr sz="1400" b="0">
-                <a:solidFill>
-                  <a:srgbClr val="2A3B46"/>
-                </a:solidFill>
-                <a:latin typeface="Consolas"/>
-              </a:rPr>
-              <a:t>pip install gitlab-compliance</a:t>
-            </a:r>
-          </a:p>
-          <a:p>
-            <a:pPr>
-              <a:spcAft>
-                <a:spcPts val="400"/>
-              </a:spcAft>
-            </a:pPr>
-            <a:r>
-              <a:rPr sz="1400" b="1">
-                <a:solidFill>
-                  <a:srgbClr val="1A6B63"/>
-                </a:solidFill>
-                <a:latin typeface="Consolas"/>
-              </a:rPr>
-              <a:t>gitlab-compliance check -f policies/security/ -p .gitlab-ci.yml \</a:t>
-            </a:r>
-          </a:p>
-          <a:p>
-            <a:pPr>
-              <a:spcAft>
-                <a:spcPts val="400"/>
-              </a:spcAft>
-            </a:pPr>
-            <a:r>
-              <a:rPr sz="1400" b="1">
-                <a:solidFill>
-                  <a:srgbClr val="1A6B63"/>
-                </a:solidFill>
-                <a:latin typeface="Consolas"/>
-              </a:rPr>
-              <a:t>  --format markdown -o COMPLIANCE-REPORT.md</a:t>
-            </a:r>
-          </a:p>
-          <a:p>
-            <a:pPr>
-              <a:spcAft>
-                <a:spcPts val="400"/>
-              </a:spcAft>
-            </a:pPr>
-            <a:r>
-              <a:rPr sz="1300" b="0">
-                <a:solidFill>
-                  <a:srgbClr val="5E707A"/>
-                </a:solidFill>
-                <a:latin typeface="Consolas"/>
-              </a:rPr>
-              <a:t># Optional: --with-builtin · --project · --strict for API hardening</a:t>
+            <a:off x="868680" y="3840480"/>
+            <a:ext cx="10424160" cy="320040"/>
+          </a:xfrm>
+          <a:prstGeom prst="rect">
+            <a:avLst/>
+          </a:prstGeom>
+          <a:noFill/>
+        </p:spPr>
+        <p:txBody>
+          <a:bodyPr wrap="square">
+            <a:spAutoFit/>
+          </a:bodyPr>
+          <a:lstStyle/>
+          <a:p>
+            <a:pPr algn="l"/>
+            <a:r>
+              <a:rPr sz="1500" b="1">
+                <a:solidFill>
+                  <a:srgbClr val="102230"/>
+                </a:solidFill>
+                <a:latin typeface="Calibri"/>
+              </a:rPr>
+              <a:t>Migration / Nexus / ongoing impact</a:t>
             </a:r>
           </a:p>
         </p:txBody>
@@ -13917,8 +15052,8 @@
         </p:nvSpPr>
         <p:spPr>
           <a:xfrm>
-            <a:off x="731520" y="4114800"/>
-            <a:ext cx="10515600" cy="1828800"/>
+            <a:off x="868680" y="4251960"/>
+            <a:ext cx="10424160" cy="1371600"/>
           </a:xfrm>
           <a:prstGeom prst="rect">
             <a:avLst/>
@@ -13937,13 +15072,13 @@
               </a:spcAft>
             </a:pPr>
             <a:r>
-              <a:rPr sz="1500" b="0">
+              <a:rPr sz="1400" b="0">
                 <a:solidFill>
                   <a:srgbClr val="2A3B46"/>
                 </a:solidFill>
                 <a:latin typeface="Calibri"/>
               </a:rPr>
-              <a:t>Platform teams can batch-scan migration cohorts and rank projects by debt severity</a:t>
+              <a:t>Creates a repeatable readiness scorecard per project before Dedicated move</a:t>
             </a:r>
           </a:p>
           <a:p>
@@ -13953,13 +15088,13 @@
               </a:spcAft>
             </a:pPr>
             <a:r>
-              <a:rPr sz="1500" b="0">
+              <a:rPr sz="1400" b="0">
                 <a:solidFill>
                   <a:srgbClr val="2A3B46"/>
                 </a:solidFill>
                 <a:latin typeface="Calibri"/>
               </a:rPr>
-              <a:t>Produces artefacts for Dedicated cutover boards and Nexus exception reviews</a:t>
+              <a:t>Makes Nexus pin/version expectations testable — not a spreadsheet exercise</a:t>
             </a:r>
           </a:p>
           <a:p>
@@ -13969,13 +15104,13 @@
               </a:spcAft>
             </a:pPr>
             <a:r>
-              <a:rPr sz="1500" b="0">
+              <a:rPr sz="1400" b="0">
                 <a:solidFill>
                   <a:srgbClr val="2A3B46"/>
                 </a:solidFill>
                 <a:latin typeface="Calibri"/>
               </a:rPr>
-              <a:t>Same policies later become CI gates — no double standard between discovery and enforcement</a:t>
+              <a:t>The same easy-to-read policies keep standards enforced after cutover</a:t>
             </a:r>
           </a:p>
         </p:txBody>
@@ -14157,7 +15292,7 @@
                 </a:solidFill>
                 <a:latin typeface="Calibri"/>
               </a:rPr>
-              <a:t>Supply chain — close the debt Nexus cares about</a:t>
+              <a:t>Shell scan — inventory before you migrate</a:t>
             </a:r>
           </a:p>
         </p:txBody>
@@ -14192,7 +15327,7 @@
                 </a:solidFill>
                 <a:latin typeface="Calibri"/>
               </a:rPr>
-              <a:t>--fix-supply-chain · --fix-policies · --create-mr</a:t>
+              <a:t>Local CLI sweeps across repositories (same engine as CI)</a:t>
             </a:r>
           </a:p>
         </p:txBody>
@@ -14227,7 +15362,7 @@
                 </a:solidFill>
                 <a:latin typeface="Calibri"/>
               </a:rPr>
-              <a:t>Impact briefing  ·  Dedicated migration · Nexus · tech debt</a:t>
+              <a:t>Impact briefing  ·  Dedicated · Nexus · tech debt · ongoing standards</a:t>
             </a:r>
           </a:p>
         </p:txBody>
@@ -14262,21 +15397,56 @@
                 </a:solidFill>
                 <a:latin typeface="Calibri"/>
               </a:rPr>
-              <a:t>8 / 15</a:t>
-            </a:r>
-          </a:p>
-        </p:txBody>
-      </p:sp>
-      <p:sp>
-        <p:nvSpPr>
-          <p:cNvPr id="9" name="Rectangle 8"/>
+              <a:t>8 / 16</a:t>
+            </a:r>
+          </a:p>
+        </p:txBody>
+      </p:sp>
+      <p:sp>
+        <p:nvSpPr>
+          <p:cNvPr id="9" name="TextBox 8"/>
+          <p:cNvSpPr txBox="1"/>
+          <p:nvPr/>
+        </p:nvSpPr>
+        <p:spPr>
+          <a:xfrm>
+            <a:off x="640080" y="1417320"/>
+            <a:ext cx="10972800" cy="457200"/>
+          </a:xfrm>
+          <a:prstGeom prst="rect">
+            <a:avLst/>
+          </a:prstGeom>
+          <a:noFill/>
+        </p:spPr>
+        <p:txBody>
+          <a:bodyPr wrap="square">
+            <a:spAutoFit/>
+          </a:bodyPr>
+          <a:lstStyle/>
+          <a:p>
+            <a:pPr algn="l"/>
+            <a:r>
+              <a:rPr sz="1400" b="0">
+                <a:solidFill>
+                  <a:srgbClr val="2A3B46"/>
+                </a:solidFill>
+                <a:latin typeface="Calibri"/>
+              </a:rPr>
+              <a:t>There is no separate “shellcheck” product mode — impact comes from running check in the shell to discover debt at scale.</a:t>
+            </a:r>
+          </a:p>
+        </p:txBody>
+      </p:sp>
+      <p:sp>
+        <p:nvSpPr>
+          <p:cNvPr id="10" name="Rectangle 9"/>
           <p:cNvSpPr/>
           <p:nvPr/>
         </p:nvSpPr>
         <p:spPr>
           <a:xfrm>
-            <a:off x="594360" y="1463040"/>
-            <a:ext cx="5394960" cy="4297680"/>
+            <a:off x="594360" y="2011680"/>
+            <a:ext cx="10972800" cy="1828800"/>
           </a:xfrm>
           <a:prstGeom prst="rect">
             <a:avLst/>
@@ -14312,49 +15482,117 @@
       </p:sp>
       <p:sp>
         <p:nvSpPr>
-          <p:cNvPr id="10" name="TextBox 9"/>
-          <p:cNvSpPr txBox="1"/>
-          <p:nvPr/>
-        </p:nvSpPr>
-        <p:spPr>
-          <a:xfrm>
-            <a:off x="868680" y="1691640"/>
-            <a:ext cx="4846320" cy="365760"/>
-          </a:xfrm>
-          <a:prstGeom prst="rect">
-            <a:avLst/>
-          </a:prstGeom>
-          <a:noFill/>
-        </p:spPr>
-        <p:txBody>
-          <a:bodyPr wrap="square">
-            <a:spAutoFit/>
-          </a:bodyPr>
-          <a:lstStyle/>
-          <a:p>
-            <a:pPr algn="l"/>
-            <a:r>
-              <a:rPr sz="1600" b="1">
-                <a:solidFill>
-                  <a:srgbClr val="102230"/>
-                </a:solidFill>
-                <a:latin typeface="Calibri"/>
-              </a:rPr>
-              <a:t>What it finds / fixes</a:t>
-            </a:r>
-          </a:p>
-        </p:txBody>
-      </p:sp>
-      <p:sp>
-        <p:nvSpPr>
           <p:cNvPr id="11" name="TextBox 10"/>
           <p:cNvSpPr txBox="1"/>
           <p:nvPr/>
         </p:nvSpPr>
         <p:spPr>
           <a:xfrm>
-            <a:off x="868680" y="2240280"/>
-            <a:ext cx="4846320" cy="3200400"/>
+            <a:off x="868680" y="2194560"/>
+            <a:ext cx="10424160" cy="1463040"/>
+          </a:xfrm>
+          <a:prstGeom prst="rect">
+            <a:avLst/>
+          </a:prstGeom>
+          <a:noFill/>
+        </p:spPr>
+        <p:txBody>
+          <a:bodyPr wrap="square">
+            <a:spAutoFit/>
+          </a:bodyPr>
+          <a:lstStyle/>
+          <a:p>
+            <a:pPr>
+              <a:spcAft>
+                <a:spcPts val="400"/>
+              </a:spcAft>
+            </a:pPr>
+            <a:r>
+              <a:rPr sz="1300" b="0">
+                <a:solidFill>
+                  <a:srgbClr val="5E707A"/>
+                </a:solidFill>
+                <a:latin typeface="Consolas"/>
+              </a:rPr>
+              <a:t># Example: scan a clone for supply-chain and pin debt</a:t>
+            </a:r>
+          </a:p>
+          <a:p>
+            <a:pPr>
+              <a:spcAft>
+                <a:spcPts val="400"/>
+              </a:spcAft>
+            </a:pPr>
+            <a:r>
+              <a:rPr sz="1400" b="0">
+                <a:solidFill>
+                  <a:srgbClr val="2A3B46"/>
+                </a:solidFill>
+                <a:latin typeface="Consolas"/>
+              </a:rPr>
+              <a:t>pip install gitlab-compliance</a:t>
+            </a:r>
+          </a:p>
+          <a:p>
+            <a:pPr>
+              <a:spcAft>
+                <a:spcPts val="400"/>
+              </a:spcAft>
+            </a:pPr>
+            <a:r>
+              <a:rPr sz="1400" b="1">
+                <a:solidFill>
+                  <a:srgbClr val="1A6B63"/>
+                </a:solidFill>
+                <a:latin typeface="Consolas"/>
+              </a:rPr>
+              <a:t>gitlab-compliance check -f policies/security/ -p .gitlab-ci.yml \</a:t>
+            </a:r>
+          </a:p>
+          <a:p>
+            <a:pPr>
+              <a:spcAft>
+                <a:spcPts val="400"/>
+              </a:spcAft>
+            </a:pPr>
+            <a:r>
+              <a:rPr sz="1400" b="1">
+                <a:solidFill>
+                  <a:srgbClr val="1A6B63"/>
+                </a:solidFill>
+                <a:latin typeface="Consolas"/>
+              </a:rPr>
+              <a:t>  --format markdown -o COMPLIANCE-REPORT.md</a:t>
+            </a:r>
+          </a:p>
+          <a:p>
+            <a:pPr>
+              <a:spcAft>
+                <a:spcPts val="400"/>
+              </a:spcAft>
+            </a:pPr>
+            <a:r>
+              <a:rPr sz="1300" b="0">
+                <a:solidFill>
+                  <a:srgbClr val="5E707A"/>
+                </a:solidFill>
+                <a:latin typeface="Consolas"/>
+              </a:rPr>
+              <a:t># Optional: --with-builtin · --project · --strict for API hardening</a:t>
+            </a:r>
+          </a:p>
+        </p:txBody>
+      </p:sp>
+      <p:sp>
+        <p:nvSpPr>
+          <p:cNvPr id="12" name="TextBox 11"/>
+          <p:cNvSpPr txBox="1"/>
+          <p:nvPr/>
+        </p:nvSpPr>
+        <p:spPr>
+          <a:xfrm>
+            <a:off x="731520" y="4114800"/>
+            <a:ext cx="10515600" cy="1828800"/>
           </a:xfrm>
           <a:prstGeom prst="rect">
             <a:avLst/>
@@ -14373,13 +15611,13 @@
               </a:spcAft>
             </a:pPr>
             <a:r>
-              <a:rPr sz="1400" b="0">
+              <a:rPr sz="1500" b="0">
                 <a:solidFill>
                   <a:srgbClr val="2A3B46"/>
                 </a:solidFill>
                 <a:latin typeface="Calibri"/>
               </a:rPr>
-              <a:t>Detect floating tags, unpinned includes, release lag, digest gaps</a:t>
+              <a:t>Platform teams can batch-scan migration cohorts and rank projects by debt severity</a:t>
             </a:r>
           </a:p>
           <a:p>
@@ -14389,13 +15627,13 @@
               </a:spcAft>
             </a:pPr>
             <a:r>
-              <a:rPr sz="1400" b="0">
+              <a:rPr sz="1500" b="0">
                 <a:solidFill>
                   <a:srgbClr val="2A3B46"/>
                 </a:solidFill>
                 <a:latin typeface="Calibri"/>
               </a:rPr>
-              <a:t>Age windows (e.g. 30-day adoption, 90-day lag) for pragmatic upgrades</a:t>
+              <a:t>Produces artefacts for Dedicated cutover boards and Nexus exception reviews</a:t>
             </a:r>
           </a:p>
           <a:p>
@@ -14405,194 +15643,13 @@
               </a:spcAft>
             </a:pPr>
             <a:r>
-              <a:rPr sz="1400" b="0">
+              <a:rPr sz="1500" b="0">
                 <a:solidFill>
                   <a:srgbClr val="2A3B46"/>
                 </a:solidFill>
                 <a:latin typeface="Calibri"/>
               </a:rPr>
-              <a:t>Pin job/service images to @sha256 digests</a:t>
-            </a:r>
-          </a:p>
-          <a:p>
-            <a:pPr>
-              <a:spcAft>
-                <a:spcPts val="800"/>
-              </a:spcAft>
-            </a:pPr>
-            <a:r>
-              <a:rPr sz="1400" b="0">
-                <a:solidFill>
-                  <a:srgbClr val="2A3B46"/>
-                </a:solidFill>
-                <a:latin typeface="Calibri"/>
-              </a:rPr>
-              <a:t>Bump outdated project/component include refs to latest semver</a:t>
-            </a:r>
-          </a:p>
-        </p:txBody>
-      </p:sp>
-      <p:sp>
-        <p:nvSpPr>
-          <p:cNvPr id="12" name="Rectangle 11"/>
-          <p:cNvSpPr/>
-          <p:nvPr/>
-        </p:nvSpPr>
-        <p:spPr>
-          <a:xfrm>
-            <a:off x="6217920" y="1463040"/>
-            <a:ext cx="5394960" cy="4297680"/>
-          </a:xfrm>
-          <a:prstGeom prst="rect">
-            <a:avLst/>
-          </a:prstGeom>
-          <a:solidFill>
-            <a:srgbClr val="FFFFFF"/>
-          </a:solidFill>
-          <a:ln>
-            <a:noFill/>
-          </a:ln>
-        </p:spPr>
-        <p:style>
-          <a:lnRef idx="1">
-            <a:schemeClr val="accent1"/>
-          </a:lnRef>
-          <a:fillRef idx="3">
-            <a:schemeClr val="accent1"/>
-          </a:fillRef>
-          <a:effectRef idx="2">
-            <a:schemeClr val="accent1"/>
-          </a:effectRef>
-          <a:fontRef idx="minor">
-            <a:schemeClr val="lt1"/>
-          </a:fontRef>
-        </p:style>
-        <p:txBody>
-          <a:bodyPr rtlCol="0" anchor="ctr"/>
-          <a:lstStyle/>
-          <a:p>
-            <a:pPr algn="ctr"/>
-          </a:p>
-        </p:txBody>
-      </p:sp>
-      <p:sp>
-        <p:nvSpPr>
-          <p:cNvPr id="13" name="TextBox 12"/>
-          <p:cNvSpPr txBox="1"/>
-          <p:nvPr/>
-        </p:nvSpPr>
-        <p:spPr>
-          <a:xfrm>
-            <a:off x="6492240" y="1691640"/>
-            <a:ext cx="4846320" cy="365760"/>
-          </a:xfrm>
-          <a:prstGeom prst="rect">
-            <a:avLst/>
-          </a:prstGeom>
-          <a:noFill/>
-        </p:spPr>
-        <p:txBody>
-          <a:bodyPr wrap="square">
-            <a:spAutoFit/>
-          </a:bodyPr>
-          <a:lstStyle/>
-          <a:p>
-            <a:pPr algn="l"/>
-            <a:r>
-              <a:rPr sz="1600" b="1">
-                <a:solidFill>
-                  <a:srgbClr val="102230"/>
-                </a:solidFill>
-                <a:latin typeface="Calibri"/>
-              </a:rPr>
-              <a:t>How it supports programmes</a:t>
-            </a:r>
-          </a:p>
-        </p:txBody>
-      </p:sp>
-      <p:sp>
-        <p:nvSpPr>
-          <p:cNvPr id="14" name="TextBox 13"/>
-          <p:cNvSpPr txBox="1"/>
-          <p:nvPr/>
-        </p:nvSpPr>
-        <p:spPr>
-          <a:xfrm>
-            <a:off x="6492240" y="2240280"/>
-            <a:ext cx="4846320" cy="3200400"/>
-          </a:xfrm>
-          <a:prstGeom prst="rect">
-            <a:avLst/>
-          </a:prstGeom>
-          <a:noFill/>
-        </p:spPr>
-        <p:txBody>
-          <a:bodyPr wrap="square">
-            <a:spAutoFit/>
-          </a:bodyPr>
-          <a:lstStyle/>
-          <a:p>
-            <a:pPr>
-              <a:spcAft>
-                <a:spcPts val="800"/>
-              </a:spcAft>
-            </a:pPr>
-            <a:r>
-              <a:rPr sz="1400" b="0">
-                <a:solidFill>
-                  <a:srgbClr val="2A3B46"/>
-                </a:solidFill>
-                <a:latin typeface="Calibri"/>
-              </a:rPr>
-              <a:t>--fix-supply-chain rewrites before policies re-run</a:t>
-            </a:r>
-          </a:p>
-          <a:p>
-            <a:pPr>
-              <a:spcAft>
-                <a:spcPts val="800"/>
-              </a:spcAft>
-            </a:pPr>
-            <a:r>
-              <a:rPr sz="1400" b="0">
-                <a:solidFill>
-                  <a:srgbClr val="2A3B46"/>
-                </a:solidFill>
-                <a:latin typeface="Calibri"/>
-              </a:rPr>
-              <a:t>--fix-policies remediates allowlisted failed scenarios only</a:t>
-            </a:r>
-          </a:p>
-          <a:p>
-            <a:pPr>
-              <a:spcAft>
-                <a:spcPts val="800"/>
-              </a:spcAft>
-            </a:pPr>
-            <a:r>
-              <a:rPr sz="1400" b="0">
-                <a:solidFill>
-                  <a:srgbClr val="2A3B46"/>
-                </a:solidFill>
-                <a:latin typeface="Calibri"/>
-              </a:rPr>
-              <a:t>--create-mr opens a reviewable supply-chain fix MR</a:t>
-            </a:r>
-          </a:p>
-          <a:p>
-            <a:pPr>
-              <a:spcAft>
-                <a:spcPts val="800"/>
-              </a:spcAft>
-            </a:pPr>
-            <a:r>
-              <a:rPr sz="1400" b="0">
-                <a:solidFill>
-                  <a:srgbClr val="2A3B46"/>
-                </a:solidFill>
-                <a:latin typeface="Calibri"/>
-              </a:rPr>
-              <a:t>Scheduled CI job can keep debt from re-accumulating</a:t>
+              <a:t>Same policies later become CI gates — no double standard between discovery and enforcement</a:t>
             </a:r>
           </a:p>
         </p:txBody>
@@ -14774,7 +15831,7 @@
                 </a:solidFill>
                 <a:latin typeface="Calibri"/>
               </a:rPr>
-              <a:t>document / generate — make debt discussable</a:t>
+              <a:t>Supply chain — close the debt Nexus cares about</a:t>
             </a:r>
           </a:p>
         </p:txBody>
@@ -14809,7 +15866,7 @@
                 </a:solidFill>
                 <a:latin typeface="Calibri"/>
               </a:rPr>
-              <a:t>Living pipeline docs for migration and compliance forums</a:t>
+              <a:t>--fix-supply-chain · --fix-policies · --create-mr</a:t>
             </a:r>
           </a:p>
         </p:txBody>
@@ -14844,7 +15901,7 @@
                 </a:solidFill>
                 <a:latin typeface="Calibri"/>
               </a:rPr>
-              <a:t>Impact briefing  ·  Dedicated migration · Nexus · tech debt</a:t>
+              <a:t>Impact briefing  ·  Dedicated · Nexus · tech debt · ongoing standards</a:t>
             </a:r>
           </a:p>
         </p:txBody>
@@ -14879,7 +15936,7 @@
                 </a:solidFill>
                 <a:latin typeface="Calibri"/>
               </a:rPr>
-              <a:t>9 / 15</a:t>
+              <a:t>9 / 16</a:t>
             </a:r>
           </a:p>
         </p:txBody>
@@ -14929,85 +15986,42 @@
       </p:sp>
       <p:sp>
         <p:nvSpPr>
-          <p:cNvPr id="10" name="Rectangle 9"/>
-          <p:cNvSpPr/>
-          <p:nvPr/>
-        </p:nvSpPr>
-        <p:spPr>
-          <a:xfrm>
-            <a:off x="594360" y="1463040"/>
-            <a:ext cx="5394960" cy="548640"/>
-          </a:xfrm>
-          <a:prstGeom prst="rect">
-            <a:avLst/>
-          </a:prstGeom>
-          <a:solidFill>
-            <a:srgbClr val="1A6B63"/>
-          </a:solidFill>
-          <a:ln>
-            <a:noFill/>
-          </a:ln>
-        </p:spPr>
-        <p:style>
-          <a:lnRef idx="1">
-            <a:schemeClr val="accent1"/>
-          </a:lnRef>
-          <a:fillRef idx="3">
-            <a:schemeClr val="accent1"/>
-          </a:fillRef>
-          <a:effectRef idx="2">
-            <a:schemeClr val="accent1"/>
-          </a:effectRef>
-          <a:fontRef idx="minor">
-            <a:schemeClr val="lt1"/>
-          </a:fontRef>
-        </p:style>
-        <p:txBody>
-          <a:bodyPr rtlCol="0" anchor="ctr"/>
-          <a:lstStyle/>
-          <a:p>
-            <a:pPr algn="ctr"/>
+          <p:cNvPr id="10" name="TextBox 9"/>
+          <p:cNvSpPr txBox="1"/>
+          <p:nvPr/>
+        </p:nvSpPr>
+        <p:spPr>
+          <a:xfrm>
+            <a:off x="868680" y="1691640"/>
+            <a:ext cx="4846320" cy="365760"/>
+          </a:xfrm>
+          <a:prstGeom prst="rect">
+            <a:avLst/>
+          </a:prstGeom>
+          <a:noFill/>
+        </p:spPr>
+        <p:txBody>
+          <a:bodyPr wrap="square">
+            <a:spAutoFit/>
+          </a:bodyPr>
+          <a:lstStyle/>
+          <a:p>
+            <a:pPr algn="l"/>
+            <a:r>
+              <a:rPr sz="1600" b="1">
+                <a:solidFill>
+                  <a:srgbClr val="102230"/>
+                </a:solidFill>
+                <a:latin typeface="Calibri"/>
+              </a:rPr>
+              <a:t>What it finds / fixes</a:t>
+            </a:r>
           </a:p>
         </p:txBody>
       </p:sp>
       <p:sp>
         <p:nvSpPr>
           <p:cNvPr id="11" name="TextBox 10"/>
-          <p:cNvSpPr txBox="1"/>
-          <p:nvPr/>
-        </p:nvSpPr>
-        <p:spPr>
-          <a:xfrm>
-            <a:off x="822960" y="1572768"/>
-            <a:ext cx="4937760" cy="365760"/>
-          </a:xfrm>
-          <a:prstGeom prst="rect">
-            <a:avLst/>
-          </a:prstGeom>
-          <a:noFill/>
-        </p:spPr>
-        <p:txBody>
-          <a:bodyPr wrap="square">
-            <a:spAutoFit/>
-          </a:bodyPr>
-          <a:lstStyle/>
-          <a:p>
-            <a:pPr algn="l"/>
-            <a:r>
-              <a:rPr sz="1700" b="1">
-                <a:solidFill>
-                  <a:srgbClr val="FFFFFF"/>
-                </a:solidFill>
-                <a:latin typeface="Calibri"/>
-              </a:rPr>
-              <a:t>generate</a:t>
-            </a:r>
-          </a:p>
-        </p:txBody>
-      </p:sp>
-      <p:sp>
-        <p:nvSpPr>
-          <p:cNvPr id="12" name="TextBox 11"/>
           <p:cNvSpPr txBox="1"/>
           <p:nvPr/>
         </p:nvSpPr>
@@ -15039,7 +16053,7 @@
                 </a:solidFill>
                 <a:latin typeface="Calibri"/>
               </a:rPr>
-              <a:t>Full pipeline reference from .gitlab-ci.yml</a:t>
+              <a:t>Detect floating tags, unpinned includes, release lag, digest gaps</a:t>
             </a:r>
           </a:p>
           <a:p>
@@ -15055,7 +16069,7 @@
                 </a:solidFill>
                 <a:latin typeface="Calibri"/>
               </a:rPr>
-              <a:t>Formats: markdown, swagger-markdown, HTML</a:t>
+              <a:t>Age windows (e.g. 30-day adoption, 90-day lag) for pragmatic upgrades</a:t>
             </a:r>
           </a:p>
           <a:p>
@@ -15071,7 +16085,7 @@
                 </a:solidFill>
                 <a:latin typeface="Calibri"/>
               </a:rPr>
-              <a:t>Exclude/group to match audience</a:t>
+              <a:t>Pin job/service images to @sha256 digests</a:t>
             </a:r>
           </a:p>
           <a:p>
@@ -15087,14 +16101,14 @@
                 </a:solidFill>
                 <a:latin typeface="Calibri"/>
               </a:rPr>
-              <a:t>Attach as CI artefact for Dedicated review packs</a:t>
-            </a:r>
-          </a:p>
-        </p:txBody>
-      </p:sp>
-      <p:sp>
-        <p:nvSpPr>
-          <p:cNvPr id="13" name="Rectangle 12"/>
+              <a:t>Bump outdated project/component include refs to latest semver</a:t>
+            </a:r>
+          </a:p>
+        </p:txBody>
+      </p:sp>
+      <p:sp>
+        <p:nvSpPr>
+          <p:cNvPr id="12" name="Rectangle 11"/>
           <p:cNvSpPr/>
           <p:nvPr/>
         </p:nvSpPr>
@@ -15137,57 +16151,14 @@
       </p:sp>
       <p:sp>
         <p:nvSpPr>
-          <p:cNvPr id="14" name="Rectangle 13"/>
-          <p:cNvSpPr/>
-          <p:nvPr/>
-        </p:nvSpPr>
-        <p:spPr>
-          <a:xfrm>
-            <a:off x="6217920" y="1463040"/>
-            <a:ext cx="5394960" cy="548640"/>
-          </a:xfrm>
-          <a:prstGeom prst="rect">
-            <a:avLst/>
-          </a:prstGeom>
-          <a:solidFill>
-            <a:srgbClr val="C47A28"/>
-          </a:solidFill>
-          <a:ln>
-            <a:noFill/>
-          </a:ln>
-        </p:spPr>
-        <p:style>
-          <a:lnRef idx="1">
-            <a:schemeClr val="accent1"/>
-          </a:lnRef>
-          <a:fillRef idx="3">
-            <a:schemeClr val="accent1"/>
-          </a:fillRef>
-          <a:effectRef idx="2">
-            <a:schemeClr val="accent1"/>
-          </a:effectRef>
-          <a:fontRef idx="minor">
-            <a:schemeClr val="lt1"/>
-          </a:fontRef>
-        </p:style>
-        <p:txBody>
-          <a:bodyPr rtlCol="0" anchor="ctr"/>
-          <a:lstStyle/>
-          <a:p>
-            <a:pPr algn="ctr"/>
-          </a:p>
-        </p:txBody>
-      </p:sp>
-      <p:sp>
-        <p:nvSpPr>
-          <p:cNvPr id="15" name="TextBox 14"/>
-          <p:cNvSpPr txBox="1"/>
-          <p:nvPr/>
-        </p:nvSpPr>
-        <p:spPr>
-          <a:xfrm>
-            <a:off x="6446520" y="1572768"/>
-            <a:ext cx="4937760" cy="365760"/>
+          <p:cNvPr id="13" name="TextBox 12"/>
+          <p:cNvSpPr txBox="1"/>
+          <p:nvPr/>
+        </p:nvSpPr>
+        <p:spPr>
+          <a:xfrm>
+            <a:off x="6492240" y="1691640"/>
+            <a:ext cx="4846320" cy="365760"/>
           </a:xfrm>
           <a:prstGeom prst="rect">
             <a:avLst/>
@@ -15202,20 +16173,20 @@
           <a:p>
             <a:pPr algn="l"/>
             <a:r>
-              <a:rPr sz="1700" b="1">
-                <a:solidFill>
-                  <a:srgbClr val="FFFFFF"/>
-                </a:solidFill>
-                <a:latin typeface="Calibri"/>
-              </a:rPr>
-              <a:t>document gitstrings</a:t>
-            </a:r>
-          </a:p>
-        </p:txBody>
-      </p:sp>
-      <p:sp>
-        <p:nvSpPr>
-          <p:cNvPr id="16" name="TextBox 15"/>
+              <a:rPr sz="1600" b="1">
+                <a:solidFill>
+                  <a:srgbClr val="102230"/>
+                </a:solidFill>
+                <a:latin typeface="Calibri"/>
+              </a:rPr>
+              <a:t>How it supports programmes</a:t>
+            </a:r>
+          </a:p>
+        </p:txBody>
+      </p:sp>
+      <p:sp>
+        <p:nvSpPr>
+          <p:cNvPr id="14" name="TextBox 13"/>
           <p:cNvSpPr txBox="1"/>
           <p:nvPr/>
         </p:nvSpPr>
@@ -15247,7 +16218,7 @@
                 </a:solidFill>
                 <a:latin typeface="Calibri"/>
               </a:rPr>
-              <a:t>Fragment docs for inputs, variables, snippets</a:t>
+              <a:t>--fix-supply-chain rewrites before policies re-run</a:t>
             </a:r>
           </a:p>
           <a:p>
@@ -15263,7 +16234,7 @@
                 </a:solidFill>
                 <a:latin typeface="Calibri"/>
               </a:rPr>
-              <a:t>Decorators in YAML or markdown fences</a:t>
+              <a:t>--fix-policies remediates allowlisted failed scenarios only</a:t>
             </a:r>
           </a:p>
           <a:p>
@@ -15279,7 +16250,7 @@
                 </a:solidFill>
                 <a:latin typeface="Calibri"/>
               </a:rPr>
-              <a:t>Keeps READMEs honest without rewriting by hand</a:t>
+              <a:t>--create-mr opens a reviewable supply-chain fix MR</a:t>
             </a:r>
           </a:p>
           <a:p>
@@ -15295,7 +16266,7 @@
                 </a:solidFill>
                 <a:latin typeface="Calibri"/>
               </a:rPr>
-              <a:t>Helps Nexus/security reviewers see intent quickly</a:t>
+              <a:t>Scheduled CI job can keep debt from re-accumulating</a:t>
             </a:r>
           </a:p>
         </p:txBody>
